--- a/codepulse-documentation/CodePulse.pptx
+++ b/codepulse-documentation/CodePulse.pptx
@@ -4,41 +4,37 @@
   <p:sldMasterIdLst>
     <p:sldMasterId id="2147483648" r:id="rId1"/>
   </p:sldMasterIdLst>
+  <p:notesMasterIdLst>
+    <p:notesMasterId r:id="rId14"/>
+  </p:notesMasterIdLst>
   <p:sldIdLst>
     <p:sldId id="256" r:id="rId2"/>
     <p:sldId id="257" r:id="rId3"/>
     <p:sldId id="258" r:id="rId4"/>
     <p:sldId id="259" r:id="rId5"/>
     <p:sldId id="260" r:id="rId6"/>
-    <p:sldId id="261" r:id="rId7"/>
-    <p:sldId id="262" r:id="rId8"/>
-    <p:sldId id="263" r:id="rId9"/>
-    <p:sldId id="264" r:id="rId10"/>
-    <p:sldId id="265" r:id="rId11"/>
-    <p:sldId id="266" r:id="rId12"/>
-    <p:sldId id="267" r:id="rId13"/>
-    <p:sldId id="268" r:id="rId14"/>
-    <p:sldId id="269" r:id="rId15"/>
-    <p:sldId id="270" r:id="rId16"/>
-    <p:sldId id="271" r:id="rId17"/>
-    <p:sldId id="272" r:id="rId18"/>
-    <p:sldId id="273" r:id="rId19"/>
-    <p:sldId id="275" r:id="rId20"/>
+    <p:sldId id="263" r:id="rId7"/>
+    <p:sldId id="264" r:id="rId8"/>
+    <p:sldId id="265" r:id="rId9"/>
+    <p:sldId id="266" r:id="rId10"/>
+    <p:sldId id="267" r:id="rId11"/>
+    <p:sldId id="268" r:id="rId12"/>
+    <p:sldId id="275" r:id="rId13"/>
   </p:sldIdLst>
   <p:sldSz cx="18288000" cy="10287000"/>
   <p:notesSz cx="6858000" cy="9144000"/>
   <p:embeddedFontLst>
     <p:embeddedFont>
       <p:font typeface="Koho" panose="020B0604020202020204" charset="-34"/>
-      <p:regular r:id="rId21"/>
+      <p:regular r:id="rId15"/>
     </p:embeddedFont>
     <p:embeddedFont>
       <p:font typeface="Koho Bold" panose="020B0604020202020204" charset="-34"/>
-      <p:regular r:id="rId22"/>
+      <p:regular r:id="rId16"/>
     </p:embeddedFont>
     <p:embeddedFont>
       <p:font typeface="Neo Tech Bold" panose="020B0604020202020204" charset="0"/>
-      <p:regular r:id="rId23"/>
+      <p:regular r:id="rId17"/>
     </p:embeddedFont>
   </p:embeddedFontLst>
   <p:defaultTextStyle>
@@ -155,6 +151,356 @@
 </p:presentation>
 </file>
 
+<file path=ppt/notesMasters/notesMaster1.xml><?xml version="1.0" encoding="utf-8"?>
+<p:notesMaster xmlns:a="http://schemas.openxmlformats.org/drawingml/2006/main" xmlns:r="http://schemas.openxmlformats.org/officeDocument/2006/relationships" xmlns:p="http://schemas.openxmlformats.org/presentationml/2006/main">
+  <p:cSld>
+    <p:bg>
+      <p:bgRef idx="1001">
+        <a:schemeClr val="bg1"/>
+      </p:bgRef>
+    </p:bg>
+    <p:spTree>
+      <p:nvGrpSpPr>
+        <p:cNvPr id="1" name=""/>
+        <p:cNvGrpSpPr/>
+        <p:nvPr/>
+      </p:nvGrpSpPr>
+      <p:grpSpPr>
+        <a:xfrm>
+          <a:off x="0" y="0"/>
+          <a:ext cx="0" cy="0"/>
+          <a:chOff x="0" y="0"/>
+          <a:chExt cx="0" cy="0"/>
+        </a:xfrm>
+      </p:grpSpPr>
+      <p:sp>
+        <p:nvSpPr>
+          <p:cNvPr id="2" name="Header Placeholder 1"/>
+          <p:cNvSpPr>
+            <a:spLocks noGrp="1"/>
+          </p:cNvSpPr>
+          <p:nvPr>
+            <p:ph type="hdr" sz="quarter"/>
+          </p:nvPr>
+        </p:nvSpPr>
+        <p:spPr>
+          <a:xfrm>
+            <a:off x="0" y="0"/>
+            <a:ext cx="2971800" cy="458788"/>
+          </a:xfrm>
+          <a:prstGeom prst="rect">
+            <a:avLst/>
+          </a:prstGeom>
+        </p:spPr>
+        <p:txBody>
+          <a:bodyPr vert="horz" lIns="91440" tIns="45720" rIns="91440" bIns="45720" rtlCol="0"/>
+          <a:lstStyle>
+            <a:lvl1pPr algn="l">
+              <a:defRPr sz="1200"/>
+            </a:lvl1pPr>
+          </a:lstStyle>
+          <a:p>
+            <a:endParaRPr lang="en-SG"/>
+          </a:p>
+        </p:txBody>
+      </p:sp>
+      <p:sp>
+        <p:nvSpPr>
+          <p:cNvPr id="3" name="Date Placeholder 2"/>
+          <p:cNvSpPr>
+            <a:spLocks noGrp="1"/>
+          </p:cNvSpPr>
+          <p:nvPr>
+            <p:ph type="dt" idx="1"/>
+          </p:nvPr>
+        </p:nvSpPr>
+        <p:spPr>
+          <a:xfrm>
+            <a:off x="3884613" y="0"/>
+            <a:ext cx="2971800" cy="458788"/>
+          </a:xfrm>
+          <a:prstGeom prst="rect">
+            <a:avLst/>
+          </a:prstGeom>
+        </p:spPr>
+        <p:txBody>
+          <a:bodyPr vert="horz" lIns="91440" tIns="45720" rIns="91440" bIns="45720" rtlCol="0"/>
+          <a:lstStyle>
+            <a:lvl1pPr algn="r">
+              <a:defRPr sz="1200"/>
+            </a:lvl1pPr>
+          </a:lstStyle>
+          <a:p>
+            <a:fld id="{643553BB-8A3D-42A7-A2EF-DDBC67D27514}" type="datetimeFigureOut">
+              <a:rPr lang="en-SG" smtClean="0"/>
+              <a:t>19/5/2026</a:t>
+            </a:fld>
+            <a:endParaRPr lang="en-SG"/>
+          </a:p>
+        </p:txBody>
+      </p:sp>
+      <p:sp>
+        <p:nvSpPr>
+          <p:cNvPr id="4" name="Slide Image Placeholder 3"/>
+          <p:cNvSpPr>
+            <a:spLocks noGrp="1" noRot="1" noChangeAspect="1"/>
+          </p:cNvSpPr>
+          <p:nvPr>
+            <p:ph type="sldImg" idx="2"/>
+          </p:nvPr>
+        </p:nvSpPr>
+        <p:spPr>
+          <a:xfrm>
+            <a:off x="685800" y="1143000"/>
+            <a:ext cx="5486400" cy="3086100"/>
+          </a:xfrm>
+          <a:prstGeom prst="rect">
+            <a:avLst/>
+          </a:prstGeom>
+          <a:noFill/>
+          <a:ln w="12700">
+            <a:solidFill>
+              <a:prstClr val="black"/>
+            </a:solidFill>
+          </a:ln>
+        </p:spPr>
+        <p:txBody>
+          <a:bodyPr vert="horz" lIns="91440" tIns="45720" rIns="91440" bIns="45720" rtlCol="0" anchor="ctr"/>
+          <a:lstStyle/>
+          <a:p>
+            <a:endParaRPr lang="en-SG"/>
+          </a:p>
+        </p:txBody>
+      </p:sp>
+      <p:sp>
+        <p:nvSpPr>
+          <p:cNvPr id="5" name="Notes Placeholder 4"/>
+          <p:cNvSpPr>
+            <a:spLocks noGrp="1"/>
+          </p:cNvSpPr>
+          <p:nvPr>
+            <p:ph type="body" sz="quarter" idx="3"/>
+          </p:nvPr>
+        </p:nvSpPr>
+        <p:spPr>
+          <a:xfrm>
+            <a:off x="685800" y="4400550"/>
+            <a:ext cx="5486400" cy="3600450"/>
+          </a:xfrm>
+          <a:prstGeom prst="rect">
+            <a:avLst/>
+          </a:prstGeom>
+        </p:spPr>
+        <p:txBody>
+          <a:bodyPr vert="horz" lIns="91440" tIns="45720" rIns="91440" bIns="45720" rtlCol="0"/>
+          <a:lstStyle/>
+          <a:p>
+            <a:pPr lvl="0"/>
+            <a:r>
+              <a:rPr lang="en-US"/>
+              <a:t>Click to edit Master text styles</a:t>
+            </a:r>
+          </a:p>
+          <a:p>
+            <a:pPr lvl="1"/>
+            <a:r>
+              <a:rPr lang="en-US"/>
+              <a:t>Second level</a:t>
+            </a:r>
+          </a:p>
+          <a:p>
+            <a:pPr lvl="2"/>
+            <a:r>
+              <a:rPr lang="en-US"/>
+              <a:t>Third level</a:t>
+            </a:r>
+          </a:p>
+          <a:p>
+            <a:pPr lvl="3"/>
+            <a:r>
+              <a:rPr lang="en-US"/>
+              <a:t>Fourth level</a:t>
+            </a:r>
+          </a:p>
+          <a:p>
+            <a:pPr lvl="4"/>
+            <a:r>
+              <a:rPr lang="en-US"/>
+              <a:t>Fifth level</a:t>
+            </a:r>
+            <a:endParaRPr lang="en-SG"/>
+          </a:p>
+        </p:txBody>
+      </p:sp>
+      <p:sp>
+        <p:nvSpPr>
+          <p:cNvPr id="6" name="Footer Placeholder 5"/>
+          <p:cNvSpPr>
+            <a:spLocks noGrp="1"/>
+          </p:cNvSpPr>
+          <p:nvPr>
+            <p:ph type="ftr" sz="quarter" idx="4"/>
+          </p:nvPr>
+        </p:nvSpPr>
+        <p:spPr>
+          <a:xfrm>
+            <a:off x="0" y="8685213"/>
+            <a:ext cx="2971800" cy="458787"/>
+          </a:xfrm>
+          <a:prstGeom prst="rect">
+            <a:avLst/>
+          </a:prstGeom>
+        </p:spPr>
+        <p:txBody>
+          <a:bodyPr vert="horz" lIns="91440" tIns="45720" rIns="91440" bIns="45720" rtlCol="0" anchor="b"/>
+          <a:lstStyle>
+            <a:lvl1pPr algn="l">
+              <a:defRPr sz="1200"/>
+            </a:lvl1pPr>
+          </a:lstStyle>
+          <a:p>
+            <a:endParaRPr lang="en-SG"/>
+          </a:p>
+        </p:txBody>
+      </p:sp>
+      <p:sp>
+        <p:nvSpPr>
+          <p:cNvPr id="7" name="Slide Number Placeholder 6"/>
+          <p:cNvSpPr>
+            <a:spLocks noGrp="1"/>
+          </p:cNvSpPr>
+          <p:nvPr>
+            <p:ph type="sldNum" sz="quarter" idx="5"/>
+          </p:nvPr>
+        </p:nvSpPr>
+        <p:spPr>
+          <a:xfrm>
+            <a:off x="3884613" y="8685213"/>
+            <a:ext cx="2971800" cy="458787"/>
+          </a:xfrm>
+          <a:prstGeom prst="rect">
+            <a:avLst/>
+          </a:prstGeom>
+        </p:spPr>
+        <p:txBody>
+          <a:bodyPr vert="horz" lIns="91440" tIns="45720" rIns="91440" bIns="45720" rtlCol="0" anchor="b"/>
+          <a:lstStyle>
+            <a:lvl1pPr algn="r">
+              <a:defRPr sz="1200"/>
+            </a:lvl1pPr>
+          </a:lstStyle>
+          <a:p>
+            <a:fld id="{82E5C2C2-C669-4536-ABFA-443B354483F5}" type="slidenum">
+              <a:rPr lang="en-SG" smtClean="0"/>
+              <a:t>‹#›</a:t>
+            </a:fld>
+            <a:endParaRPr lang="en-SG"/>
+          </a:p>
+        </p:txBody>
+      </p:sp>
+    </p:spTree>
+    <p:extLst>
+      <p:ext uri="{BB962C8B-B14F-4D97-AF65-F5344CB8AC3E}">
+        <p14:creationId xmlns:p14="http://schemas.microsoft.com/office/powerpoint/2010/main" val="3755502637"/>
+      </p:ext>
+    </p:extLst>
+  </p:cSld>
+  <p:clrMap bg1="lt1" tx1="dk1" bg2="lt2" tx2="dk2" accent1="accent1" accent2="accent2" accent3="accent3" accent4="accent4" accent5="accent5" accent6="accent6" hlink="hlink" folHlink="folHlink"/>
+  <p:notesStyle>
+    <a:lvl1pPr marL="0" algn="l" defTabSz="914400" rtl="0" eaLnBrk="1" latinLnBrk="0" hangingPunct="1">
+      <a:defRPr sz="1200" kern="1200">
+        <a:solidFill>
+          <a:schemeClr val="tx1"/>
+        </a:solidFill>
+        <a:latin typeface="+mn-lt"/>
+        <a:ea typeface="+mn-ea"/>
+        <a:cs typeface="+mn-cs"/>
+      </a:defRPr>
+    </a:lvl1pPr>
+    <a:lvl2pPr marL="457200" algn="l" defTabSz="914400" rtl="0" eaLnBrk="1" latinLnBrk="0" hangingPunct="1">
+      <a:defRPr sz="1200" kern="1200">
+        <a:solidFill>
+          <a:schemeClr val="tx1"/>
+        </a:solidFill>
+        <a:latin typeface="+mn-lt"/>
+        <a:ea typeface="+mn-ea"/>
+        <a:cs typeface="+mn-cs"/>
+      </a:defRPr>
+    </a:lvl2pPr>
+    <a:lvl3pPr marL="914400" algn="l" defTabSz="914400" rtl="0" eaLnBrk="1" latinLnBrk="0" hangingPunct="1">
+      <a:defRPr sz="1200" kern="1200">
+        <a:solidFill>
+          <a:schemeClr val="tx1"/>
+        </a:solidFill>
+        <a:latin typeface="+mn-lt"/>
+        <a:ea typeface="+mn-ea"/>
+        <a:cs typeface="+mn-cs"/>
+      </a:defRPr>
+    </a:lvl3pPr>
+    <a:lvl4pPr marL="1371600" algn="l" defTabSz="914400" rtl="0" eaLnBrk="1" latinLnBrk="0" hangingPunct="1">
+      <a:defRPr sz="1200" kern="1200">
+        <a:solidFill>
+          <a:schemeClr val="tx1"/>
+        </a:solidFill>
+        <a:latin typeface="+mn-lt"/>
+        <a:ea typeface="+mn-ea"/>
+        <a:cs typeface="+mn-cs"/>
+      </a:defRPr>
+    </a:lvl4pPr>
+    <a:lvl5pPr marL="1828800" algn="l" defTabSz="914400" rtl="0" eaLnBrk="1" latinLnBrk="0" hangingPunct="1">
+      <a:defRPr sz="1200" kern="1200">
+        <a:solidFill>
+          <a:schemeClr val="tx1"/>
+        </a:solidFill>
+        <a:latin typeface="+mn-lt"/>
+        <a:ea typeface="+mn-ea"/>
+        <a:cs typeface="+mn-cs"/>
+      </a:defRPr>
+    </a:lvl5pPr>
+    <a:lvl6pPr marL="2286000" algn="l" defTabSz="914400" rtl="0" eaLnBrk="1" latinLnBrk="0" hangingPunct="1">
+      <a:defRPr sz="1200" kern="1200">
+        <a:solidFill>
+          <a:schemeClr val="tx1"/>
+        </a:solidFill>
+        <a:latin typeface="+mn-lt"/>
+        <a:ea typeface="+mn-ea"/>
+        <a:cs typeface="+mn-cs"/>
+      </a:defRPr>
+    </a:lvl6pPr>
+    <a:lvl7pPr marL="2743200" algn="l" defTabSz="914400" rtl="0" eaLnBrk="1" latinLnBrk="0" hangingPunct="1">
+      <a:defRPr sz="1200" kern="1200">
+        <a:solidFill>
+          <a:schemeClr val="tx1"/>
+        </a:solidFill>
+        <a:latin typeface="+mn-lt"/>
+        <a:ea typeface="+mn-ea"/>
+        <a:cs typeface="+mn-cs"/>
+      </a:defRPr>
+    </a:lvl7pPr>
+    <a:lvl8pPr marL="3200400" algn="l" defTabSz="914400" rtl="0" eaLnBrk="1" latinLnBrk="0" hangingPunct="1">
+      <a:defRPr sz="1200" kern="1200">
+        <a:solidFill>
+          <a:schemeClr val="tx1"/>
+        </a:solidFill>
+        <a:latin typeface="+mn-lt"/>
+        <a:ea typeface="+mn-ea"/>
+        <a:cs typeface="+mn-cs"/>
+      </a:defRPr>
+    </a:lvl8pPr>
+    <a:lvl9pPr marL="3657600" algn="l" defTabSz="914400" rtl="0" eaLnBrk="1" latinLnBrk="0" hangingPunct="1">
+      <a:defRPr sz="1200" kern="1200">
+        <a:solidFill>
+          <a:schemeClr val="tx1"/>
+        </a:solidFill>
+        <a:latin typeface="+mn-lt"/>
+        <a:ea typeface="+mn-ea"/>
+        <a:cs typeface="+mn-cs"/>
+      </a:defRPr>
+    </a:lvl9pPr>
+  </p:notesStyle>
+</p:notesMaster>
+</file>
+
 <file path=ppt/slideLayouts/slideLayout1.xml><?xml version="1.0" encoding="utf-8"?>
 <p:sldLayout xmlns:a="http://schemas.openxmlformats.org/drawingml/2006/main" xmlns:r="http://schemas.openxmlformats.org/officeDocument/2006/relationships" xmlns:p="http://schemas.openxmlformats.org/presentationml/2006/main" type="title" preserve="1">
   <p:cSld name="Title Slide">
@@ -332,10 +678,9 @@
           <a:bodyPr/>
           <a:lstStyle/>
           <a:p>
-            <a:fld id="{1D8BD707-D9CF-40AE-B4C6-C98DA3205C09}" type="datetimeFigureOut">
+            <a:fld id="{8C8568CD-F0AD-4D41-BE7F-8FF4F2B88C84}" type="datetime1">
               <a:rPr lang="en-US" smtClean="0"/>
-              <a:pPr/>
-              <a:t>5/14/2026</a:t>
+              <a:t>5/19/2026</a:t>
             </a:fld>
             <a:endParaRPr lang="en-US"/>
           </a:p>
@@ -497,10 +842,9 @@
           <a:bodyPr/>
           <a:lstStyle/>
           <a:p>
-            <a:fld id="{1D8BD707-D9CF-40AE-B4C6-C98DA3205C09}" type="datetimeFigureOut">
+            <a:fld id="{231B6FB5-59EC-448E-834C-9C5EC0F5F054}" type="datetime1">
               <a:rPr lang="en-US" smtClean="0"/>
-              <a:pPr/>
-              <a:t>5/14/2026</a:t>
+              <a:t>5/19/2026</a:t>
             </a:fld>
             <a:endParaRPr lang="en-US"/>
           </a:p>
@@ -672,10 +1016,9 @@
           <a:bodyPr/>
           <a:lstStyle/>
           <a:p>
-            <a:fld id="{1D8BD707-D9CF-40AE-B4C6-C98DA3205C09}" type="datetimeFigureOut">
+            <a:fld id="{AA48FABC-EC31-472A-A153-96049079407C}" type="datetime1">
               <a:rPr lang="en-US" smtClean="0"/>
-              <a:pPr/>
-              <a:t>5/14/2026</a:t>
+              <a:t>5/19/2026</a:t>
             </a:fld>
             <a:endParaRPr lang="en-US"/>
           </a:p>
@@ -837,10 +1180,9 @@
           <a:bodyPr/>
           <a:lstStyle/>
           <a:p>
-            <a:fld id="{1D8BD707-D9CF-40AE-B4C6-C98DA3205C09}" type="datetimeFigureOut">
+            <a:fld id="{F1C594DF-65DE-489A-847D-34C3F45E521B}" type="datetime1">
               <a:rPr lang="en-US" smtClean="0"/>
-              <a:pPr/>
-              <a:t>5/14/2026</a:t>
+              <a:t>5/19/2026</a:t>
             </a:fld>
             <a:endParaRPr lang="en-US"/>
           </a:p>
@@ -1079,10 +1421,9 @@
           <a:bodyPr/>
           <a:lstStyle/>
           <a:p>
-            <a:fld id="{1D8BD707-D9CF-40AE-B4C6-C98DA3205C09}" type="datetimeFigureOut">
+            <a:fld id="{FB73209F-E6B2-441F-B4BE-BD7CAF8D17F9}" type="datetime1">
               <a:rPr lang="en-US" smtClean="0"/>
-              <a:pPr/>
-              <a:t>5/14/2026</a:t>
+              <a:t>5/19/2026</a:t>
             </a:fld>
             <a:endParaRPr lang="en-US"/>
           </a:p>
@@ -1361,10 +1702,9 @@
           <a:bodyPr/>
           <a:lstStyle/>
           <a:p>
-            <a:fld id="{1D8BD707-D9CF-40AE-B4C6-C98DA3205C09}" type="datetimeFigureOut">
+            <a:fld id="{DE7604A2-F1AE-4DF0-8A40-06956D1B6C69}" type="datetime1">
               <a:rPr lang="en-US" smtClean="0"/>
-              <a:pPr/>
-              <a:t>5/14/2026</a:t>
+              <a:t>5/19/2026</a:t>
             </a:fld>
             <a:endParaRPr lang="en-US"/>
           </a:p>
@@ -1777,10 +2117,9 @@
           <a:bodyPr/>
           <a:lstStyle/>
           <a:p>
-            <a:fld id="{1D8BD707-D9CF-40AE-B4C6-C98DA3205C09}" type="datetimeFigureOut">
+            <a:fld id="{7F790956-C753-4A4F-87CA-47471D8BC1A6}" type="datetime1">
               <a:rPr lang="en-US" smtClean="0"/>
-              <a:pPr/>
-              <a:t>5/14/2026</a:t>
+              <a:t>5/19/2026</a:t>
             </a:fld>
             <a:endParaRPr lang="en-US"/>
           </a:p>
@@ -1891,10 +2230,9 @@
           <a:bodyPr/>
           <a:lstStyle/>
           <a:p>
-            <a:fld id="{1D8BD707-D9CF-40AE-B4C6-C98DA3205C09}" type="datetimeFigureOut">
+            <a:fld id="{506D0422-75CD-471E-BFC7-3454706B5E6A}" type="datetime1">
               <a:rPr lang="en-US" smtClean="0"/>
-              <a:pPr/>
-              <a:t>5/14/2026</a:t>
+              <a:t>5/19/2026</a:t>
             </a:fld>
             <a:endParaRPr lang="en-US"/>
           </a:p>
@@ -1983,10 +2321,9 @@
           <a:bodyPr/>
           <a:lstStyle/>
           <a:p>
-            <a:fld id="{1D8BD707-D9CF-40AE-B4C6-C98DA3205C09}" type="datetimeFigureOut">
+            <a:fld id="{4D43FB66-3F7D-4BA1-B0BD-393DA4D10315}" type="datetime1">
               <a:rPr lang="en-US" smtClean="0"/>
-              <a:pPr/>
-              <a:t>5/14/2026</a:t>
+              <a:t>5/19/2026</a:t>
             </a:fld>
             <a:endParaRPr lang="en-US"/>
           </a:p>
@@ -2255,10 +2592,9 @@
           <a:bodyPr/>
           <a:lstStyle/>
           <a:p>
-            <a:fld id="{1D8BD707-D9CF-40AE-B4C6-C98DA3205C09}" type="datetimeFigureOut">
+            <a:fld id="{767EBC6E-8BA7-41CA-B13C-DAE8F09BC7A6}" type="datetime1">
               <a:rPr lang="en-US" smtClean="0"/>
-              <a:pPr/>
-              <a:t>5/14/2026</a:t>
+              <a:t>5/19/2026</a:t>
             </a:fld>
             <a:endParaRPr lang="en-US"/>
           </a:p>
@@ -2504,10 +2840,9 @@
           <a:bodyPr/>
           <a:lstStyle/>
           <a:p>
-            <a:fld id="{1D8BD707-D9CF-40AE-B4C6-C98DA3205C09}" type="datetimeFigureOut">
+            <a:fld id="{F129ECEA-267D-4241-9471-1992F7864A69}" type="datetime1">
               <a:rPr lang="en-US" smtClean="0"/>
-              <a:pPr/>
-              <a:t>5/14/2026</a:t>
+              <a:t>5/19/2026</a:t>
             </a:fld>
             <a:endParaRPr lang="en-US"/>
           </a:p>
@@ -2712,10 +3047,9 @@
             </a:lvl1pPr>
           </a:lstStyle>
           <a:p>
-            <a:fld id="{1D8BD707-D9CF-40AE-B4C6-C98DA3205C09}" type="datetimeFigureOut">
+            <a:fld id="{49871702-560A-4592-95EF-F6B313575989}" type="datetime1">
               <a:rPr lang="en-US" smtClean="0"/>
-              <a:pPr/>
-              <a:t>5/14/2026</a:t>
+              <a:t>5/19/2026</a:t>
             </a:fld>
             <a:endParaRPr lang="en-US"/>
           </a:p>
@@ -2816,6 +3150,7 @@
     <p:sldLayoutId id="2147483658" r:id="rId10"/>
     <p:sldLayoutId id="2147483659" r:id="rId11"/>
   </p:sldLayoutIdLst>
+  <p:hf sldNum="0" hdr="0" ftr="0" dt="0"/>
   <p:txStyles>
     <p:titleStyle>
       <a:lvl1pPr algn="ctr" defTabSz="914400" rtl="0" eaLnBrk="1" latinLnBrk="0" hangingPunct="1">
@@ -3389,8 +3724,8 @@
         </p:nvSpPr>
         <p:spPr>
           <a:xfrm>
-            <a:off x="3953809" y="1704169"/>
-            <a:ext cx="10894849" cy="1058384"/>
+            <a:off x="3953809" y="1685119"/>
+            <a:ext cx="10894849" cy="1238210"/>
           </a:xfrm>
           <a:prstGeom prst="rect">
             <a:avLst/>
@@ -3404,11 +3739,11 @@
           <a:p>
             <a:pPr marL="0" lvl="0" indent="0" algn="ctr">
               <a:lnSpc>
-                <a:spcPts val="7290"/>
+                <a:spcPts val="8543"/>
               </a:lnSpc>
             </a:pPr>
             <a:r>
-              <a:rPr lang="en-US" sz="6395" b="1">
+              <a:rPr lang="en-US" sz="7494" b="1">
                 <a:solidFill>
                   <a:srgbClr val="005FC2"/>
                 </a:solidFill>
@@ -3417,7 +3752,7 @@
                 <a:cs typeface="Neo Tech Bold"/>
                 <a:sym typeface="Neo Tech Bold"/>
               </a:rPr>
-              <a:t>SYSTEM MODULES (PART 2)</a:t>
+              <a:t>TECHNOLOGY STACK</a:t>
             </a:r>
           </a:p>
         </p:txBody>
@@ -3430,26 +3765,26 @@
         </p:nvSpPr>
         <p:spPr>
           <a:xfrm>
-            <a:off x="7642726" y="5265039"/>
-            <a:ext cx="4230126" cy="3193161"/>
+            <a:off x="10972800" y="4774405"/>
+            <a:ext cx="5107028" cy="2462213"/>
           </a:xfrm>
           <a:prstGeom prst="rect">
             <a:avLst/>
           </a:prstGeom>
         </p:spPr>
         <p:txBody>
-          <a:bodyPr lIns="0" tIns="0" rIns="0" bIns="0" rtlCol="0" anchor="t">
+          <a:bodyPr wrap="square" lIns="0" tIns="0" rIns="0" bIns="0" rtlCol="0" anchor="t">
             <a:spAutoFit/>
           </a:bodyPr>
           <a:lstStyle/>
           <a:p>
-            <a:pPr marL="0" lvl="0" indent="0" algn="l">
+            <a:pPr marL="0" lvl="0" indent="0" algn="just">
               <a:lnSpc>
                 <a:spcPts val="3191"/>
               </a:lnSpc>
             </a:pPr>
             <a:r>
-              <a:rPr lang="en-US" sz="2799">
+              <a:rPr lang="en-US" sz="2799" dirty="0">
                 <a:solidFill>
                   <a:srgbClr val="005FC2"/>
                 </a:solidFill>
@@ -3458,17 +3793,17 @@
                 <a:cs typeface="Koho"/>
                 <a:sym typeface="Koho"/>
               </a:rPr>
-              <a:t>Progress Tracking</a:t>
-            </a:r>
-          </a:p>
-          <a:p>
-            <a:pPr marL="0" lvl="0" indent="0" algn="l">
+              <a:t>Backend: Spring Boot, Java 17, Spring Security, JPA, REST APIs.</a:t>
+            </a:r>
+          </a:p>
+          <a:p>
+            <a:pPr marL="0" lvl="0" indent="0" algn="just">
               <a:lnSpc>
                 <a:spcPts val="3191"/>
               </a:lnSpc>
             </a:pPr>
             <a:r>
-              <a:rPr lang="en-US" sz="2799">
+              <a:rPr lang="en-US" sz="2799" dirty="0">
                 <a:solidFill>
                   <a:srgbClr val="005FC2"/>
                 </a:solidFill>
@@ -3477,39 +3812,17 @@
                 <a:cs typeface="Koho"/>
                 <a:sym typeface="Koho"/>
               </a:rPr>
-              <a:t>Monitor improvement over time with historical data analysis. Track solved problems, rating changes, and skill development milestones to measure your coding journey.</a:t>
-            </a:r>
-          </a:p>
-        </p:txBody>
-      </p:sp>
-      <p:sp>
-        <p:nvSpPr>
-          <p:cNvPr id="6" name="TextBox 6"/>
-          <p:cNvSpPr txBox="1"/>
-          <p:nvPr/>
-        </p:nvSpPr>
-        <p:spPr>
-          <a:xfrm>
-            <a:off x="12229407" y="3866959"/>
-            <a:ext cx="4656668" cy="2793111"/>
-          </a:xfrm>
-          <a:prstGeom prst="rect">
-            <a:avLst/>
-          </a:prstGeom>
-        </p:spPr>
-        <p:txBody>
-          <a:bodyPr lIns="0" tIns="0" rIns="0" bIns="0" rtlCol="0" anchor="t">
-            <a:spAutoFit/>
-          </a:bodyPr>
-          <a:lstStyle/>
-          <a:p>
-            <a:pPr marL="0" lvl="0" indent="0" algn="l">
+              <a:t>Database: PostgreSQL. </a:t>
+            </a:r>
+          </a:p>
+          <a:p>
+            <a:pPr marL="0" lvl="0" indent="0" algn="just">
               <a:lnSpc>
                 <a:spcPts val="3191"/>
               </a:lnSpc>
             </a:pPr>
             <a:r>
-              <a:rPr lang="en-US" sz="2799">
+              <a:rPr lang="en-US" sz="2799" dirty="0">
                 <a:solidFill>
                   <a:srgbClr val="005FC2"/>
                 </a:solidFill>
@@ -3518,17 +3831,17 @@
                 <a:cs typeface="Koho"/>
                 <a:sym typeface="Koho"/>
               </a:rPr>
-              <a:t>Admin Panel</a:t>
-            </a:r>
-          </a:p>
-          <a:p>
-            <a:pPr marL="0" lvl="0" indent="0" algn="l">
+              <a:t>Tools: Maven, GitHub, Postman. </a:t>
+            </a:r>
+          </a:p>
+          <a:p>
+            <a:pPr marL="0" lvl="0" indent="0" algn="just">
               <a:lnSpc>
                 <a:spcPts val="3191"/>
               </a:lnSpc>
             </a:pPr>
             <a:r>
-              <a:rPr lang="en-US" sz="2799">
+              <a:rPr lang="en-US" sz="2799" dirty="0">
                 <a:solidFill>
                   <a:srgbClr val="005FC2"/>
                 </a:solidFill>
@@ -3537,7 +3850,31 @@
                 <a:cs typeface="Koho"/>
                 <a:sym typeface="Koho"/>
               </a:rPr>
-              <a:t>Manage users, monitor system health, and configure platform settings. Provides administrative controls for maintaining the CodePulse ecosystem.</a:t>
+              <a:t>Authentication: JWT, </a:t>
+            </a:r>
+            <a:r>
+              <a:rPr lang="en-US" sz="2799" dirty="0" err="1">
+                <a:solidFill>
+                  <a:srgbClr val="005FC2"/>
+                </a:solidFill>
+                <a:latin typeface="Koho"/>
+                <a:ea typeface="Koho"/>
+                <a:cs typeface="Koho"/>
+                <a:sym typeface="Koho"/>
+              </a:rPr>
+              <a:t>BCrypt</a:t>
+            </a:r>
+            <a:r>
+              <a:rPr lang="en-US" sz="2799" dirty="0">
+                <a:solidFill>
+                  <a:srgbClr val="005FC2"/>
+                </a:solidFill>
+                <a:latin typeface="Koho"/>
+                <a:ea typeface="Koho"/>
+                <a:cs typeface="Koho"/>
+                <a:sym typeface="Koho"/>
+              </a:rPr>
+              <a:t>.</a:t>
             </a:r>
           </a:p>
         </p:txBody>
@@ -3550,8 +3887,8 @@
         </p:nvSpPr>
         <p:spPr>
           <a:xfrm>
-            <a:off x="2629502" y="3866959"/>
-            <a:ext cx="4656668" cy="3193161"/>
+            <a:off x="4191000" y="4774406"/>
+            <a:ext cx="4656668" cy="2462213"/>
           </a:xfrm>
           <a:prstGeom prst="rect">
             <a:avLst/>
@@ -3563,13 +3900,13 @@
           </a:bodyPr>
           <a:lstStyle/>
           <a:p>
-            <a:pPr marL="0" lvl="0" indent="0" algn="l">
+            <a:pPr marL="0" lvl="0" indent="0" algn="just">
               <a:lnSpc>
                 <a:spcPts val="3191"/>
               </a:lnSpc>
             </a:pPr>
             <a:r>
-              <a:rPr lang="en-US" sz="2799">
+              <a:rPr lang="en-US" sz="2799" dirty="0">
                 <a:solidFill>
                   <a:srgbClr val="005FC2"/>
                 </a:solidFill>
@@ -3578,17 +3915,17 @@
                 <a:cs typeface="Koho"/>
                 <a:sym typeface="Koho"/>
               </a:rPr>
-              <a:t>Recommendation Engine</a:t>
-            </a:r>
-          </a:p>
-          <a:p>
-            <a:pPr marL="0" lvl="0" indent="0" algn="l">
+              <a:t>Frontend Technologies :</a:t>
+            </a:r>
+          </a:p>
+          <a:p>
+            <a:pPr marL="0" lvl="0" indent="0" algn="just">
               <a:lnSpc>
                 <a:spcPts val="3191"/>
               </a:lnSpc>
             </a:pPr>
             <a:r>
-              <a:rPr lang="en-US" sz="2799">
+              <a:rPr lang="en-US" sz="2799" dirty="0">
                 <a:solidFill>
                   <a:srgbClr val="005FC2"/>
                 </a:solidFill>
@@ -3597,7 +3934,7 @@
                 <a:cs typeface="Koho"/>
                 <a:sym typeface="Koho"/>
               </a:rPr>
-              <a:t>Intelligent problem suggestions based on detected weaknesses. Analyzes your performance patterns to recommend targeted practice problems for maximum improvement.</a:t>
+              <a:t>Next.js and React.js for UI development. Tailwind CSS for styling. Recharts for data visualization and interactive dashboards.</a:t>
             </a:r>
           </a:p>
         </p:txBody>
@@ -3613,14 +3950,6 @@
 <file path=ppt/slides/slide11.xml><?xml version="1.0" encoding="utf-8"?>
 <p:sld xmlns:a="http://schemas.openxmlformats.org/drawingml/2006/main" xmlns:r="http://schemas.openxmlformats.org/officeDocument/2006/relationships" xmlns:p="http://schemas.openxmlformats.org/presentationml/2006/main">
   <p:cSld>
-    <p:bg>
-      <p:bgPr>
-        <a:solidFill>
-          <a:srgbClr val="005FC2"/>
-        </a:solidFill>
-        <a:effectLst/>
-      </p:bgPr>
-    </p:bg>
     <p:spTree>
       <p:nvGrpSpPr>
         <p:cNvPr id="1" name=""/>
@@ -3637,60 +3966,14 @@
       </p:grpSpPr>
       <p:sp>
         <p:nvSpPr>
-          <p:cNvPr id="4" name="Freeform 4"/>
-          <p:cNvSpPr/>
-          <p:nvPr/>
-        </p:nvSpPr>
-        <p:spPr>
-          <a:xfrm>
-            <a:off x="3486955" y="4337680"/>
-            <a:ext cx="980748" cy="1030166"/>
-          </a:xfrm>
-          <a:custGeom>
-            <a:avLst/>
-            <a:gdLst/>
-            <a:ahLst/>
-            <a:cxnLst/>
-            <a:rect l="l" t="t" r="r" b="b"/>
-            <a:pathLst>
-              <a:path w="980748" h="1030166">
-                <a:moveTo>
-                  <a:pt x="0" y="0"/>
-                </a:moveTo>
-                <a:lnTo>
-                  <a:pt x="980749" y="0"/>
-                </a:lnTo>
-                <a:lnTo>
-                  <a:pt x="980749" y="1030166"/>
-                </a:lnTo>
-                <a:lnTo>
-                  <a:pt x="0" y="1030166"/>
-                </a:lnTo>
-                <a:lnTo>
-                  <a:pt x="0" y="0"/>
-                </a:lnTo>
-                <a:close/>
-              </a:path>
-            </a:pathLst>
-          </a:custGeom>
-          <a:blipFill>
-            <a:blip r:embed="rId2"/>
-            <a:stretch>
-              <a:fillRect/>
-            </a:stretch>
-          </a:blipFill>
-        </p:spPr>
-      </p:sp>
-      <p:sp>
-        <p:nvSpPr>
-          <p:cNvPr id="5" name="TextBox 5"/>
+          <p:cNvPr id="2" name="TextBox 2"/>
           <p:cNvSpPr txBox="1"/>
           <p:nvPr/>
         </p:nvSpPr>
         <p:spPr>
           <a:xfrm>
-            <a:off x="4336389" y="1587629"/>
-            <a:ext cx="9615222" cy="1238250"/>
+            <a:off x="3696575" y="1488837"/>
+            <a:ext cx="10894849" cy="1238210"/>
           </a:xfrm>
           <a:prstGeom prst="rect">
             <a:avLst/>
@@ -3704,34 +3987,34 @@
           <a:p>
             <a:pPr marL="0" lvl="0" indent="0" algn="ctr">
               <a:lnSpc>
-                <a:spcPts val="8549"/>
+                <a:spcPts val="8543"/>
               </a:lnSpc>
             </a:pPr>
             <a:r>
-              <a:rPr lang="en-US" sz="7500" b="1">
-                <a:solidFill>
-                  <a:srgbClr val="FFFFFF"/>
+              <a:rPr lang="en-US" sz="7494" b="1">
+                <a:solidFill>
+                  <a:srgbClr val="005FC2"/>
                 </a:solidFill>
                 <a:latin typeface="Neo Tech Bold"/>
                 <a:ea typeface="Neo Tech Bold"/>
                 <a:cs typeface="Neo Tech Bold"/>
                 <a:sym typeface="Neo Tech Bold"/>
               </a:rPr>
-              <a:t>SYSTEM WORKFLOW</a:t>
-            </a:r>
-          </a:p>
-        </p:txBody>
-      </p:sp>
-      <p:sp>
-        <p:nvSpPr>
-          <p:cNvPr id="6" name="TextBox 6"/>
+              <a:t>SYSTEM ARCHITECTURE</a:t>
+            </a:r>
+          </a:p>
+        </p:txBody>
+      </p:sp>
+      <p:sp>
+        <p:nvSpPr>
+          <p:cNvPr id="3" name="TextBox 3"/>
           <p:cNvSpPr txBox="1"/>
           <p:nvPr/>
         </p:nvSpPr>
         <p:spPr>
           <a:xfrm>
-            <a:off x="4813846" y="4315722"/>
-            <a:ext cx="10580784" cy="1192911"/>
+            <a:off x="5403738" y="3309309"/>
+            <a:ext cx="8868773" cy="1993011"/>
           </a:xfrm>
           <a:prstGeom prst="rect">
             <a:avLst/>
@@ -3743,7 +4026,7 @@
           </a:bodyPr>
           <a:lstStyle/>
           <a:p>
-            <a:pPr marL="0" lvl="0" indent="0" algn="l">
+            <a:pPr marL="0" lvl="0" indent="0" algn="just">
               <a:lnSpc>
                 <a:spcPts val="3191"/>
               </a:lnSpc>
@@ -3751,14 +4034,14 @@
             <a:r>
               <a:rPr lang="en-US" sz="2799">
                 <a:solidFill>
-                  <a:srgbClr val="FFFFFF"/>
+                  <a:srgbClr val="005FC2"/>
                 </a:solidFill>
                 <a:latin typeface="Koho"/>
                 <a:ea typeface="Koho"/>
                 <a:cs typeface="Koho"/>
                 <a:sym typeface="Koho"/>
               </a:rPr>
-              <a:t>Data Flow: User → Fetch Data → Store → Analyze → Output. This pipeline ensures seamless data collection from coding platforms and transforms raw submissions into meaningful performance metrics.</a:t>
+              <a:t>CodePulse utilizes a robust 3-Tier Architecture model ensuring clean separation of concerns and scalability. The Presentation Layer is built with Next.js, delivering a responsive and dynamic user interface for seamless interaction.</a:t>
             </a:r>
           </a:p>
         </p:txBody>
@@ -3771,8 +4054,8 @@
         </p:nvSpPr>
         <p:spPr>
           <a:xfrm>
-            <a:off x="4813846" y="5856350"/>
-            <a:ext cx="10580784" cy="1192911"/>
+            <a:off x="5476496" y="6407220"/>
+            <a:ext cx="8868773" cy="1993011"/>
           </a:xfrm>
           <a:prstGeom prst="rect">
             <a:avLst/>
@@ -3784,7 +4067,7 @@
           </a:bodyPr>
           <a:lstStyle/>
           <a:p>
-            <a:pPr marL="0" lvl="0" indent="0" algn="l">
+            <a:pPr marL="0" lvl="0" indent="0" algn="just">
               <a:lnSpc>
                 <a:spcPts val="3191"/>
               </a:lnSpc>
@@ -3792,150 +4075,17 @@
             <a:r>
               <a:rPr lang="en-US" sz="2799">
                 <a:solidFill>
-                  <a:srgbClr val="FFFFFF"/>
+                  <a:srgbClr val="005FC2"/>
                 </a:solidFill>
                 <a:latin typeface="Koho"/>
                 <a:ea typeface="Koho"/>
                 <a:cs typeface="Koho"/>
                 <a:sym typeface="Koho"/>
               </a:rPr>
-              <a:t>Analysis Flow: Raw Data → Classify → Map Difficulty → Calculate Metrics → Generate Insights. Each submission is categorized by topic and difficulty level to produce actionable analytics.</a:t>
-            </a:r>
-          </a:p>
-        </p:txBody>
-      </p:sp>
-      <p:sp>
-        <p:nvSpPr>
-          <p:cNvPr id="8" name="TextBox 8"/>
-          <p:cNvSpPr txBox="1"/>
-          <p:nvPr/>
-        </p:nvSpPr>
-        <p:spPr>
-          <a:xfrm>
-            <a:off x="4813846" y="7401685"/>
-            <a:ext cx="10580784" cy="1592961"/>
-          </a:xfrm>
-          <a:prstGeom prst="rect">
-            <a:avLst/>
-          </a:prstGeom>
-        </p:spPr>
-        <p:txBody>
-          <a:bodyPr lIns="0" tIns="0" rIns="0" bIns="0" rtlCol="0" anchor="t">
-            <a:spAutoFit/>
-          </a:bodyPr>
-          <a:lstStyle/>
-          <a:p>
-            <a:pPr marL="0" lvl="0" indent="0" algn="l">
-              <a:lnSpc>
-                <a:spcPts val="3191"/>
-              </a:lnSpc>
-            </a:pPr>
-            <a:r>
-              <a:rPr lang="en-US" sz="2799">
-                <a:solidFill>
-                  <a:srgbClr val="FFFFFF"/>
-                </a:solidFill>
-                <a:latin typeface="Koho"/>
-                <a:ea typeface="Koho"/>
-                <a:cs typeface="Koho"/>
-                <a:sym typeface="Koho"/>
-              </a:rPr>
-              <a:t>Recommendation Flow: Detect Weakness → Suggest Problems → User Solves → Feedback Loop Updates Model. The system continuously learns from user progress to refine future recommendations.</a:t>
-            </a:r>
-          </a:p>
-        </p:txBody>
-      </p:sp>
-      <p:sp>
-        <p:nvSpPr>
-          <p:cNvPr id="9" name="Freeform 9"/>
-          <p:cNvSpPr/>
-          <p:nvPr/>
-        </p:nvSpPr>
-        <p:spPr>
-          <a:xfrm>
-            <a:off x="3579827" y="5893693"/>
-            <a:ext cx="845428" cy="833787"/>
-          </a:xfrm>
-          <a:custGeom>
-            <a:avLst/>
-            <a:gdLst/>
-            <a:ahLst/>
-            <a:cxnLst/>
-            <a:rect l="l" t="t" r="r" b="b"/>
-            <a:pathLst>
-              <a:path w="845428" h="833787">
-                <a:moveTo>
-                  <a:pt x="0" y="0"/>
-                </a:moveTo>
-                <a:lnTo>
-                  <a:pt x="845428" y="0"/>
-                </a:lnTo>
-                <a:lnTo>
-                  <a:pt x="845428" y="833787"/>
-                </a:lnTo>
-                <a:lnTo>
-                  <a:pt x="0" y="833787"/>
-                </a:lnTo>
-                <a:lnTo>
-                  <a:pt x="0" y="0"/>
-                </a:lnTo>
-                <a:close/>
-              </a:path>
-            </a:pathLst>
-          </a:custGeom>
-          <a:blipFill>
-            <a:blip r:embed="rId3"/>
-            <a:stretch>
-              <a:fillRect/>
-            </a:stretch>
-          </a:blipFill>
-        </p:spPr>
-      </p:sp>
-      <p:sp>
-        <p:nvSpPr>
-          <p:cNvPr id="10" name="Freeform 10"/>
-          <p:cNvSpPr/>
-          <p:nvPr/>
-        </p:nvSpPr>
-        <p:spPr>
-          <a:xfrm>
-            <a:off x="3771691" y="7627362"/>
-            <a:ext cx="578042" cy="926382"/>
-          </a:xfrm>
-          <a:custGeom>
-            <a:avLst/>
-            <a:gdLst/>
-            <a:ahLst/>
-            <a:cxnLst/>
-            <a:rect l="l" t="t" r="r" b="b"/>
-            <a:pathLst>
-              <a:path w="578042" h="926382">
-                <a:moveTo>
-                  <a:pt x="0" y="0"/>
-                </a:moveTo>
-                <a:lnTo>
-                  <a:pt x="578042" y="0"/>
-                </a:lnTo>
-                <a:lnTo>
-                  <a:pt x="578042" y="926382"/>
-                </a:lnTo>
-                <a:lnTo>
-                  <a:pt x="0" y="926382"/>
-                </a:lnTo>
-                <a:lnTo>
-                  <a:pt x="0" y="0"/>
-                </a:lnTo>
-                <a:close/>
-              </a:path>
-            </a:pathLst>
-          </a:custGeom>
-          <a:blipFill>
-            <a:blip r:embed="rId4"/>
-            <a:stretch>
-              <a:fillRect/>
-            </a:stretch>
-          </a:blipFill>
-        </p:spPr>
+              <a:t>The Application Layer leverages Spring Boot APIs to handle business logic, data processing, and analysis engines. The Data Layer uses PostgreSQL for reliable data persistence. JWT authentication ensures secure communication between all layers.</a:t>
+            </a:r>
+          </a:p>
+        </p:txBody>
       </p:sp>
     </p:spTree>
   </p:cSld>
@@ -3970,8 +4120,8 @@
         </p:nvSpPr>
         <p:spPr>
           <a:xfrm>
-            <a:off x="3953809" y="1685119"/>
-            <a:ext cx="10894849" cy="1238210"/>
+            <a:off x="4222833" y="3714920"/>
+            <a:ext cx="9842334" cy="3795911"/>
           </a:xfrm>
           <a:prstGeom prst="rect">
             <a:avLst/>
@@ -3983,13 +4133,13 @@
           </a:bodyPr>
           <a:lstStyle/>
           <a:p>
-            <a:pPr marL="0" lvl="0" indent="0" algn="ctr">
+            <a:pPr algn="ctr">
               <a:lnSpc>
-                <a:spcPts val="8543"/>
+                <a:spcPts val="7365"/>
               </a:lnSpc>
             </a:pPr>
             <a:r>
-              <a:rPr lang="en-US" sz="7494" b="1">
+              <a:rPr lang="en-US" sz="6460" b="1" dirty="0">
                 <a:solidFill>
                   <a:srgbClr val="005FC2"/>
                 </a:solidFill>
@@ -3998,188 +4148,55 @@
                 <a:cs typeface="Neo Tech Bold"/>
                 <a:sym typeface="Neo Tech Bold"/>
               </a:rPr>
-              <a:t>TECHNOLOGY STACK</a:t>
-            </a:r>
-          </a:p>
-        </p:txBody>
-      </p:sp>
-      <p:sp>
-        <p:nvSpPr>
-          <p:cNvPr id="3" name="TextBox 3"/>
-          <p:cNvSpPr txBox="1"/>
-          <p:nvPr/>
-        </p:nvSpPr>
-        <p:spPr>
-          <a:xfrm>
-            <a:off x="7642726" y="5265039"/>
-            <a:ext cx="4230126" cy="3193161"/>
-          </a:xfrm>
-          <a:prstGeom prst="rect">
-            <a:avLst/>
-          </a:prstGeom>
-        </p:spPr>
-        <p:txBody>
-          <a:bodyPr lIns="0" tIns="0" rIns="0" bIns="0" rtlCol="0" anchor="t">
-            <a:spAutoFit/>
-          </a:bodyPr>
-          <a:lstStyle/>
-          <a:p>
-            <a:pPr marL="0" lvl="0" indent="0" algn="l">
+              <a:t>THANK YOU FOR YOUR ATTENTION!</a:t>
+            </a:r>
+          </a:p>
+          <a:p>
+            <a:pPr algn="ctr">
               <a:lnSpc>
-                <a:spcPts val="3191"/>
+                <a:spcPts val="7365"/>
               </a:lnSpc>
             </a:pPr>
             <a:r>
-              <a:rPr lang="en-US" sz="2799">
+              <a:rPr lang="en-US" sz="6460" b="1" dirty="0">
                 <a:solidFill>
                   <a:srgbClr val="005FC2"/>
                 </a:solidFill>
-                <a:latin typeface="Koho"/>
-                <a:ea typeface="Koho"/>
-                <a:cs typeface="Koho"/>
-                <a:sym typeface="Koho"/>
-              </a:rPr>
-              <a:t>Backend &amp; Database</a:t>
-            </a:r>
-          </a:p>
-          <a:p>
-            <a:pPr marL="0" lvl="0" indent="0" algn="l">
+                <a:latin typeface="Neo Tech Bold"/>
+                <a:ea typeface="Neo Tech Bold"/>
+                <a:cs typeface="Neo Tech Bold"/>
+                <a:sym typeface="Neo Tech Bold"/>
+              </a:rPr>
+              <a:t> </a:t>
+            </a:r>
+            <a:r>
+              <a:rPr lang="en-US" sz="3600" b="1" dirty="0">
+                <a:solidFill>
+                  <a:srgbClr val="005FC2"/>
+                </a:solidFill>
+                <a:latin typeface="Koho Bold"/>
+                <a:ea typeface="Koho Bold"/>
+                <a:cs typeface="Koho Bold"/>
+                <a:sym typeface="Koho Bold"/>
+              </a:rPr>
+              <a:t>We Welcome Your Questions</a:t>
+            </a:r>
+          </a:p>
+          <a:p>
+            <a:pPr marL="0" lvl="0" indent="0" algn="ctr">
               <a:lnSpc>
-                <a:spcPts val="3191"/>
+                <a:spcPts val="7365"/>
               </a:lnSpc>
             </a:pPr>
-            <a:r>
-              <a:rPr lang="en-US" sz="2799">
-                <a:solidFill>
-                  <a:srgbClr val="005FC2"/>
-                </a:solidFill>
-                <a:latin typeface="Koho"/>
-                <a:ea typeface="Koho"/>
-                <a:cs typeface="Koho"/>
-                <a:sym typeface="Koho"/>
-              </a:rPr>
-              <a:t>Spring Boot, Java 17, Spring Security, JPA, REST APIs. Database: PostgreSQL. Tools: Maven, GitHub, Postman. Authentication: JWT, BCrypt.</a:t>
-            </a:r>
-          </a:p>
-        </p:txBody>
-      </p:sp>
-      <p:sp>
-        <p:nvSpPr>
-          <p:cNvPr id="6" name="TextBox 6"/>
-          <p:cNvSpPr txBox="1"/>
-          <p:nvPr/>
-        </p:nvSpPr>
-        <p:spPr>
-          <a:xfrm>
-            <a:off x="12229407" y="3866959"/>
-            <a:ext cx="4656668" cy="2393061"/>
-          </a:xfrm>
-          <a:prstGeom prst="rect">
-            <a:avLst/>
-          </a:prstGeom>
-        </p:spPr>
-        <p:txBody>
-          <a:bodyPr lIns="0" tIns="0" rIns="0" bIns="0" rtlCol="0" anchor="t">
-            <a:spAutoFit/>
-          </a:bodyPr>
-          <a:lstStyle/>
-          <a:p>
-            <a:pPr marL="0" lvl="0" indent="0" algn="l">
-              <a:lnSpc>
-                <a:spcPts val="3191"/>
-              </a:lnSpc>
-            </a:pPr>
-            <a:r>
-              <a:rPr lang="en-US" sz="2799">
-                <a:solidFill>
-                  <a:srgbClr val="005FC2"/>
-                </a:solidFill>
-                <a:latin typeface="Koho"/>
-                <a:ea typeface="Koho"/>
-                <a:cs typeface="Koho"/>
-                <a:sym typeface="Koho"/>
-              </a:rPr>
-              <a:t>Development Tools</a:t>
-            </a:r>
-          </a:p>
-          <a:p>
-            <a:pPr marL="0" lvl="0" indent="0" algn="l">
-              <a:lnSpc>
-                <a:spcPts val="3191"/>
-              </a:lnSpc>
-            </a:pPr>
-            <a:r>
-              <a:rPr lang="en-US" sz="2799">
-                <a:solidFill>
-                  <a:srgbClr val="005FC2"/>
-                </a:solidFill>
-                <a:latin typeface="Koho"/>
-                <a:ea typeface="Koho"/>
-                <a:cs typeface="Koho"/>
-                <a:sym typeface="Koho"/>
-              </a:rPr>
-              <a:t>IntelliJ IDEA, VS Code for coding. Postman for API testing. GitHub for version control. Maven for build management.</a:t>
-            </a:r>
-          </a:p>
-        </p:txBody>
-      </p:sp>
-      <p:sp>
-        <p:nvSpPr>
-          <p:cNvPr id="7" name="TextBox 7"/>
-          <p:cNvSpPr txBox="1"/>
-          <p:nvPr/>
-        </p:nvSpPr>
-        <p:spPr>
-          <a:xfrm>
-            <a:off x="2629502" y="3866959"/>
-            <a:ext cx="4656668" cy="2393061"/>
-          </a:xfrm>
-          <a:prstGeom prst="rect">
-            <a:avLst/>
-          </a:prstGeom>
-        </p:spPr>
-        <p:txBody>
-          <a:bodyPr lIns="0" tIns="0" rIns="0" bIns="0" rtlCol="0" anchor="t">
-            <a:spAutoFit/>
-          </a:bodyPr>
-          <a:lstStyle/>
-          <a:p>
-            <a:pPr marL="0" lvl="0" indent="0" algn="l">
-              <a:lnSpc>
-                <a:spcPts val="3191"/>
-              </a:lnSpc>
-            </a:pPr>
-            <a:r>
-              <a:rPr lang="en-US" sz="2799">
-                <a:solidFill>
-                  <a:srgbClr val="005FC2"/>
-                </a:solidFill>
-                <a:latin typeface="Koho"/>
-                <a:ea typeface="Koho"/>
-                <a:cs typeface="Koho"/>
-                <a:sym typeface="Koho"/>
-              </a:rPr>
-              <a:t>Frontend Technologies</a:t>
-            </a:r>
-          </a:p>
-          <a:p>
-            <a:pPr marL="0" lvl="0" indent="0" algn="l">
-              <a:lnSpc>
-                <a:spcPts val="3191"/>
-              </a:lnSpc>
-            </a:pPr>
-            <a:r>
-              <a:rPr lang="en-US" sz="2799">
-                <a:solidFill>
-                  <a:srgbClr val="005FC2"/>
-                </a:solidFill>
-                <a:latin typeface="Koho"/>
-                <a:ea typeface="Koho"/>
-                <a:cs typeface="Koho"/>
-                <a:sym typeface="Koho"/>
-              </a:rPr>
-              <a:t>Next.js and React.js for UI development. Tailwind CSS for styling. Recharts for data visualization and interactive dashboards.</a:t>
-            </a:r>
+            <a:endParaRPr lang="en-US" sz="6460" b="1" dirty="0">
+              <a:solidFill>
+                <a:srgbClr val="005FC2"/>
+              </a:solidFill>
+              <a:latin typeface="Neo Tech Bold"/>
+              <a:ea typeface="Neo Tech Bold"/>
+              <a:cs typeface="Neo Tech Bold"/>
+              <a:sym typeface="Neo Tech Bold"/>
+            </a:endParaRPr>
           </a:p>
         </p:txBody>
       </p:sp>
@@ -4191,155 +4208,7 @@
 </p:sld>
 </file>
 
-<file path=ppt/slides/slide13.xml><?xml version="1.0" encoding="utf-8"?>
-<p:sld xmlns:a="http://schemas.openxmlformats.org/drawingml/2006/main" xmlns:r="http://schemas.openxmlformats.org/officeDocument/2006/relationships" xmlns:p="http://schemas.openxmlformats.org/presentationml/2006/main">
-  <p:cSld>
-    <p:spTree>
-      <p:nvGrpSpPr>
-        <p:cNvPr id="1" name=""/>
-        <p:cNvGrpSpPr/>
-        <p:nvPr/>
-      </p:nvGrpSpPr>
-      <p:grpSpPr>
-        <a:xfrm>
-          <a:off x="0" y="0"/>
-          <a:ext cx="0" cy="0"/>
-          <a:chOff x="0" y="0"/>
-          <a:chExt cx="0" cy="0"/>
-        </a:xfrm>
-      </p:grpSpPr>
-      <p:sp>
-        <p:nvSpPr>
-          <p:cNvPr id="2" name="TextBox 2"/>
-          <p:cNvSpPr txBox="1"/>
-          <p:nvPr/>
-        </p:nvSpPr>
-        <p:spPr>
-          <a:xfrm>
-            <a:off x="3696575" y="1488837"/>
-            <a:ext cx="10894849" cy="1238210"/>
-          </a:xfrm>
-          <a:prstGeom prst="rect">
-            <a:avLst/>
-          </a:prstGeom>
-        </p:spPr>
-        <p:txBody>
-          <a:bodyPr lIns="0" tIns="0" rIns="0" bIns="0" rtlCol="0" anchor="t">
-            <a:spAutoFit/>
-          </a:bodyPr>
-          <a:lstStyle/>
-          <a:p>
-            <a:pPr marL="0" lvl="0" indent="0" algn="ctr">
-              <a:lnSpc>
-                <a:spcPts val="8543"/>
-              </a:lnSpc>
-            </a:pPr>
-            <a:r>
-              <a:rPr lang="en-US" sz="7494" b="1">
-                <a:solidFill>
-                  <a:srgbClr val="005FC2"/>
-                </a:solidFill>
-                <a:latin typeface="Neo Tech Bold"/>
-                <a:ea typeface="Neo Tech Bold"/>
-                <a:cs typeface="Neo Tech Bold"/>
-                <a:sym typeface="Neo Tech Bold"/>
-              </a:rPr>
-              <a:t>SYSTEM ARCHITECTURE</a:t>
-            </a:r>
-          </a:p>
-        </p:txBody>
-      </p:sp>
-      <p:sp>
-        <p:nvSpPr>
-          <p:cNvPr id="3" name="TextBox 3"/>
-          <p:cNvSpPr txBox="1"/>
-          <p:nvPr/>
-        </p:nvSpPr>
-        <p:spPr>
-          <a:xfrm>
-            <a:off x="5403738" y="3309309"/>
-            <a:ext cx="8868773" cy="1993011"/>
-          </a:xfrm>
-          <a:prstGeom prst="rect">
-            <a:avLst/>
-          </a:prstGeom>
-        </p:spPr>
-        <p:txBody>
-          <a:bodyPr lIns="0" tIns="0" rIns="0" bIns="0" rtlCol="0" anchor="t">
-            <a:spAutoFit/>
-          </a:bodyPr>
-          <a:lstStyle/>
-          <a:p>
-            <a:pPr marL="0" lvl="0" indent="0" algn="just">
-              <a:lnSpc>
-                <a:spcPts val="3191"/>
-              </a:lnSpc>
-            </a:pPr>
-            <a:r>
-              <a:rPr lang="en-US" sz="2799">
-                <a:solidFill>
-                  <a:srgbClr val="005FC2"/>
-                </a:solidFill>
-                <a:latin typeface="Koho"/>
-                <a:ea typeface="Koho"/>
-                <a:cs typeface="Koho"/>
-                <a:sym typeface="Koho"/>
-              </a:rPr>
-              <a:t>CodePulse utilizes a robust 3-Tier Architecture model ensuring clean separation of concerns and scalability. The Presentation Layer is built with Next.js, delivering a responsive and dynamic user interface for seamless interaction.</a:t>
-            </a:r>
-          </a:p>
-        </p:txBody>
-      </p:sp>
-      <p:sp>
-        <p:nvSpPr>
-          <p:cNvPr id="7" name="TextBox 7"/>
-          <p:cNvSpPr txBox="1"/>
-          <p:nvPr/>
-        </p:nvSpPr>
-        <p:spPr>
-          <a:xfrm>
-            <a:off x="5476496" y="6407220"/>
-            <a:ext cx="8868773" cy="1993011"/>
-          </a:xfrm>
-          <a:prstGeom prst="rect">
-            <a:avLst/>
-          </a:prstGeom>
-        </p:spPr>
-        <p:txBody>
-          <a:bodyPr lIns="0" tIns="0" rIns="0" bIns="0" rtlCol="0" anchor="t">
-            <a:spAutoFit/>
-          </a:bodyPr>
-          <a:lstStyle/>
-          <a:p>
-            <a:pPr marL="0" lvl="0" indent="0" algn="just">
-              <a:lnSpc>
-                <a:spcPts val="3191"/>
-              </a:lnSpc>
-            </a:pPr>
-            <a:r>
-              <a:rPr lang="en-US" sz="2799">
-                <a:solidFill>
-                  <a:srgbClr val="005FC2"/>
-                </a:solidFill>
-                <a:latin typeface="Koho"/>
-                <a:ea typeface="Koho"/>
-                <a:cs typeface="Koho"/>
-                <a:sym typeface="Koho"/>
-              </a:rPr>
-              <a:t>The Application Layer leverages Spring Boot APIs to handle business logic, data processing, and analysis engines. The Data Layer uses PostgreSQL for reliable data persistence. JWT authentication ensures secure communication between all layers.</a:t>
-            </a:r>
-          </a:p>
-        </p:txBody>
-      </p:sp>
-    </p:spTree>
-  </p:cSld>
-  <p:clrMapOvr>
-    <a:masterClrMapping/>
-  </p:clrMapOvr>
-</p:sld>
-</file>
-
-<file path=ppt/slides/slide14.xml><?xml version="1.0" encoding="utf-8"?>
+<file path=ppt/slides/slide2.xml><?xml version="1.0" encoding="utf-8"?>
 <p:sld xmlns:a="http://schemas.openxmlformats.org/drawingml/2006/main" xmlns:r="http://schemas.openxmlformats.org/officeDocument/2006/relationships" xmlns:p="http://schemas.openxmlformats.org/presentationml/2006/main">
   <p:cSld>
     <p:bg>
@@ -4366,14 +4235,14 @@
       </p:grpSpPr>
       <p:sp>
         <p:nvSpPr>
-          <p:cNvPr id="7" name="Freeform 7"/>
+          <p:cNvPr id="4" name="Freeform 4"/>
           <p:cNvSpPr/>
           <p:nvPr/>
         </p:nvSpPr>
         <p:spPr>
           <a:xfrm>
-            <a:off x="1829272" y="3519317"/>
-            <a:ext cx="679170" cy="679170"/>
+            <a:off x="838200" y="1730462"/>
+            <a:ext cx="665955" cy="669725"/>
           </a:xfrm>
           <a:custGeom>
             <a:avLst/>
@@ -4382,18 +4251,18 @@
             <a:cxnLst/>
             <a:rect l="l" t="t" r="r" b="b"/>
             <a:pathLst>
-              <a:path w="679170" h="679170">
+              <a:path w="665955" h="669725">
                 <a:moveTo>
                   <a:pt x="0" y="0"/>
                 </a:moveTo>
                 <a:lnTo>
-                  <a:pt x="679170" y="0"/>
+                  <a:pt x="665956" y="0"/>
                 </a:lnTo>
                 <a:lnTo>
-                  <a:pt x="679170" y="679170"/>
+                  <a:pt x="665956" y="669725"/>
                 </a:lnTo>
                 <a:lnTo>
-                  <a:pt x="0" y="679170"/>
+                  <a:pt x="0" y="669725"/>
                 </a:lnTo>
                 <a:lnTo>
                   <a:pt x="0" y="0"/>
@@ -4403,13 +4272,7 @@
             </a:pathLst>
           </a:custGeom>
           <a:blipFill>
-            <a:blip r:embed="rId2">
-              <a:extLst>
-                <a:ext uri="{96DAC541-7B7A-43D3-8B79-37D633B846F1}">
-                  <asvg:svgBlip xmlns:asvg="http://schemas.microsoft.com/office/drawing/2016/SVG/main" r:embed="rId3"/>
-                </a:ext>
-              </a:extLst>
-            </a:blip>
+            <a:blip r:embed="rId2"/>
             <a:stretch>
               <a:fillRect/>
             </a:stretch>
@@ -4418,14 +4281,102 @@
       </p:sp>
       <p:sp>
         <p:nvSpPr>
-          <p:cNvPr id="8" name="Freeform 8"/>
+          <p:cNvPr id="5" name="TextBox 5"/>
+          <p:cNvSpPr txBox="1"/>
+          <p:nvPr/>
+        </p:nvSpPr>
+        <p:spPr>
+          <a:xfrm>
+            <a:off x="4336389" y="401119"/>
+            <a:ext cx="9615222" cy="1238250"/>
+          </a:xfrm>
+          <a:prstGeom prst="rect">
+            <a:avLst/>
+          </a:prstGeom>
+        </p:spPr>
+        <p:txBody>
+          <a:bodyPr lIns="0" tIns="0" rIns="0" bIns="0" rtlCol="0" anchor="t">
+            <a:spAutoFit/>
+          </a:bodyPr>
+          <a:lstStyle/>
+          <a:p>
+            <a:pPr marL="0" lvl="0" indent="0" algn="ctr">
+              <a:lnSpc>
+                <a:spcPts val="8549"/>
+              </a:lnSpc>
+            </a:pPr>
+            <a:r>
+              <a:rPr lang="en-US" sz="7500" b="1" dirty="0">
+                <a:solidFill>
+                  <a:srgbClr val="FFFFFF"/>
+                </a:solidFill>
+                <a:latin typeface="Neo Tech Bold"/>
+                <a:ea typeface="Neo Tech Bold"/>
+                <a:cs typeface="Neo Tech Bold"/>
+                <a:sym typeface="Neo Tech Bold"/>
+              </a:rPr>
+              <a:t>TABLE OF CONTENTS</a:t>
+            </a:r>
+          </a:p>
+        </p:txBody>
+      </p:sp>
+      <p:sp>
+        <p:nvSpPr>
+          <p:cNvPr id="6" name="TextBox 6"/>
+          <p:cNvSpPr txBox="1"/>
+          <p:nvPr/>
+        </p:nvSpPr>
+        <p:spPr>
+          <a:xfrm>
+            <a:off x="1981200" y="1881601"/>
+            <a:ext cx="2355189" cy="410369"/>
+          </a:xfrm>
+          <a:prstGeom prst="rect">
+            <a:avLst/>
+          </a:prstGeom>
+        </p:spPr>
+        <p:txBody>
+          <a:bodyPr wrap="square" lIns="0" tIns="0" rIns="0" bIns="0" rtlCol="0" anchor="t">
+            <a:spAutoFit/>
+          </a:bodyPr>
+          <a:lstStyle/>
+          <a:p>
+            <a:pPr marL="0" lvl="0" indent="0" algn="l">
+              <a:lnSpc>
+                <a:spcPts val="3191"/>
+              </a:lnSpc>
+            </a:pPr>
+            <a:r>
+              <a:rPr lang="en-US" sz="2799" dirty="0">
+                <a:solidFill>
+                  <a:srgbClr val="FFFFFF"/>
+                </a:solidFill>
+                <a:latin typeface="Koho"/>
+                <a:ea typeface="Koho"/>
+                <a:cs typeface="Koho"/>
+                <a:sym typeface="Koho"/>
+              </a:rPr>
+              <a:t>Introduction</a:t>
+            </a:r>
+          </a:p>
+        </p:txBody>
+      </p:sp>
+      <p:sp>
+        <p:nvSpPr>
+          <p:cNvPr id="2" name="Freeform 4">
+            <a:extLst>
+              <a:ext uri="{FF2B5EF4-FFF2-40B4-BE49-F238E27FC236}">
+                <a16:creationId xmlns:a16="http://schemas.microsoft.com/office/drawing/2014/main" id="{146EF867-E69A-052E-AB0F-4A8F42645F27}"/>
+              </a:ext>
+            </a:extLst>
+          </p:cNvPr>
           <p:cNvSpPr/>
           <p:nvPr/>
         </p:nvSpPr>
         <p:spPr>
           <a:xfrm>
-            <a:off x="1829272" y="5478561"/>
-            <a:ext cx="679170" cy="679170"/>
+            <a:off x="838200" y="2716777"/>
+            <a:ext cx="665955" cy="669725"/>
           </a:xfrm>
           <a:custGeom>
             <a:avLst/>
@@ -4434,18 +4385,18 @@
             <a:cxnLst/>
             <a:rect l="l" t="t" r="r" b="b"/>
             <a:pathLst>
-              <a:path w="679170" h="679170">
+              <a:path w="665955" h="669725">
                 <a:moveTo>
                   <a:pt x="0" y="0"/>
                 </a:moveTo>
                 <a:lnTo>
-                  <a:pt x="679170" y="0"/>
+                  <a:pt x="665956" y="0"/>
                 </a:lnTo>
                 <a:lnTo>
-                  <a:pt x="679170" y="679169"/>
+                  <a:pt x="665956" y="669725"/>
                 </a:lnTo>
                 <a:lnTo>
-                  <a:pt x="0" y="679169"/>
+                  <a:pt x="0" y="669725"/>
                 </a:lnTo>
                 <a:lnTo>
                   <a:pt x="0" y="0"/>
@@ -4455,13 +4406,7 @@
             </a:pathLst>
           </a:custGeom>
           <a:blipFill>
-            <a:blip r:embed="rId2">
-              <a:extLst>
-                <a:ext uri="{96DAC541-7B7A-43D3-8B79-37D633B846F1}">
-                  <asvg:svgBlip xmlns:asvg="http://schemas.microsoft.com/office/drawing/2016/SVG/main" r:embed="rId3"/>
-                </a:ext>
-              </a:extLst>
-            </a:blip>
+            <a:blip r:embed="rId2"/>
             <a:stretch>
               <a:fillRect/>
             </a:stretch>
@@ -4470,14 +4415,67 @@
       </p:sp>
       <p:sp>
         <p:nvSpPr>
-          <p:cNvPr id="9" name="Freeform 9"/>
+          <p:cNvPr id="3" name="TextBox 6">
+            <a:extLst>
+              <a:ext uri="{FF2B5EF4-FFF2-40B4-BE49-F238E27FC236}">
+                <a16:creationId xmlns:a16="http://schemas.microsoft.com/office/drawing/2014/main" id="{B41085EE-8EC8-08D1-66CA-09901422EA41}"/>
+              </a:ext>
+            </a:extLst>
+          </p:cNvPr>
+          <p:cNvSpPr txBox="1"/>
+          <p:nvPr/>
+        </p:nvSpPr>
+        <p:spPr>
+          <a:xfrm>
+            <a:off x="1981200" y="2867916"/>
+            <a:ext cx="2355189" cy="410369"/>
+          </a:xfrm>
+          <a:prstGeom prst="rect">
+            <a:avLst/>
+          </a:prstGeom>
+        </p:spPr>
+        <p:txBody>
+          <a:bodyPr wrap="square" lIns="0" tIns="0" rIns="0" bIns="0" rtlCol="0" anchor="t">
+            <a:spAutoFit/>
+          </a:bodyPr>
+          <a:lstStyle/>
+          <a:p>
+            <a:pPr marL="0" lvl="0" indent="0" algn="l">
+              <a:lnSpc>
+                <a:spcPts val="3191"/>
+              </a:lnSpc>
+            </a:pPr>
+            <a:r>
+              <a:rPr lang="en-US" sz="2799" dirty="0">
+                <a:solidFill>
+                  <a:srgbClr val="FFFFFF"/>
+                </a:solidFill>
+                <a:latin typeface="Koho"/>
+                <a:ea typeface="Koho"/>
+                <a:cs typeface="Koho"/>
+                <a:sym typeface="Koho"/>
+              </a:rPr>
+              <a:t>Motivation</a:t>
+            </a:r>
+          </a:p>
+        </p:txBody>
+      </p:sp>
+      <p:sp>
+        <p:nvSpPr>
+          <p:cNvPr id="11" name="Freeform 4">
+            <a:extLst>
+              <a:ext uri="{FF2B5EF4-FFF2-40B4-BE49-F238E27FC236}">
+                <a16:creationId xmlns:a16="http://schemas.microsoft.com/office/drawing/2014/main" id="{DF740D35-5493-E24C-8E70-E9C37ED54CDC}"/>
+              </a:ext>
+            </a:extLst>
+          </p:cNvPr>
           <p:cNvSpPr/>
           <p:nvPr/>
         </p:nvSpPr>
         <p:spPr>
           <a:xfrm>
-            <a:off x="1829272" y="7433472"/>
-            <a:ext cx="679170" cy="679170"/>
+            <a:off x="838200" y="3740997"/>
+            <a:ext cx="665955" cy="669725"/>
           </a:xfrm>
           <a:custGeom>
             <a:avLst/>
@@ -4486,18 +4484,18 @@
             <a:cxnLst/>
             <a:rect l="l" t="t" r="r" b="b"/>
             <a:pathLst>
-              <a:path w="679170" h="679170">
+              <a:path w="665955" h="669725">
                 <a:moveTo>
                   <a:pt x="0" y="0"/>
                 </a:moveTo>
                 <a:lnTo>
-                  <a:pt x="679170" y="0"/>
+                  <a:pt x="665956" y="0"/>
                 </a:lnTo>
                 <a:lnTo>
-                  <a:pt x="679170" y="679169"/>
+                  <a:pt x="665956" y="669725"/>
                 </a:lnTo>
                 <a:lnTo>
-                  <a:pt x="0" y="679169"/>
+                  <a:pt x="0" y="669725"/>
                 </a:lnTo>
                 <a:lnTo>
                   <a:pt x="0" y="0"/>
@@ -4507,13 +4505,7 @@
             </a:pathLst>
           </a:custGeom>
           <a:blipFill>
-            <a:blip r:embed="rId2">
-              <a:extLst>
-                <a:ext uri="{96DAC541-7B7A-43D3-8B79-37D633B846F1}">
-                  <asvg:svgBlip xmlns:asvg="http://schemas.microsoft.com/office/drawing/2016/SVG/main" r:embed="rId3"/>
-                </a:ext>
-              </a:extLst>
-            </a:blip>
+            <a:blip r:embed="rId2"/>
             <a:stretch>
               <a:fillRect/>
             </a:stretch>
@@ -4522,73 +4514,90 @@
       </p:sp>
       <p:sp>
         <p:nvSpPr>
-          <p:cNvPr id="10" name="TextBox 10"/>
+          <p:cNvPr id="13" name="Freeform 4">
+            <a:extLst>
+              <a:ext uri="{FF2B5EF4-FFF2-40B4-BE49-F238E27FC236}">
+                <a16:creationId xmlns:a16="http://schemas.microsoft.com/office/drawing/2014/main" id="{A8EDE367-CC47-7003-05F0-914440D36CCC}"/>
+              </a:ext>
+            </a:extLst>
+          </p:cNvPr>
+          <p:cNvSpPr/>
+          <p:nvPr/>
+        </p:nvSpPr>
+        <p:spPr>
+          <a:xfrm>
+            <a:off x="838200" y="4727312"/>
+            <a:ext cx="665955" cy="669725"/>
+          </a:xfrm>
+          <a:custGeom>
+            <a:avLst/>
+            <a:gdLst/>
+            <a:ahLst/>
+            <a:cxnLst/>
+            <a:rect l="l" t="t" r="r" b="b"/>
+            <a:pathLst>
+              <a:path w="665955" h="669725">
+                <a:moveTo>
+                  <a:pt x="0" y="0"/>
+                </a:moveTo>
+                <a:lnTo>
+                  <a:pt x="665956" y="0"/>
+                </a:lnTo>
+                <a:lnTo>
+                  <a:pt x="665956" y="669725"/>
+                </a:lnTo>
+                <a:lnTo>
+                  <a:pt x="0" y="669725"/>
+                </a:lnTo>
+                <a:lnTo>
+                  <a:pt x="0" y="0"/>
+                </a:lnTo>
+                <a:close/>
+              </a:path>
+            </a:pathLst>
+          </a:custGeom>
+          <a:blipFill>
+            <a:blip r:embed="rId2"/>
+            <a:stretch>
+              <a:fillRect/>
+            </a:stretch>
+          </a:blipFill>
+        </p:spPr>
+      </p:sp>
+      <p:sp>
+        <p:nvSpPr>
+          <p:cNvPr id="14" name="TextBox 6">
+            <a:extLst>
+              <a:ext uri="{FF2B5EF4-FFF2-40B4-BE49-F238E27FC236}">
+                <a16:creationId xmlns:a16="http://schemas.microsoft.com/office/drawing/2014/main" id="{9F9A8333-D2EE-DB67-B1A6-86120F1A0677}"/>
+              </a:ext>
+            </a:extLst>
+          </p:cNvPr>
           <p:cNvSpPr txBox="1"/>
           <p:nvPr/>
         </p:nvSpPr>
         <p:spPr>
           <a:xfrm>
-            <a:off x="1829272" y="1355083"/>
-            <a:ext cx="10894849" cy="1238210"/>
+            <a:off x="1886950" y="4825261"/>
+            <a:ext cx="2837450" cy="410369"/>
           </a:xfrm>
           <a:prstGeom prst="rect">
             <a:avLst/>
           </a:prstGeom>
         </p:spPr>
         <p:txBody>
-          <a:bodyPr lIns="0" tIns="0" rIns="0" bIns="0" rtlCol="0" anchor="t">
+          <a:bodyPr wrap="square" lIns="0" tIns="0" rIns="0" bIns="0" rtlCol="0" anchor="t">
             <a:spAutoFit/>
           </a:bodyPr>
           <a:lstStyle/>
           <a:p>
             <a:pPr marL="0" lvl="0" indent="0" algn="l">
               <a:lnSpc>
-                <a:spcPts val="8543"/>
+                <a:spcPts val="3191"/>
               </a:lnSpc>
             </a:pPr>
             <a:r>
-              <a:rPr lang="en-US" sz="7494" b="1">
-                <a:solidFill>
-                  <a:srgbClr val="FFFFFF"/>
-                </a:solidFill>
-                <a:latin typeface="Neo Tech Bold"/>
-                <a:ea typeface="Neo Tech Bold"/>
-                <a:cs typeface="Neo Tech Bold"/>
-                <a:sym typeface="Neo Tech Bold"/>
-              </a:rPr>
-              <a:t>DATA MODEL</a:t>
-            </a:r>
-          </a:p>
-        </p:txBody>
-      </p:sp>
-      <p:sp>
-        <p:nvSpPr>
-          <p:cNvPr id="11" name="TextBox 11"/>
-          <p:cNvSpPr txBox="1"/>
-          <p:nvPr/>
-        </p:nvSpPr>
-        <p:spPr>
-          <a:xfrm>
-            <a:off x="2895628" y="3076709"/>
-            <a:ext cx="10148400" cy="1592946"/>
-          </a:xfrm>
-          <a:prstGeom prst="rect">
-            <a:avLst/>
-          </a:prstGeom>
-        </p:spPr>
-        <p:txBody>
-          <a:bodyPr lIns="0" tIns="0" rIns="0" bIns="0" rtlCol="0" anchor="t">
-            <a:spAutoFit/>
-          </a:bodyPr>
-          <a:lstStyle/>
-          <a:p>
-            <a:pPr marL="0" lvl="0" indent="0" algn="l">
-              <a:lnSpc>
-                <a:spcPts val="3189"/>
-              </a:lnSpc>
-            </a:pPr>
-            <a:r>
-              <a:rPr lang="en-US" sz="2798">
+              <a:rPr lang="en-US" sz="2799" dirty="0">
                 <a:solidFill>
                   <a:srgbClr val="FFFFFF"/>
                 </a:solidFill>
@@ -4597,39 +4606,97 @@
                 <a:cs typeface="Koho"/>
                 <a:sym typeface="Koho"/>
               </a:rPr>
-              <a:t>Core Entities: User, Submission, Problem, Topic, and Recommendation form the foundation of CodePulse's data architecture, enabling comprehensive tracking of coding performance and personalized insights.</a:t>
-            </a:r>
-          </a:p>
-        </p:txBody>
-      </p:sp>
-      <p:sp>
-        <p:nvSpPr>
-          <p:cNvPr id="12" name="TextBox 12"/>
+              <a:t>Proposed Solution</a:t>
+            </a:r>
+          </a:p>
+        </p:txBody>
+      </p:sp>
+      <p:sp>
+        <p:nvSpPr>
+          <p:cNvPr id="15" name="Freeform 4">
+            <a:extLst>
+              <a:ext uri="{FF2B5EF4-FFF2-40B4-BE49-F238E27FC236}">
+                <a16:creationId xmlns:a16="http://schemas.microsoft.com/office/drawing/2014/main" id="{99E2E825-E007-7DA2-06B7-26C60FDCA64B}"/>
+              </a:ext>
+            </a:extLst>
+          </p:cNvPr>
+          <p:cNvSpPr/>
+          <p:nvPr/>
+        </p:nvSpPr>
+        <p:spPr>
+          <a:xfrm>
+            <a:off x="838200" y="5708256"/>
+            <a:ext cx="665955" cy="669725"/>
+          </a:xfrm>
+          <a:custGeom>
+            <a:avLst/>
+            <a:gdLst/>
+            <a:ahLst/>
+            <a:cxnLst/>
+            <a:rect l="l" t="t" r="r" b="b"/>
+            <a:pathLst>
+              <a:path w="665955" h="669725">
+                <a:moveTo>
+                  <a:pt x="0" y="0"/>
+                </a:moveTo>
+                <a:lnTo>
+                  <a:pt x="665956" y="0"/>
+                </a:lnTo>
+                <a:lnTo>
+                  <a:pt x="665956" y="669725"/>
+                </a:lnTo>
+                <a:lnTo>
+                  <a:pt x="0" y="669725"/>
+                </a:lnTo>
+                <a:lnTo>
+                  <a:pt x="0" y="0"/>
+                </a:lnTo>
+                <a:close/>
+              </a:path>
+            </a:pathLst>
+          </a:custGeom>
+          <a:blipFill>
+            <a:blip r:embed="rId2"/>
+            <a:stretch>
+              <a:fillRect/>
+            </a:stretch>
+          </a:blipFill>
+        </p:spPr>
+      </p:sp>
+      <p:sp>
+        <p:nvSpPr>
+          <p:cNvPr id="16" name="TextBox 6">
+            <a:extLst>
+              <a:ext uri="{FF2B5EF4-FFF2-40B4-BE49-F238E27FC236}">
+                <a16:creationId xmlns:a16="http://schemas.microsoft.com/office/drawing/2014/main" id="{AC6B9738-1178-0332-82A1-3A95F44D3B08}"/>
+              </a:ext>
+            </a:extLst>
+          </p:cNvPr>
           <p:cNvSpPr txBox="1"/>
           <p:nvPr/>
         </p:nvSpPr>
         <p:spPr>
           <a:xfrm>
-            <a:off x="2895628" y="5035952"/>
-            <a:ext cx="10148400" cy="1192896"/>
+            <a:off x="1886951" y="5837935"/>
+            <a:ext cx="2837449" cy="410369"/>
           </a:xfrm>
           <a:prstGeom prst="rect">
             <a:avLst/>
           </a:prstGeom>
         </p:spPr>
         <p:txBody>
-          <a:bodyPr lIns="0" tIns="0" rIns="0" bIns="0" rtlCol="0" anchor="t">
+          <a:bodyPr wrap="square" lIns="0" tIns="0" rIns="0" bIns="0" rtlCol="0" anchor="t">
             <a:spAutoFit/>
           </a:bodyPr>
           <a:lstStyle/>
           <a:p>
             <a:pPr marL="0" lvl="0" indent="0" algn="l">
               <a:lnSpc>
-                <a:spcPts val="3189"/>
+                <a:spcPts val="3191"/>
               </a:lnSpc>
             </a:pPr>
             <a:r>
-              <a:rPr lang="en-US" sz="2798">
+              <a:rPr lang="en-US" sz="2799" dirty="0">
                 <a:solidFill>
                   <a:srgbClr val="FFFFFF"/>
                 </a:solidFill>
@@ -4638,39 +4705,104 @@
                 <a:cs typeface="Koho"/>
                 <a:sym typeface="Koho"/>
               </a:rPr>
-              <a:t>User-Submission Relationship: Each User can have many Submissions, allowing the system to track all coding attempts and analyze patterns over time for weakness detection.</a:t>
-            </a:r>
-          </a:p>
-        </p:txBody>
-      </p:sp>
-      <p:sp>
-        <p:nvSpPr>
-          <p:cNvPr id="13" name="TextBox 13"/>
+              <a:t>System Modules</a:t>
+            </a:r>
+          </a:p>
+        </p:txBody>
+      </p:sp>
+      <p:sp>
+        <p:nvSpPr>
+          <p:cNvPr id="17" name="Freeform 4">
+            <a:extLst>
+              <a:ext uri="{FF2B5EF4-FFF2-40B4-BE49-F238E27FC236}">
+                <a16:creationId xmlns:a16="http://schemas.microsoft.com/office/drawing/2014/main" id="{8B061C4D-4098-C113-8A54-F08120DBE68D}"/>
+              </a:ext>
+            </a:extLst>
+          </p:cNvPr>
+          <p:cNvSpPr/>
+          <p:nvPr/>
+        </p:nvSpPr>
+        <p:spPr>
+          <a:xfrm>
+            <a:off x="838200" y="6691816"/>
+            <a:ext cx="665955" cy="669725"/>
+          </a:xfrm>
+          <a:custGeom>
+            <a:avLst/>
+            <a:gdLst/>
+            <a:ahLst/>
+            <a:cxnLst/>
+            <a:rect l="l" t="t" r="r" b="b"/>
+            <a:pathLst>
+              <a:path w="665955" h="669725">
+                <a:moveTo>
+                  <a:pt x="0" y="0"/>
+                </a:moveTo>
+                <a:lnTo>
+                  <a:pt x="665956" y="0"/>
+                </a:lnTo>
+                <a:lnTo>
+                  <a:pt x="665956" y="669725"/>
+                </a:lnTo>
+                <a:lnTo>
+                  <a:pt x="0" y="669725"/>
+                </a:lnTo>
+                <a:lnTo>
+                  <a:pt x="0" y="0"/>
+                </a:lnTo>
+                <a:close/>
+              </a:path>
+            </a:pathLst>
+          </a:custGeom>
+          <a:blipFill>
+            <a:blip r:embed="rId2"/>
+            <a:stretch>
+              <a:fillRect/>
+            </a:stretch>
+          </a:blipFill>
+        </p:spPr>
+        <p:txBody>
+          <a:bodyPr/>
+          <a:lstStyle/>
+          <a:p>
+            <a:endParaRPr lang="en-SG" dirty="0"/>
+          </a:p>
+        </p:txBody>
+      </p:sp>
+      <p:sp>
+        <p:nvSpPr>
+          <p:cNvPr id="18" name="TextBox 6">
+            <a:extLst>
+              <a:ext uri="{FF2B5EF4-FFF2-40B4-BE49-F238E27FC236}">
+                <a16:creationId xmlns:a16="http://schemas.microsoft.com/office/drawing/2014/main" id="{610A7BDF-CE4C-6E45-7BC1-1C10DD65A3C9}"/>
+              </a:ext>
+            </a:extLst>
+          </p:cNvPr>
           <p:cNvSpPr txBox="1"/>
           <p:nvPr/>
         </p:nvSpPr>
         <p:spPr>
           <a:xfrm>
-            <a:off x="2895628" y="6990863"/>
-            <a:ext cx="10148400" cy="1192896"/>
+            <a:off x="1885179" y="6821493"/>
+            <a:ext cx="2837449" cy="410369"/>
           </a:xfrm>
           <a:prstGeom prst="rect">
             <a:avLst/>
           </a:prstGeom>
         </p:spPr>
         <p:txBody>
-          <a:bodyPr lIns="0" tIns="0" rIns="0" bIns="0" rtlCol="0" anchor="t">
+          <a:bodyPr wrap="square" lIns="0" tIns="0" rIns="0" bIns="0" rtlCol="0" anchor="t">
             <a:spAutoFit/>
           </a:bodyPr>
           <a:lstStyle/>
           <a:p>
             <a:pPr marL="0" lvl="0" indent="0" algn="l">
               <a:lnSpc>
-                <a:spcPts val="3189"/>
+                <a:spcPts val="3191"/>
               </a:lnSpc>
             </a:pPr>
             <a:r>
-              <a:rPr lang="en-US" sz="2798">
+              <a:rPr lang="en-US" sz="2799" dirty="0">
                 <a:solidFill>
                   <a:srgbClr val="FFFFFF"/>
                 </a:solidFill>
@@ -4679,7 +4811,259 @@
                 <a:cs typeface="Koho"/>
                 <a:sym typeface="Koho"/>
               </a:rPr>
-              <a:t>Problem-Topic Mapping: Each Submission links to one Problem, while each Problem can be associated with many Topics, enabling granular skill classification and targeted recommendations.</a:t>
+              <a:t>System Workflow</a:t>
+            </a:r>
+          </a:p>
+        </p:txBody>
+      </p:sp>
+      <p:sp>
+        <p:nvSpPr>
+          <p:cNvPr id="19" name="TextBox 6">
+            <a:extLst>
+              <a:ext uri="{FF2B5EF4-FFF2-40B4-BE49-F238E27FC236}">
+                <a16:creationId xmlns:a16="http://schemas.microsoft.com/office/drawing/2014/main" id="{1D8C0459-6B3E-044D-E9E8-E29AEF46AAFE}"/>
+              </a:ext>
+            </a:extLst>
+          </p:cNvPr>
+          <p:cNvSpPr txBox="1"/>
+          <p:nvPr/>
+        </p:nvSpPr>
+        <p:spPr>
+          <a:xfrm>
+            <a:off x="1943986" y="3916571"/>
+            <a:ext cx="3542414" cy="410369"/>
+          </a:xfrm>
+          <a:prstGeom prst="rect">
+            <a:avLst/>
+          </a:prstGeom>
+        </p:spPr>
+        <p:txBody>
+          <a:bodyPr wrap="square" lIns="0" tIns="0" rIns="0" bIns="0" rtlCol="0" anchor="t">
+            <a:spAutoFit/>
+          </a:bodyPr>
+          <a:lstStyle/>
+          <a:p>
+            <a:pPr marL="0" lvl="0" indent="0" algn="l">
+              <a:lnSpc>
+                <a:spcPts val="3191"/>
+              </a:lnSpc>
+            </a:pPr>
+            <a:r>
+              <a:rPr lang="en-US" sz="2799" dirty="0">
+                <a:solidFill>
+                  <a:srgbClr val="FFFFFF"/>
+                </a:solidFill>
+                <a:latin typeface="Koho"/>
+                <a:ea typeface="Koho"/>
+                <a:cs typeface="Koho"/>
+                <a:sym typeface="Koho"/>
+              </a:rPr>
+              <a:t>Problem Statement</a:t>
+            </a:r>
+          </a:p>
+        </p:txBody>
+      </p:sp>
+      <p:sp>
+        <p:nvSpPr>
+          <p:cNvPr id="20" name="Freeform 4">
+            <a:extLst>
+              <a:ext uri="{FF2B5EF4-FFF2-40B4-BE49-F238E27FC236}">
+                <a16:creationId xmlns:a16="http://schemas.microsoft.com/office/drawing/2014/main" id="{F055D1B3-59AD-5EF7-E5CE-B5FE5B6CD2F8}"/>
+              </a:ext>
+            </a:extLst>
+          </p:cNvPr>
+          <p:cNvSpPr/>
+          <p:nvPr/>
+        </p:nvSpPr>
+        <p:spPr>
+          <a:xfrm>
+            <a:off x="838200" y="7735674"/>
+            <a:ext cx="665955" cy="669725"/>
+          </a:xfrm>
+          <a:custGeom>
+            <a:avLst/>
+            <a:gdLst/>
+            <a:ahLst/>
+            <a:cxnLst/>
+            <a:rect l="l" t="t" r="r" b="b"/>
+            <a:pathLst>
+              <a:path w="665955" h="669725">
+                <a:moveTo>
+                  <a:pt x="0" y="0"/>
+                </a:moveTo>
+                <a:lnTo>
+                  <a:pt x="665956" y="0"/>
+                </a:lnTo>
+                <a:lnTo>
+                  <a:pt x="665956" y="669725"/>
+                </a:lnTo>
+                <a:lnTo>
+                  <a:pt x="0" y="669725"/>
+                </a:lnTo>
+                <a:lnTo>
+                  <a:pt x="0" y="0"/>
+                </a:lnTo>
+                <a:close/>
+              </a:path>
+            </a:pathLst>
+          </a:custGeom>
+          <a:blipFill>
+            <a:blip r:embed="rId2"/>
+            <a:stretch>
+              <a:fillRect/>
+            </a:stretch>
+          </a:blipFill>
+        </p:spPr>
+      </p:sp>
+      <p:sp>
+        <p:nvSpPr>
+          <p:cNvPr id="21" name="TextBox 6">
+            <a:extLst>
+              <a:ext uri="{FF2B5EF4-FFF2-40B4-BE49-F238E27FC236}">
+                <a16:creationId xmlns:a16="http://schemas.microsoft.com/office/drawing/2014/main" id="{BD5E02B8-2D83-753B-7C4D-C1365F7ED3AA}"/>
+              </a:ext>
+            </a:extLst>
+          </p:cNvPr>
+          <p:cNvSpPr txBox="1"/>
+          <p:nvPr/>
+        </p:nvSpPr>
+        <p:spPr>
+          <a:xfrm>
+            <a:off x="1886951" y="7865353"/>
+            <a:ext cx="2837449" cy="410369"/>
+          </a:xfrm>
+          <a:prstGeom prst="rect">
+            <a:avLst/>
+          </a:prstGeom>
+        </p:spPr>
+        <p:txBody>
+          <a:bodyPr wrap="square" lIns="0" tIns="0" rIns="0" bIns="0" rtlCol="0" anchor="t">
+            <a:spAutoFit/>
+          </a:bodyPr>
+          <a:lstStyle/>
+          <a:p>
+            <a:pPr marL="0" lvl="0" indent="0" algn="l">
+              <a:lnSpc>
+                <a:spcPts val="3191"/>
+              </a:lnSpc>
+            </a:pPr>
+            <a:r>
+              <a:rPr lang="en-US" sz="2799" dirty="0">
+                <a:solidFill>
+                  <a:srgbClr val="FFFFFF"/>
+                </a:solidFill>
+                <a:latin typeface="Koho"/>
+                <a:ea typeface="Koho"/>
+                <a:cs typeface="Koho"/>
+                <a:sym typeface="Koho"/>
+              </a:rPr>
+              <a:t>Technology Stack</a:t>
+            </a:r>
+          </a:p>
+        </p:txBody>
+      </p:sp>
+      <p:sp>
+        <p:nvSpPr>
+          <p:cNvPr id="22" name="Freeform 4">
+            <a:extLst>
+              <a:ext uri="{FF2B5EF4-FFF2-40B4-BE49-F238E27FC236}">
+                <a16:creationId xmlns:a16="http://schemas.microsoft.com/office/drawing/2014/main" id="{535073B6-FB1D-72D5-0552-6A24C16B1414}"/>
+              </a:ext>
+            </a:extLst>
+          </p:cNvPr>
+          <p:cNvSpPr/>
+          <p:nvPr/>
+        </p:nvSpPr>
+        <p:spPr>
+          <a:xfrm>
+            <a:off x="838200" y="8719234"/>
+            <a:ext cx="665955" cy="669725"/>
+          </a:xfrm>
+          <a:custGeom>
+            <a:avLst/>
+            <a:gdLst/>
+            <a:ahLst/>
+            <a:cxnLst/>
+            <a:rect l="l" t="t" r="r" b="b"/>
+            <a:pathLst>
+              <a:path w="665955" h="669725">
+                <a:moveTo>
+                  <a:pt x="0" y="0"/>
+                </a:moveTo>
+                <a:lnTo>
+                  <a:pt x="665956" y="0"/>
+                </a:lnTo>
+                <a:lnTo>
+                  <a:pt x="665956" y="669725"/>
+                </a:lnTo>
+                <a:lnTo>
+                  <a:pt x="0" y="669725"/>
+                </a:lnTo>
+                <a:lnTo>
+                  <a:pt x="0" y="0"/>
+                </a:lnTo>
+                <a:close/>
+              </a:path>
+            </a:pathLst>
+          </a:custGeom>
+          <a:blipFill>
+            <a:blip r:embed="rId2"/>
+            <a:stretch>
+              <a:fillRect/>
+            </a:stretch>
+          </a:blipFill>
+        </p:spPr>
+        <p:txBody>
+          <a:bodyPr/>
+          <a:lstStyle/>
+          <a:p>
+            <a:endParaRPr lang="en-SG" dirty="0"/>
+          </a:p>
+        </p:txBody>
+      </p:sp>
+      <p:sp>
+        <p:nvSpPr>
+          <p:cNvPr id="23" name="TextBox 6">
+            <a:extLst>
+              <a:ext uri="{FF2B5EF4-FFF2-40B4-BE49-F238E27FC236}">
+                <a16:creationId xmlns:a16="http://schemas.microsoft.com/office/drawing/2014/main" id="{DD822FC2-431F-1A38-6F24-8D3A29C55055}"/>
+              </a:ext>
+            </a:extLst>
+          </p:cNvPr>
+          <p:cNvSpPr txBox="1"/>
+          <p:nvPr/>
+        </p:nvSpPr>
+        <p:spPr>
+          <a:xfrm>
+            <a:off x="1885179" y="8848911"/>
+            <a:ext cx="3372621" cy="410369"/>
+          </a:xfrm>
+          <a:prstGeom prst="rect">
+            <a:avLst/>
+          </a:prstGeom>
+        </p:spPr>
+        <p:txBody>
+          <a:bodyPr wrap="square" lIns="0" tIns="0" rIns="0" bIns="0" rtlCol="0" anchor="t">
+            <a:spAutoFit/>
+          </a:bodyPr>
+          <a:lstStyle/>
+          <a:p>
+            <a:pPr marL="0" lvl="0" indent="0" algn="l">
+              <a:lnSpc>
+                <a:spcPts val="3191"/>
+              </a:lnSpc>
+            </a:pPr>
+            <a:r>
+              <a:rPr lang="en-US" sz="2799" dirty="0">
+                <a:solidFill>
+                  <a:srgbClr val="FFFFFF"/>
+                </a:solidFill>
+                <a:latin typeface="Koho"/>
+                <a:ea typeface="Koho"/>
+                <a:cs typeface="Koho"/>
+                <a:sym typeface="Koho"/>
+              </a:rPr>
+              <a:t>System Architecture</a:t>
             </a:r>
           </a:p>
         </p:txBody>
@@ -4692,7 +5076,7 @@
 </p:sld>
 </file>
 
-<file path=ppt/slides/slide15.xml><?xml version="1.0" encoding="utf-8"?>
+<file path=ppt/slides/slide3.xml><?xml version="1.0" encoding="utf-8"?>
 <p:sld xmlns:a="http://schemas.openxmlformats.org/drawingml/2006/main" xmlns:r="http://schemas.openxmlformats.org/officeDocument/2006/relationships" xmlns:p="http://schemas.openxmlformats.org/presentationml/2006/main">
   <p:cSld>
     <p:spTree>
@@ -4717,8 +5101,8 @@
         </p:nvSpPr>
         <p:spPr>
           <a:xfrm>
-            <a:off x="7341974" y="4178708"/>
-            <a:ext cx="8975409" cy="1592961"/>
+            <a:off x="5257800" y="723900"/>
+            <a:ext cx="10894849" cy="1238250"/>
           </a:xfrm>
           <a:prstGeom prst="rect">
             <a:avLst/>
@@ -4731,12 +5115,53 @@
           <a:lstStyle/>
           <a:p>
             <a:pPr marL="0" lvl="0" indent="0" algn="l">
+              <a:lnSpc>
+                <a:spcPts val="8549"/>
+              </a:lnSpc>
+            </a:pPr>
+            <a:r>
+              <a:rPr lang="en-US" sz="7500" b="1" dirty="0">
+                <a:solidFill>
+                  <a:srgbClr val="005FC2"/>
+                </a:solidFill>
+                <a:latin typeface="Neo Tech Bold"/>
+                <a:ea typeface="Neo Tech Bold"/>
+                <a:cs typeface="Neo Tech Bold"/>
+                <a:sym typeface="Neo Tech Bold"/>
+              </a:rPr>
+              <a:t>INTRODUCTION</a:t>
+            </a:r>
+          </a:p>
+        </p:txBody>
+      </p:sp>
+      <p:sp>
+        <p:nvSpPr>
+          <p:cNvPr id="3" name="TextBox 3"/>
+          <p:cNvSpPr txBox="1"/>
+          <p:nvPr/>
+        </p:nvSpPr>
+        <p:spPr>
+          <a:xfrm>
+            <a:off x="1371600" y="2857500"/>
+            <a:ext cx="14781049" cy="5763309"/>
+          </a:xfrm>
+          <a:prstGeom prst="rect">
+            <a:avLst/>
+          </a:prstGeom>
+        </p:spPr>
+        <p:txBody>
+          <a:bodyPr wrap="square" lIns="0" tIns="0" rIns="0" bIns="0" rtlCol="0" anchor="t">
+            <a:spAutoFit/>
+          </a:bodyPr>
+          <a:lstStyle/>
+          <a:p>
+            <a:pPr marL="0" lvl="0" indent="0" algn="just">
               <a:lnSpc>
                 <a:spcPts val="3191"/>
               </a:lnSpc>
             </a:pPr>
             <a:r>
-              <a:rPr lang="en-US" sz="2799" dirty="0">
+              <a:rPr lang="en-US" sz="4000" dirty="0" err="1">
                 <a:solidFill>
                   <a:srgbClr val="005FC2"/>
                 </a:solidFill>
@@ -4745,17 +5170,69 @@
                 <a:cs typeface="Koho"/>
                 <a:sym typeface="Koho"/>
               </a:rPr>
-              <a:t>Month 1–2: Research &amp; Foundation</a:t>
-            </a:r>
-          </a:p>
-          <a:p>
-            <a:pPr marL="0" lvl="0" indent="0" algn="l">
+              <a:t>CodePulse</a:t>
+            </a:r>
+            <a:r>
+              <a:rPr lang="en-US" sz="4000" dirty="0">
+                <a:solidFill>
+                  <a:srgbClr val="005FC2"/>
+                </a:solidFill>
+                <a:latin typeface="Koho"/>
+                <a:ea typeface="Koho"/>
+                <a:cs typeface="Koho"/>
+                <a:sym typeface="Koho"/>
+              </a:rPr>
+              <a:t> is an intelligent coding performance analyzer designed to transform how programmers improve their skills. While popular coding platforms like </a:t>
+            </a:r>
+            <a:r>
+              <a:rPr lang="en-US" sz="4000" dirty="0" err="1">
+                <a:solidFill>
+                  <a:srgbClr val="005FC2"/>
+                </a:solidFill>
+                <a:latin typeface="Koho"/>
+                <a:ea typeface="Koho"/>
+                <a:cs typeface="Koho"/>
+                <a:sym typeface="Koho"/>
+              </a:rPr>
+              <a:t>Codeforces</a:t>
+            </a:r>
+            <a:r>
+              <a:rPr lang="en-US" sz="4000" dirty="0">
+                <a:solidFill>
+                  <a:srgbClr val="005FC2"/>
+                </a:solidFill>
+                <a:latin typeface="Koho"/>
+                <a:ea typeface="Koho"/>
+                <a:cs typeface="Koho"/>
+                <a:sym typeface="Koho"/>
+              </a:rPr>
+              <a:t> provide practice opportunities, they lack unified performance analysis and actionable insights.</a:t>
+            </a:r>
+          </a:p>
+          <a:p>
+            <a:pPr marL="0" lvl="0" indent="0" algn="just">
               <a:lnSpc>
                 <a:spcPts val="3191"/>
               </a:lnSpc>
             </a:pPr>
-            <a:r>
-              <a:rPr lang="en-US" sz="2799" dirty="0">
+            <a:endParaRPr lang="en-US" sz="4000" dirty="0">
+              <a:solidFill>
+                <a:srgbClr val="005FC2"/>
+              </a:solidFill>
+              <a:latin typeface="Koho"/>
+              <a:ea typeface="Koho"/>
+              <a:cs typeface="Koho"/>
+              <a:sym typeface="Koho"/>
+            </a:endParaRPr>
+          </a:p>
+          <a:p>
+            <a:pPr marL="0" lvl="0" indent="0" algn="just">
+              <a:lnSpc>
+                <a:spcPts val="3191"/>
+              </a:lnSpc>
+            </a:pPr>
+            <a:r>
+              <a:rPr lang="en-US" sz="4000" dirty="0" err="1">
                 <a:solidFill>
                   <a:srgbClr val="005FC2"/>
                 </a:solidFill>
@@ -4764,126 +5241,45 @@
                 <a:cs typeface="Koho"/>
                 <a:sym typeface="Koho"/>
               </a:rPr>
-              <a:t>Conduct research, prepare SRS documentation, integrate coding platform APIs, and design the PostgreSQL database schema.</a:t>
-            </a:r>
-          </a:p>
-        </p:txBody>
-      </p:sp>
-      <p:sp>
-        <p:nvSpPr>
-          <p:cNvPr id="5" name="Freeform 5"/>
-          <p:cNvSpPr/>
-          <p:nvPr/>
-        </p:nvSpPr>
-        <p:spPr>
-          <a:xfrm>
-            <a:off x="1936060" y="2708003"/>
-            <a:ext cx="4780054" cy="6310303"/>
-          </a:xfrm>
-          <a:custGeom>
-            <a:avLst/>
-            <a:gdLst/>
-            <a:ahLst/>
-            <a:cxnLst/>
-            <a:rect l="l" t="t" r="r" b="b"/>
-            <a:pathLst>
-              <a:path w="4780054" h="6310303">
-                <a:moveTo>
-                  <a:pt x="0" y="0"/>
-                </a:moveTo>
-                <a:lnTo>
-                  <a:pt x="4780054" y="0"/>
-                </a:lnTo>
-                <a:lnTo>
-                  <a:pt x="4780054" y="6310302"/>
-                </a:lnTo>
-                <a:lnTo>
-                  <a:pt x="0" y="6310302"/>
-                </a:lnTo>
-                <a:lnTo>
-                  <a:pt x="0" y="0"/>
-                </a:lnTo>
-                <a:close/>
-              </a:path>
-            </a:pathLst>
-          </a:custGeom>
-          <a:blipFill>
-            <a:blip r:embed="rId2"/>
-            <a:stretch>
-              <a:fillRect/>
-            </a:stretch>
-          </a:blipFill>
-        </p:spPr>
-      </p:sp>
-      <p:sp>
-        <p:nvSpPr>
-          <p:cNvPr id="6" name="TextBox 6"/>
-          <p:cNvSpPr txBox="1"/>
-          <p:nvPr/>
-        </p:nvSpPr>
-        <p:spPr>
-          <a:xfrm>
-            <a:off x="3622883" y="1246437"/>
-            <a:ext cx="10894849" cy="1238250"/>
-          </a:xfrm>
-          <a:prstGeom prst="rect">
-            <a:avLst/>
-          </a:prstGeom>
-        </p:spPr>
-        <p:txBody>
-          <a:bodyPr lIns="0" tIns="0" rIns="0" bIns="0" rtlCol="0" anchor="t">
-            <a:spAutoFit/>
-          </a:bodyPr>
-          <a:lstStyle/>
-          <a:p>
-            <a:pPr marL="0" lvl="0" indent="0" algn="ctr">
-              <a:lnSpc>
-                <a:spcPts val="8549"/>
-              </a:lnSpc>
-            </a:pPr>
-            <a:r>
-              <a:rPr lang="en-US" sz="7500" b="1">
+              <a:t>CodePulse</a:t>
+            </a:r>
+            <a:r>
+              <a:rPr lang="en-US" sz="4000" dirty="0">
                 <a:solidFill>
                   <a:srgbClr val="005FC2"/>
                 </a:solidFill>
-                <a:latin typeface="Neo Tech Bold"/>
-                <a:ea typeface="Neo Tech Bold"/>
-                <a:cs typeface="Neo Tech Bold"/>
-                <a:sym typeface="Neo Tech Bold"/>
-              </a:rPr>
-              <a:t>PROJECT TIMELINE</a:t>
-            </a:r>
-          </a:p>
-        </p:txBody>
-      </p:sp>
-      <p:sp>
-        <p:nvSpPr>
-          <p:cNvPr id="7" name="TextBox 7"/>
-          <p:cNvSpPr txBox="1"/>
-          <p:nvPr/>
-        </p:nvSpPr>
-        <p:spPr>
-          <a:xfrm>
-            <a:off x="7341974" y="6578754"/>
-            <a:ext cx="8975409" cy="1592961"/>
-          </a:xfrm>
-          <a:prstGeom prst="rect">
-            <a:avLst/>
-          </a:prstGeom>
-        </p:spPr>
-        <p:txBody>
-          <a:bodyPr lIns="0" tIns="0" rIns="0" bIns="0" rtlCol="0" anchor="t">
-            <a:spAutoFit/>
-          </a:bodyPr>
-          <a:lstStyle/>
-          <a:p>
-            <a:pPr marL="0" lvl="0" indent="0" algn="l">
+                <a:latin typeface="Koho"/>
+                <a:ea typeface="Koho"/>
+                <a:cs typeface="Koho"/>
+                <a:sym typeface="Koho"/>
+              </a:rPr>
+              <a:t> bridges this gap by analyzing coding data to identify weaknesses, track progress, and guide learning paths. Our target users include competitive programmers seeking to level up, computer science students preparing for assessments, and job candidates preparing for technical interviews.</a:t>
+            </a:r>
+          </a:p>
+          <a:p>
+            <a:pPr marL="0" lvl="0" indent="0" algn="just">
               <a:lnSpc>
                 <a:spcPts val="3191"/>
               </a:lnSpc>
             </a:pPr>
-            <a:r>
-              <a:rPr lang="en-US" sz="2799" dirty="0">
+            <a:endParaRPr lang="en-US" sz="4000" dirty="0">
+              <a:solidFill>
+                <a:srgbClr val="005FC2"/>
+              </a:solidFill>
+              <a:latin typeface="Koho"/>
+              <a:ea typeface="Koho"/>
+              <a:cs typeface="Koho"/>
+              <a:sym typeface="Koho"/>
+            </a:endParaRPr>
+          </a:p>
+          <a:p>
+            <a:pPr marL="0" lvl="0" indent="0" algn="just">
+              <a:lnSpc>
+                <a:spcPts val="3191"/>
+              </a:lnSpc>
+            </a:pPr>
+            <a:r>
+              <a:rPr lang="en-US" sz="4000" dirty="0">
                 <a:solidFill>
                   <a:srgbClr val="005FC2"/>
                 </a:solidFill>
@@ -4892,17 +5288,10 @@
                 <a:cs typeface="Koho"/>
                 <a:sym typeface="Koho"/>
               </a:rPr>
-              <a:t>Month 3–4: Core Development</a:t>
-            </a:r>
-          </a:p>
-          <a:p>
-            <a:pPr marL="0" lvl="0" indent="0" algn="l">
-              <a:lnSpc>
-                <a:spcPts val="3191"/>
-              </a:lnSpc>
-            </a:pPr>
-            <a:r>
-              <a:rPr lang="en-US" sz="2799" dirty="0">
+              <a:t>The core purpose of </a:t>
+            </a:r>
+            <a:r>
+              <a:rPr lang="en-US" sz="4000" dirty="0" err="1">
                 <a:solidFill>
                   <a:srgbClr val="005FC2"/>
                 </a:solidFill>
@@ -4911,7 +5300,19 @@
                 <a:cs typeface="Koho"/>
                 <a:sym typeface="Koho"/>
               </a:rPr>
-              <a:t>Build Spring Boot backend, develop performance analysis engine, and implement recommendation logic with topic classification.</a:t>
+              <a:t>CodePulse</a:t>
+            </a:r>
+            <a:r>
+              <a:rPr lang="en-US" sz="4000" dirty="0">
+                <a:solidFill>
+                  <a:srgbClr val="005FC2"/>
+                </a:solidFill>
+                <a:latin typeface="Koho"/>
+                <a:ea typeface="Koho"/>
+                <a:cs typeface="Koho"/>
+                <a:sym typeface="Koho"/>
+              </a:rPr>
+              <a:t> is to transform scattered statistics into intelligent, actionable insights that enable efficient and structured skill development.</a:t>
             </a:r>
           </a:p>
         </p:txBody>
@@ -4924,342 +5325,7 @@
 </p:sld>
 </file>
 
-<file path=ppt/slides/slide16.xml><?xml version="1.0" encoding="utf-8"?>
-<p:sld xmlns:a="http://schemas.openxmlformats.org/drawingml/2006/main" xmlns:r="http://schemas.openxmlformats.org/officeDocument/2006/relationships" xmlns:p="http://schemas.openxmlformats.org/presentationml/2006/main">
-  <p:cSld>
-    <p:bg>
-      <p:bgPr>
-        <a:solidFill>
-          <a:srgbClr val="005FC2"/>
-        </a:solidFill>
-        <a:effectLst/>
-      </p:bgPr>
-    </p:bg>
-    <p:spTree>
-      <p:nvGrpSpPr>
-        <p:cNvPr id="1" name=""/>
-        <p:cNvGrpSpPr/>
-        <p:nvPr/>
-      </p:nvGrpSpPr>
-      <p:grpSpPr>
-        <a:xfrm>
-          <a:off x="0" y="0"/>
-          <a:ext cx="0" cy="0"/>
-          <a:chOff x="0" y="0"/>
-          <a:chExt cx="0" cy="0"/>
-        </a:xfrm>
-      </p:grpSpPr>
-      <p:sp>
-        <p:nvSpPr>
-          <p:cNvPr id="4" name="Freeform 4"/>
-          <p:cNvSpPr/>
-          <p:nvPr/>
-        </p:nvSpPr>
-        <p:spPr>
-          <a:xfrm>
-            <a:off x="3489471" y="4362023"/>
-            <a:ext cx="968343" cy="968343"/>
-          </a:xfrm>
-          <a:custGeom>
-            <a:avLst/>
-            <a:gdLst/>
-            <a:ahLst/>
-            <a:cxnLst/>
-            <a:rect l="l" t="t" r="r" b="b"/>
-            <a:pathLst>
-              <a:path w="968343" h="968343">
-                <a:moveTo>
-                  <a:pt x="0" y="0"/>
-                </a:moveTo>
-                <a:lnTo>
-                  <a:pt x="968343" y="0"/>
-                </a:lnTo>
-                <a:lnTo>
-                  <a:pt x="968343" y="968343"/>
-                </a:lnTo>
-                <a:lnTo>
-                  <a:pt x="0" y="968343"/>
-                </a:lnTo>
-                <a:lnTo>
-                  <a:pt x="0" y="0"/>
-                </a:lnTo>
-                <a:close/>
-              </a:path>
-            </a:pathLst>
-          </a:custGeom>
-          <a:blipFill>
-            <a:blip r:embed="rId2"/>
-            <a:stretch>
-              <a:fillRect/>
-            </a:stretch>
-          </a:blipFill>
-        </p:spPr>
-      </p:sp>
-      <p:sp>
-        <p:nvSpPr>
-          <p:cNvPr id="5" name="TextBox 5"/>
-          <p:cNvSpPr txBox="1"/>
-          <p:nvPr/>
-        </p:nvSpPr>
-        <p:spPr>
-          <a:xfrm>
-            <a:off x="4336389" y="1587629"/>
-            <a:ext cx="9615222" cy="1238250"/>
-          </a:xfrm>
-          <a:prstGeom prst="rect">
-            <a:avLst/>
-          </a:prstGeom>
-        </p:spPr>
-        <p:txBody>
-          <a:bodyPr lIns="0" tIns="0" rIns="0" bIns="0" rtlCol="0" anchor="t">
-            <a:spAutoFit/>
-          </a:bodyPr>
-          <a:lstStyle/>
-          <a:p>
-            <a:pPr marL="0" lvl="0" indent="0" algn="ctr">
-              <a:lnSpc>
-                <a:spcPts val="8549"/>
-              </a:lnSpc>
-            </a:pPr>
-            <a:r>
-              <a:rPr lang="en-US" sz="7500" b="1">
-                <a:solidFill>
-                  <a:srgbClr val="FFFFFF"/>
-                </a:solidFill>
-                <a:latin typeface="Neo Tech Bold"/>
-                <a:ea typeface="Neo Tech Bold"/>
-                <a:cs typeface="Neo Tech Bold"/>
-                <a:sym typeface="Neo Tech Bold"/>
-              </a:rPr>
-              <a:t>TOOLS</a:t>
-            </a:r>
-          </a:p>
-        </p:txBody>
-      </p:sp>
-      <p:sp>
-        <p:nvSpPr>
-          <p:cNvPr id="6" name="TextBox 6"/>
-          <p:cNvSpPr txBox="1"/>
-          <p:nvPr/>
-        </p:nvSpPr>
-        <p:spPr>
-          <a:xfrm>
-            <a:off x="4813846" y="4315722"/>
-            <a:ext cx="10580784" cy="792861"/>
-          </a:xfrm>
-          <a:prstGeom prst="rect">
-            <a:avLst/>
-          </a:prstGeom>
-        </p:spPr>
-        <p:txBody>
-          <a:bodyPr lIns="0" tIns="0" rIns="0" bIns="0" rtlCol="0" anchor="t">
-            <a:spAutoFit/>
-          </a:bodyPr>
-          <a:lstStyle/>
-          <a:p>
-            <a:pPr marL="0" lvl="0" indent="0" algn="l">
-              <a:lnSpc>
-                <a:spcPts val="3191"/>
-              </a:lnSpc>
-            </a:pPr>
-            <a:r>
-              <a:rPr lang="en-US" sz="2799">
-                <a:solidFill>
-                  <a:srgbClr val="FFFFFF"/>
-                </a:solidFill>
-                <a:latin typeface="Koho"/>
-                <a:ea typeface="Koho"/>
-                <a:cs typeface="Koho"/>
-                <a:sym typeface="Koho"/>
-              </a:rPr>
-              <a:t>Design: Figma for UI/UX prototyping and mockups, draw.io for system diagrams, flowcharts, and architecture visualization.</a:t>
-            </a:r>
-          </a:p>
-        </p:txBody>
-      </p:sp>
-      <p:sp>
-        <p:nvSpPr>
-          <p:cNvPr id="7" name="TextBox 7"/>
-          <p:cNvSpPr txBox="1"/>
-          <p:nvPr/>
-        </p:nvSpPr>
-        <p:spPr>
-          <a:xfrm>
-            <a:off x="4813846" y="5856350"/>
-            <a:ext cx="10580784" cy="1192911"/>
-          </a:xfrm>
-          <a:prstGeom prst="rect">
-            <a:avLst/>
-          </a:prstGeom>
-        </p:spPr>
-        <p:txBody>
-          <a:bodyPr lIns="0" tIns="0" rIns="0" bIns="0" rtlCol="0" anchor="t">
-            <a:spAutoFit/>
-          </a:bodyPr>
-          <a:lstStyle/>
-          <a:p>
-            <a:pPr marL="0" lvl="0" indent="0" algn="l">
-              <a:lnSpc>
-                <a:spcPts val="3191"/>
-              </a:lnSpc>
-            </a:pPr>
-            <a:r>
-              <a:rPr lang="en-US" sz="2799">
-                <a:solidFill>
-                  <a:srgbClr val="FFFFFF"/>
-                </a:solidFill>
-                <a:latin typeface="Koho"/>
-                <a:ea typeface="Koho"/>
-                <a:cs typeface="Koho"/>
-                <a:sym typeface="Koho"/>
-              </a:rPr>
-              <a:t>Development: IntelliJ IDEA for Java/Spring Boot backend development, VS Code for Next.js frontend development and general coding tasks.</a:t>
-            </a:r>
-          </a:p>
-        </p:txBody>
-      </p:sp>
-      <p:sp>
-        <p:nvSpPr>
-          <p:cNvPr id="8" name="TextBox 8"/>
-          <p:cNvSpPr txBox="1"/>
-          <p:nvPr/>
-        </p:nvSpPr>
-        <p:spPr>
-          <a:xfrm>
-            <a:off x="4813846" y="7401685"/>
-            <a:ext cx="10580784" cy="1192911"/>
-          </a:xfrm>
-          <a:prstGeom prst="rect">
-            <a:avLst/>
-          </a:prstGeom>
-        </p:spPr>
-        <p:txBody>
-          <a:bodyPr lIns="0" tIns="0" rIns="0" bIns="0" rtlCol="0" anchor="t">
-            <a:spAutoFit/>
-          </a:bodyPr>
-          <a:lstStyle/>
-          <a:p>
-            <a:pPr marL="0" lvl="0" indent="0" algn="l">
-              <a:lnSpc>
-                <a:spcPts val="3191"/>
-              </a:lnSpc>
-            </a:pPr>
-            <a:r>
-              <a:rPr lang="en-US" sz="2799">
-                <a:solidFill>
-                  <a:srgbClr val="FFFFFF"/>
-                </a:solidFill>
-                <a:latin typeface="Koho"/>
-                <a:ea typeface="Koho"/>
-                <a:cs typeface="Koho"/>
-                <a:sym typeface="Koho"/>
-              </a:rPr>
-              <a:t>Testing &amp; Version Control: Postman for API testing and documentation, GitHub for version control and collaboration, PostgreSQL for database management.</a:t>
-            </a:r>
-          </a:p>
-        </p:txBody>
-      </p:sp>
-      <p:sp>
-        <p:nvSpPr>
-          <p:cNvPr id="9" name="Freeform 9"/>
-          <p:cNvSpPr/>
-          <p:nvPr/>
-        </p:nvSpPr>
-        <p:spPr>
-          <a:xfrm>
-            <a:off x="3564796" y="5982105"/>
-            <a:ext cx="779968" cy="779968"/>
-          </a:xfrm>
-          <a:custGeom>
-            <a:avLst/>
-            <a:gdLst/>
-            <a:ahLst/>
-            <a:cxnLst/>
-            <a:rect l="l" t="t" r="r" b="b"/>
-            <a:pathLst>
-              <a:path w="779968" h="779968">
-                <a:moveTo>
-                  <a:pt x="0" y="0"/>
-                </a:moveTo>
-                <a:lnTo>
-                  <a:pt x="779968" y="0"/>
-                </a:lnTo>
-                <a:lnTo>
-                  <a:pt x="779968" y="779968"/>
-                </a:lnTo>
-                <a:lnTo>
-                  <a:pt x="0" y="779968"/>
-                </a:lnTo>
-                <a:lnTo>
-                  <a:pt x="0" y="0"/>
-                </a:lnTo>
-                <a:close/>
-              </a:path>
-            </a:pathLst>
-          </a:custGeom>
-          <a:blipFill>
-            <a:blip r:embed="rId3"/>
-            <a:stretch>
-              <a:fillRect/>
-            </a:stretch>
-          </a:blipFill>
-        </p:spPr>
-      </p:sp>
-      <p:sp>
-        <p:nvSpPr>
-          <p:cNvPr id="10" name="Freeform 10"/>
-          <p:cNvSpPr/>
-          <p:nvPr/>
-        </p:nvSpPr>
-        <p:spPr>
-          <a:xfrm>
-            <a:off x="3584646" y="7468430"/>
-            <a:ext cx="837057" cy="1118014"/>
-          </a:xfrm>
-          <a:custGeom>
-            <a:avLst/>
-            <a:gdLst/>
-            <a:ahLst/>
-            <a:cxnLst/>
-            <a:rect l="l" t="t" r="r" b="b"/>
-            <a:pathLst>
-              <a:path w="837057" h="1118014">
-                <a:moveTo>
-                  <a:pt x="0" y="0"/>
-                </a:moveTo>
-                <a:lnTo>
-                  <a:pt x="837057" y="0"/>
-                </a:lnTo>
-                <a:lnTo>
-                  <a:pt x="837057" y="1118014"/>
-                </a:lnTo>
-                <a:lnTo>
-                  <a:pt x="0" y="1118014"/>
-                </a:lnTo>
-                <a:lnTo>
-                  <a:pt x="0" y="0"/>
-                </a:lnTo>
-                <a:close/>
-              </a:path>
-            </a:pathLst>
-          </a:custGeom>
-          <a:blipFill>
-            <a:blip r:embed="rId4"/>
-            <a:stretch>
-              <a:fillRect/>
-            </a:stretch>
-          </a:blipFill>
-        </p:spPr>
-      </p:sp>
-    </p:spTree>
-  </p:cSld>
-  <p:clrMapOvr>
-    <a:masterClrMapping/>
-  </p:clrMapOvr>
-</p:sld>
-</file>
-
-<file path=ppt/slides/slide17.xml><?xml version="1.0" encoding="utf-8"?>
+<file path=ppt/slides/slide4.xml><?xml version="1.0" encoding="utf-8"?>
 <p:sld xmlns:a="http://schemas.openxmlformats.org/drawingml/2006/main" xmlns:r="http://schemas.openxmlformats.org/officeDocument/2006/relationships" xmlns:p="http://schemas.openxmlformats.org/presentationml/2006/main">
   <p:cSld>
     <p:spTree>
@@ -5284,8 +5350,8 @@
         </p:nvSpPr>
         <p:spPr>
           <a:xfrm>
-            <a:off x="3953809" y="1685119"/>
-            <a:ext cx="10894849" cy="1238210"/>
+            <a:off x="7341973" y="3962796"/>
+            <a:ext cx="8975409" cy="2057936"/>
           </a:xfrm>
           <a:prstGeom prst="rect">
             <a:avLst/>
@@ -5297,13 +5363,124 @@
           </a:bodyPr>
           <a:lstStyle/>
           <a:p>
+            <a:pPr algn="just">
+              <a:lnSpc>
+                <a:spcPts val="3191"/>
+              </a:lnSpc>
+            </a:pPr>
+            <a:r>
+              <a:rPr lang="en-US" sz="3600" dirty="0">
+                <a:solidFill>
+                  <a:srgbClr val="005FC2"/>
+                </a:solidFill>
+                <a:latin typeface="Koho"/>
+                <a:ea typeface="Koho"/>
+                <a:cs typeface="Koho"/>
+                <a:sym typeface="Koho"/>
+              </a:rPr>
+              <a:t>Current coding platforms like </a:t>
+            </a:r>
+            <a:r>
+              <a:rPr lang="en-US" sz="3600" dirty="0" err="1">
+                <a:solidFill>
+                  <a:srgbClr val="005FC2"/>
+                </a:solidFill>
+                <a:latin typeface="Koho"/>
+                <a:ea typeface="Koho"/>
+                <a:cs typeface="Koho"/>
+                <a:sym typeface="Koho"/>
+              </a:rPr>
+              <a:t>Codeforces</a:t>
+            </a:r>
+            <a:r>
+              <a:rPr lang="en-US" sz="3600" dirty="0">
+                <a:solidFill>
+                  <a:srgbClr val="005FC2"/>
+                </a:solidFill>
+                <a:latin typeface="Koho"/>
+                <a:ea typeface="Koho"/>
+                <a:cs typeface="Koho"/>
+                <a:sym typeface="Koho"/>
+              </a:rPr>
+              <a:t> lack structured feedback mechanisms.. Users receive no automated weakness detection or personalized guidance to improve their skills systematically.</a:t>
+            </a:r>
+          </a:p>
+        </p:txBody>
+      </p:sp>
+      <p:sp>
+        <p:nvSpPr>
+          <p:cNvPr id="5" name="Freeform 5"/>
+          <p:cNvSpPr/>
+          <p:nvPr/>
+        </p:nvSpPr>
+        <p:spPr>
+          <a:xfrm>
+            <a:off x="1468113" y="3060968"/>
+            <a:ext cx="5947374" cy="5887900"/>
+          </a:xfrm>
+          <a:custGeom>
+            <a:avLst/>
+            <a:gdLst/>
+            <a:ahLst/>
+            <a:cxnLst/>
+            <a:rect l="l" t="t" r="r" b="b"/>
+            <a:pathLst>
+              <a:path w="5947374" h="5887900">
+                <a:moveTo>
+                  <a:pt x="0" y="0"/>
+                </a:moveTo>
+                <a:lnTo>
+                  <a:pt x="5947374" y="0"/>
+                </a:lnTo>
+                <a:lnTo>
+                  <a:pt x="5947374" y="5887900"/>
+                </a:lnTo>
+                <a:lnTo>
+                  <a:pt x="0" y="5887900"/>
+                </a:lnTo>
+                <a:lnTo>
+                  <a:pt x="0" y="0"/>
+                </a:lnTo>
+                <a:close/>
+              </a:path>
+            </a:pathLst>
+          </a:custGeom>
+          <a:blipFill>
+            <a:blip r:embed="rId2"/>
+            <a:stretch>
+              <a:fillRect/>
+            </a:stretch>
+          </a:blipFill>
+        </p:spPr>
+      </p:sp>
+      <p:sp>
+        <p:nvSpPr>
+          <p:cNvPr id="6" name="TextBox 6"/>
+          <p:cNvSpPr txBox="1"/>
+          <p:nvPr/>
+        </p:nvSpPr>
+        <p:spPr>
+          <a:xfrm>
+            <a:off x="3622883" y="1246437"/>
+            <a:ext cx="10894849" cy="1238250"/>
+          </a:xfrm>
+          <a:prstGeom prst="rect">
+            <a:avLst/>
+          </a:prstGeom>
+        </p:spPr>
+        <p:txBody>
+          <a:bodyPr lIns="0" tIns="0" rIns="0" bIns="0" rtlCol="0" anchor="t">
+            <a:spAutoFit/>
+          </a:bodyPr>
+          <a:lstStyle/>
+          <a:p>
             <a:pPr marL="0" lvl="0" indent="0" algn="ctr">
               <a:lnSpc>
-                <a:spcPts val="8543"/>
+                <a:spcPts val="8549"/>
               </a:lnSpc>
             </a:pPr>
             <a:r>
-              <a:rPr lang="en-US" sz="7494" b="1">
+              <a:rPr lang="en-US" sz="7500" b="1">
                 <a:solidFill>
                   <a:srgbClr val="005FC2"/>
                 </a:solidFill>
@@ -5312,21 +5489,21 @@
                 <a:cs typeface="Neo Tech Bold"/>
                 <a:sym typeface="Neo Tech Bold"/>
               </a:rPr>
-              <a:t>EXPECTED OUTCOMES</a:t>
-            </a:r>
-          </a:p>
-        </p:txBody>
-      </p:sp>
-      <p:sp>
-        <p:nvSpPr>
-          <p:cNvPr id="3" name="TextBox 3"/>
+              <a:t>MOTIVATION</a:t>
+            </a:r>
+          </a:p>
+        </p:txBody>
+      </p:sp>
+      <p:sp>
+        <p:nvSpPr>
+          <p:cNvPr id="7" name="TextBox 7"/>
           <p:cNvSpPr txBox="1"/>
           <p:nvPr/>
         </p:nvSpPr>
         <p:spPr>
           <a:xfrm>
-            <a:off x="7642726" y="5265039"/>
-            <a:ext cx="4230126" cy="3593196"/>
+            <a:off x="7341974" y="6578754"/>
+            <a:ext cx="8975409" cy="2468304"/>
           </a:xfrm>
           <a:prstGeom prst="rect">
             <a:avLst/>
@@ -5338,13 +5515,13 @@
           </a:bodyPr>
           <a:lstStyle/>
           <a:p>
-            <a:pPr marL="0" lvl="0" indent="0" algn="l">
+            <a:pPr marL="0" lvl="0" indent="0" algn="just">
               <a:lnSpc>
-                <a:spcPts val="3189"/>
+                <a:spcPts val="3191"/>
               </a:lnSpc>
             </a:pPr>
             <a:r>
-              <a:rPr lang="en-US" sz="2798">
+              <a:rPr lang="en-US" sz="3600" dirty="0">
                 <a:solidFill>
                   <a:srgbClr val="005FC2"/>
                 </a:solidFill>
@@ -5353,17 +5530,10 @@
                 <a:cs typeface="Koho"/>
                 <a:sym typeface="Koho"/>
               </a:rPr>
-              <a:t>Academic Outcomes</a:t>
-            </a:r>
-          </a:p>
-          <a:p>
-            <a:pPr marL="0" lvl="0" indent="0" algn="l">
-              <a:lnSpc>
-                <a:spcPts val="3189"/>
-              </a:lnSpc>
-            </a:pPr>
-            <a:r>
-              <a:rPr lang="en-US" sz="2798">
+              <a:t>Learning becomes inefficient and repetitive without data-driven insights. </a:t>
+            </a:r>
+            <a:r>
+              <a:rPr lang="en-US" sz="3600" dirty="0" err="1">
                 <a:solidFill>
                   <a:srgbClr val="005FC2"/>
                 </a:solidFill>
@@ -5372,39 +5542,10 @@
                 <a:cs typeface="Koho"/>
                 <a:sym typeface="Koho"/>
               </a:rPr>
-              <a:t>Comprehensive research report documenting methodology and findings. Performance evaluation metrics and benchmarks. Publishable project demonstrating full-stack and analytical capabilities.</a:t>
-            </a:r>
-          </a:p>
-        </p:txBody>
-      </p:sp>
-      <p:sp>
-        <p:nvSpPr>
-          <p:cNvPr id="6" name="TextBox 6"/>
-          <p:cNvSpPr txBox="1"/>
-          <p:nvPr/>
-        </p:nvSpPr>
-        <p:spPr>
-          <a:xfrm>
-            <a:off x="12229407" y="3866959"/>
-            <a:ext cx="4656668" cy="2393046"/>
-          </a:xfrm>
-          <a:prstGeom prst="rect">
-            <a:avLst/>
-          </a:prstGeom>
-        </p:spPr>
-        <p:txBody>
-          <a:bodyPr lIns="0" tIns="0" rIns="0" bIns="0" rtlCol="0" anchor="t">
-            <a:spAutoFit/>
-          </a:bodyPr>
-          <a:lstStyle/>
-          <a:p>
-            <a:pPr marL="0" lvl="0" indent="0" algn="l">
-              <a:lnSpc>
-                <a:spcPts val="3189"/>
-              </a:lnSpc>
-            </a:pPr>
-            <a:r>
-              <a:rPr lang="en-US" sz="2798">
+              <a:t>CodePulse</a:t>
+            </a:r>
+            <a:r>
+              <a:rPr lang="en-US" sz="3600" dirty="0">
                 <a:solidFill>
                   <a:srgbClr val="005FC2"/>
                 </a:solidFill>
@@ -5413,86 +5554,7 @@
                 <a:cs typeface="Koho"/>
                 <a:sym typeface="Koho"/>
               </a:rPr>
-              <a:t>Visualization Dashboard</a:t>
-            </a:r>
-          </a:p>
-          <a:p>
-            <a:pPr marL="0" lvl="0" indent="0" algn="l">
-              <a:lnSpc>
-                <a:spcPts val="3189"/>
-              </a:lnSpc>
-            </a:pPr>
-            <a:r>
-              <a:rPr lang="en-US" sz="2798">
-                <a:solidFill>
-                  <a:srgbClr val="005FC2"/>
-                </a:solidFill>
-                <a:latin typeface="Koho"/>
-                <a:ea typeface="Koho"/>
-                <a:cs typeface="Koho"/>
-                <a:sym typeface="Koho"/>
-              </a:rPr>
-              <a:t>Interactive charts and graphs for performance trends. Topic-wise progress tracking displays. User-friendly interface for data exploration.</a:t>
-            </a:r>
-          </a:p>
-        </p:txBody>
-      </p:sp>
-      <p:sp>
-        <p:nvSpPr>
-          <p:cNvPr id="7" name="TextBox 7"/>
-          <p:cNvSpPr txBox="1"/>
-          <p:nvPr/>
-        </p:nvSpPr>
-        <p:spPr>
-          <a:xfrm>
-            <a:off x="2629502" y="3866959"/>
-            <a:ext cx="4656668" cy="3593196"/>
-          </a:xfrm>
-          <a:prstGeom prst="rect">
-            <a:avLst/>
-          </a:prstGeom>
-        </p:spPr>
-        <p:txBody>
-          <a:bodyPr lIns="0" tIns="0" rIns="0" bIns="0" rtlCol="0" anchor="t">
-            <a:spAutoFit/>
-          </a:bodyPr>
-          <a:lstStyle/>
-          <a:p>
-            <a:pPr marL="0" lvl="0" indent="0" algn="l">
-              <a:lnSpc>
-                <a:spcPts val="3189"/>
-              </a:lnSpc>
-            </a:pPr>
-            <a:r>
-              <a:rPr lang="en-US" sz="2798">
-                <a:solidFill>
-                  <a:srgbClr val="005FC2"/>
-                </a:solidFill>
-                <a:latin typeface="Koho"/>
-                <a:ea typeface="Koho"/>
-                <a:cs typeface="Koho"/>
-                <a:sym typeface="Koho"/>
-              </a:rPr>
-              <a:t>Technical Outcomes</a:t>
-            </a:r>
-          </a:p>
-          <a:p>
-            <a:pPr marL="0" lvl="0" indent="0" algn="l">
-              <a:lnSpc>
-                <a:spcPts val="3189"/>
-              </a:lnSpc>
-            </a:pPr>
-            <a:r>
-              <a:rPr lang="en-US" sz="2798">
-                <a:solidFill>
-                  <a:srgbClr val="005FC2"/>
-                </a:solidFill>
-                <a:latin typeface="Koho"/>
-                <a:ea typeface="Koho"/>
-                <a:cs typeface="Koho"/>
-                <a:sym typeface="Koho"/>
-              </a:rPr>
-              <a:t>Fully functional analytics system for coding performance. Intelligent recommendation engine for personalized problem suggestions. Secure authentication and user management.</a:t>
+              <a:t> addresses this gap by introducing personalized analytics and intelligent recommendations for targeted skill improvement.</a:t>
             </a:r>
           </a:p>
         </p:txBody>
@@ -5505,17 +5567,181 @@
 </p:sld>
 </file>
 
-<file path=ppt/slides/slide18.xml><?xml version="1.0" encoding="utf-8"?>
+<file path=ppt/slides/slide5.xml><?xml version="1.0" encoding="utf-8"?>
 <p:sld xmlns:a="http://schemas.openxmlformats.org/drawingml/2006/main" xmlns:r="http://schemas.openxmlformats.org/officeDocument/2006/relationships" xmlns:p="http://schemas.openxmlformats.org/presentationml/2006/main">
   <p:cSld>
-    <p:bg>
-      <p:bgPr>
-        <a:solidFill>
-          <a:srgbClr val="005FC2"/>
-        </a:solidFill>
-        <a:effectLst/>
-      </p:bgPr>
-    </p:bg>
+    <p:spTree>
+      <p:nvGrpSpPr>
+        <p:cNvPr id="1" name=""/>
+        <p:cNvGrpSpPr/>
+        <p:nvPr/>
+      </p:nvGrpSpPr>
+      <p:grpSpPr>
+        <a:xfrm>
+          <a:off x="0" y="0"/>
+          <a:ext cx="0" cy="0"/>
+          <a:chOff x="0" y="0"/>
+          <a:chExt cx="0" cy="0"/>
+        </a:xfrm>
+      </p:grpSpPr>
+      <p:sp>
+        <p:nvSpPr>
+          <p:cNvPr id="2" name="TextBox 2"/>
+          <p:cNvSpPr txBox="1"/>
+          <p:nvPr/>
+        </p:nvSpPr>
+        <p:spPr>
+          <a:xfrm>
+            <a:off x="3696575" y="1488837"/>
+            <a:ext cx="10894849" cy="1238210"/>
+          </a:xfrm>
+          <a:prstGeom prst="rect">
+            <a:avLst/>
+          </a:prstGeom>
+        </p:spPr>
+        <p:txBody>
+          <a:bodyPr lIns="0" tIns="0" rIns="0" bIns="0" rtlCol="0" anchor="t">
+            <a:spAutoFit/>
+          </a:bodyPr>
+          <a:lstStyle/>
+          <a:p>
+            <a:pPr marL="0" lvl="0" indent="0" algn="ctr">
+              <a:lnSpc>
+                <a:spcPts val="8543"/>
+              </a:lnSpc>
+            </a:pPr>
+            <a:r>
+              <a:rPr lang="en-US" sz="7494" b="1">
+                <a:solidFill>
+                  <a:srgbClr val="005FC2"/>
+                </a:solidFill>
+                <a:latin typeface="Neo Tech Bold"/>
+                <a:ea typeface="Neo Tech Bold"/>
+                <a:cs typeface="Neo Tech Bold"/>
+                <a:sym typeface="Neo Tech Bold"/>
+              </a:rPr>
+              <a:t>PROBLEM STATEMENT</a:t>
+            </a:r>
+          </a:p>
+        </p:txBody>
+      </p:sp>
+      <p:sp>
+        <p:nvSpPr>
+          <p:cNvPr id="3" name="TextBox 3"/>
+          <p:cNvSpPr txBox="1"/>
+          <p:nvPr/>
+        </p:nvSpPr>
+        <p:spPr>
+          <a:xfrm>
+            <a:off x="3696575" y="3736036"/>
+            <a:ext cx="10648694" cy="2468304"/>
+          </a:xfrm>
+          <a:prstGeom prst="rect">
+            <a:avLst/>
+          </a:prstGeom>
+        </p:spPr>
+        <p:txBody>
+          <a:bodyPr wrap="square" lIns="0" tIns="0" rIns="0" bIns="0" rtlCol="0" anchor="t">
+            <a:spAutoFit/>
+          </a:bodyPr>
+          <a:lstStyle/>
+          <a:p>
+            <a:pPr marL="0" lvl="0" indent="0" algn="just">
+              <a:lnSpc>
+                <a:spcPts val="3189"/>
+              </a:lnSpc>
+            </a:pPr>
+            <a:r>
+              <a:rPr lang="en-US" sz="3600" dirty="0">
+                <a:solidFill>
+                  <a:srgbClr val="005FC2"/>
+                </a:solidFill>
+                <a:latin typeface="Koho"/>
+                <a:ea typeface="Koho"/>
+                <a:cs typeface="Koho"/>
+                <a:sym typeface="Koho"/>
+              </a:rPr>
+              <a:t>No centralized system exists for deep coding performance analysis. Current platforms like </a:t>
+            </a:r>
+            <a:r>
+              <a:rPr lang="en-US" sz="3600" dirty="0" err="1">
+                <a:solidFill>
+                  <a:srgbClr val="005FC2"/>
+                </a:solidFill>
+                <a:latin typeface="Koho"/>
+                <a:ea typeface="Koho"/>
+                <a:cs typeface="Koho"/>
+                <a:sym typeface="Koho"/>
+              </a:rPr>
+              <a:t>Codeforces</a:t>
+            </a:r>
+            <a:r>
+              <a:rPr lang="en-US" sz="3600" dirty="0">
+                <a:solidFill>
+                  <a:srgbClr val="005FC2"/>
+                </a:solidFill>
+                <a:latin typeface="Koho"/>
+                <a:ea typeface="Koho"/>
+                <a:cs typeface="Koho"/>
+                <a:sym typeface="Koho"/>
+              </a:rPr>
+              <a:t> only display surface-level statistics without providing meaningful insights into a programmer's actual skill development or learning gaps.</a:t>
+            </a:r>
+          </a:p>
+        </p:txBody>
+      </p:sp>
+      <p:sp>
+        <p:nvSpPr>
+          <p:cNvPr id="7" name="TextBox 7"/>
+          <p:cNvSpPr txBox="1"/>
+          <p:nvPr/>
+        </p:nvSpPr>
+        <p:spPr>
+          <a:xfrm>
+            <a:off x="3696576" y="6758740"/>
+            <a:ext cx="10648694" cy="2468304"/>
+          </a:xfrm>
+          <a:prstGeom prst="rect">
+            <a:avLst/>
+          </a:prstGeom>
+        </p:spPr>
+        <p:txBody>
+          <a:bodyPr wrap="square" lIns="0" tIns="0" rIns="0" bIns="0" rtlCol="0" anchor="t">
+            <a:spAutoFit/>
+          </a:bodyPr>
+          <a:lstStyle/>
+          <a:p>
+            <a:pPr marL="0" lvl="0" indent="0" algn="just">
+              <a:lnSpc>
+                <a:spcPts val="3189"/>
+              </a:lnSpc>
+            </a:pPr>
+            <a:r>
+              <a:rPr lang="en-US" sz="3600" dirty="0">
+                <a:solidFill>
+                  <a:srgbClr val="005FC2"/>
+                </a:solidFill>
+                <a:latin typeface="Koho"/>
+                <a:ea typeface="Koho"/>
+                <a:cs typeface="Koho"/>
+                <a:sym typeface="Koho"/>
+              </a:rPr>
+              <a:t>Missing automated weakness detection and personalized recommendations. Programmers cannot identify their weak topics or receive tailored problem suggestions. There is no correlation analysis between problem difficulty levels and individual performance trends over time.</a:t>
+            </a:r>
+          </a:p>
+        </p:txBody>
+      </p:sp>
+    </p:spTree>
+  </p:cSld>
+  <p:clrMapOvr>
+    <a:masterClrMapping/>
+  </p:clrMapOvr>
+</p:sld>
+</file>
+
+<file path=ppt/slides/slide6.xml><?xml version="1.0" encoding="utf-8"?>
+<p:sld xmlns:a="http://schemas.openxmlformats.org/drawingml/2006/main" xmlns:r="http://schemas.openxmlformats.org/officeDocument/2006/relationships" xmlns:p="http://schemas.openxmlformats.org/presentationml/2006/main">
+  <p:cSld>
     <p:spTree>
       <p:nvGrpSpPr>
         <p:cNvPr id="1" name=""/>
@@ -5538,10 +5764,10 @@
         </p:nvGrpSpPr>
         <p:grpSpPr>
           <a:xfrm>
-            <a:off x="1456048" y="3785953"/>
-            <a:ext cx="10894849" cy="4698362"/>
-            <a:chOff x="0" y="0"/>
-            <a:chExt cx="971835" cy="419100"/>
+            <a:off x="1075047" y="2735176"/>
+            <a:ext cx="15155552" cy="5125486"/>
+            <a:chOff x="0" y="-38100"/>
+            <a:chExt cx="971835" cy="457200"/>
           </a:xfrm>
         </p:grpSpPr>
         <p:sp>
@@ -5618,32 +5844,32 @@
       </p:grpSp>
       <p:sp>
         <p:nvSpPr>
-          <p:cNvPr id="8" name="TextBox 8"/>
+          <p:cNvPr id="5" name="TextBox 5"/>
           <p:cNvSpPr txBox="1"/>
           <p:nvPr/>
         </p:nvSpPr>
         <p:spPr>
           <a:xfrm>
-            <a:off x="7247116" y="5291155"/>
-            <a:ext cx="9668540" cy="2793111"/>
+            <a:off x="1456048" y="3575598"/>
+            <a:ext cx="14374669" cy="3487045"/>
           </a:xfrm>
           <a:prstGeom prst="rect">
             <a:avLst/>
           </a:prstGeom>
         </p:spPr>
         <p:txBody>
-          <a:bodyPr lIns="0" tIns="0" rIns="0" bIns="0" rtlCol="0" anchor="t">
+          <a:bodyPr wrap="square" lIns="0" tIns="0" rIns="0" bIns="0" rtlCol="0" anchor="t">
             <a:spAutoFit/>
           </a:bodyPr>
           <a:lstStyle/>
           <a:p>
-            <a:pPr marL="0" lvl="0" indent="0" algn="l">
+            <a:pPr marL="0" lvl="0" indent="0" algn="just">
               <a:lnSpc>
-                <a:spcPts val="3191"/>
+                <a:spcPts val="3005"/>
               </a:lnSpc>
             </a:pPr>
             <a:r>
-              <a:rPr lang="en-US" sz="2799">
+              <a:rPr lang="en-US" sz="4000" dirty="0" err="1">
                 <a:solidFill>
                   <a:srgbClr val="FFFFFF"/>
                 </a:solidFill>
@@ -5652,21 +5878,57 @@
                 <a:cs typeface="Koho"/>
                 <a:sym typeface="Koho"/>
               </a:rPr>
-              <a:t>CodePulse follows a 3-Tier Architecture Model for scalable and secure performance analysis. The Presentation Layer uses Next.js UI for intuitive dashboards. The Application Layer leverages Spring Boot APIs for data processing and recommendation logic. The Data Layer utilizes PostgreSQL for reliable data storage. JWT authentication ensures secure communication between all layers.</a:t>
-            </a:r>
-          </a:p>
-        </p:txBody>
-      </p:sp>
-      <p:sp>
-        <p:nvSpPr>
-          <p:cNvPr id="9" name="TextBox 9"/>
+              <a:t>CodePulse</a:t>
+            </a:r>
+            <a:r>
+              <a:rPr lang="en-US" sz="4000" dirty="0">
+                <a:solidFill>
+                  <a:srgbClr val="FFFFFF"/>
+                </a:solidFill>
+                <a:latin typeface="Koho"/>
+                <a:ea typeface="Koho"/>
+                <a:cs typeface="Koho"/>
+                <a:sym typeface="Koho"/>
+              </a:rPr>
+              <a:t> is a full-stack web application built with Next.js for the frontend and Spring Boot for the backend. The system analyzes coding performance data from platforms like </a:t>
+            </a:r>
+            <a:r>
+              <a:rPr lang="en-US" sz="4000" dirty="0" err="1">
+                <a:solidFill>
+                  <a:srgbClr val="FFFFFF"/>
+                </a:solidFill>
+                <a:latin typeface="Koho"/>
+                <a:ea typeface="Koho"/>
+                <a:cs typeface="Koho"/>
+                <a:sym typeface="Koho"/>
+              </a:rPr>
+              <a:t>Codeforces</a:t>
+            </a:r>
+            <a:r>
+              <a:rPr lang="en-US" sz="4000" dirty="0">
+                <a:solidFill>
+                  <a:srgbClr val="FFFFFF"/>
+                </a:solidFill>
+                <a:latin typeface="Koho"/>
+                <a:ea typeface="Koho"/>
+                <a:cs typeface="Koho"/>
+                <a:sym typeface="Koho"/>
+              </a:rPr>
+              <a:t>, automatically classifies problems by topic, and generates personalized insights and recommendations. Key features include interactive dashboards for visualizing progress, advanced analytics for identifying strengths and weaknesses, and secure user management. This unified approach transforms scattered statistics into actionable guidance for efficient skill development.</a:t>
+            </a:r>
+          </a:p>
+        </p:txBody>
+      </p:sp>
+      <p:sp>
+        <p:nvSpPr>
+          <p:cNvPr id="7" name="TextBox 7"/>
           <p:cNvSpPr txBox="1"/>
           <p:nvPr/>
         </p:nvSpPr>
         <p:spPr>
           <a:xfrm>
-            <a:off x="7247116" y="2699952"/>
-            <a:ext cx="8282278" cy="2314535"/>
+            <a:off x="1456048" y="843257"/>
+            <a:ext cx="10894849" cy="1238210"/>
           </a:xfrm>
           <a:prstGeom prst="rect">
             <a:avLst/>
@@ -5684,16 +5946,16 @@
               </a:lnSpc>
             </a:pPr>
             <a:r>
-              <a:rPr lang="en-US" sz="7494" b="1">
-                <a:solidFill>
-                  <a:srgbClr val="FFFFFF"/>
+              <a:rPr lang="en-US" sz="7494" b="1" dirty="0">
+                <a:solidFill>
+                  <a:srgbClr val="005FC2"/>
                 </a:solidFill>
                 <a:latin typeface="Neo Tech Bold"/>
                 <a:ea typeface="Neo Tech Bold"/>
                 <a:cs typeface="Neo Tech Bold"/>
                 <a:sym typeface="Neo Tech Bold"/>
               </a:rPr>
-              <a:t>SYSTEM ARCHITECTURE</a:t>
+              <a:t>PROPOSED SOLUTION</a:t>
             </a:r>
           </a:p>
         </p:txBody>
@@ -5706,7 +5968,7 @@
 </p:sld>
 </file>
 
-<file path=ppt/slides/slide19.xml><?xml version="1.0" encoding="utf-8"?>
+<file path=ppt/slides/slide7.xml><?xml version="1.0" encoding="utf-8"?>
 <p:sld xmlns:a="http://schemas.openxmlformats.org/drawingml/2006/main" xmlns:r="http://schemas.openxmlformats.org/officeDocument/2006/relationships" xmlns:p="http://schemas.openxmlformats.org/presentationml/2006/main">
   <p:cSld>
     <p:spTree>
@@ -5731,851 +5993,7 @@
         </p:nvSpPr>
         <p:spPr>
           <a:xfrm>
-            <a:off x="4222833" y="3714920"/>
-            <a:ext cx="9842334" cy="948978"/>
-          </a:xfrm>
-          <a:prstGeom prst="rect">
-            <a:avLst/>
-          </a:prstGeom>
-        </p:spPr>
-        <p:txBody>
-          <a:bodyPr lIns="0" tIns="0" rIns="0" bIns="0" rtlCol="0" anchor="t">
-            <a:spAutoFit/>
-          </a:bodyPr>
-          <a:lstStyle/>
-          <a:p>
-            <a:pPr marL="0" lvl="0" indent="0" algn="ctr">
-              <a:lnSpc>
-                <a:spcPts val="7365"/>
-              </a:lnSpc>
-            </a:pPr>
-            <a:r>
-              <a:rPr lang="en-US" sz="6460" b="1" dirty="0">
-                <a:solidFill>
-                  <a:srgbClr val="005FC2"/>
-                </a:solidFill>
-                <a:latin typeface="Neo Tech Bold"/>
-                <a:ea typeface="Neo Tech Bold"/>
-                <a:cs typeface="Neo Tech Bold"/>
-                <a:sym typeface="Neo Tech Bold"/>
-              </a:rPr>
-              <a:t>THANK YOU</a:t>
-            </a:r>
-          </a:p>
-        </p:txBody>
-      </p:sp>
-    </p:spTree>
-  </p:cSld>
-  <p:clrMapOvr>
-    <a:masterClrMapping/>
-  </p:clrMapOvr>
-</p:sld>
-</file>
-
-<file path=ppt/slides/slide2.xml><?xml version="1.0" encoding="utf-8"?>
-<p:sld xmlns:a="http://schemas.openxmlformats.org/drawingml/2006/main" xmlns:r="http://schemas.openxmlformats.org/officeDocument/2006/relationships" xmlns:p="http://schemas.openxmlformats.org/presentationml/2006/main">
-  <p:cSld>
-    <p:bg>
-      <p:bgPr>
-        <a:solidFill>
-          <a:srgbClr val="005FC2"/>
-        </a:solidFill>
-        <a:effectLst/>
-      </p:bgPr>
-    </p:bg>
-    <p:spTree>
-      <p:nvGrpSpPr>
-        <p:cNvPr id="1" name=""/>
-        <p:cNvGrpSpPr/>
-        <p:nvPr/>
-      </p:nvGrpSpPr>
-      <p:grpSpPr>
-        <a:xfrm>
-          <a:off x="0" y="0"/>
-          <a:ext cx="0" cy="0"/>
-          <a:chOff x="0" y="0"/>
-          <a:chExt cx="0" cy="0"/>
-        </a:xfrm>
-      </p:grpSpPr>
-      <p:sp>
-        <p:nvSpPr>
-          <p:cNvPr id="4" name="Freeform 4"/>
-          <p:cNvSpPr/>
-          <p:nvPr/>
-        </p:nvSpPr>
-        <p:spPr>
-          <a:xfrm>
-            <a:off x="3733727" y="4511990"/>
-            <a:ext cx="665955" cy="669725"/>
-          </a:xfrm>
-          <a:custGeom>
-            <a:avLst/>
-            <a:gdLst/>
-            <a:ahLst/>
-            <a:cxnLst/>
-            <a:rect l="l" t="t" r="r" b="b"/>
-            <a:pathLst>
-              <a:path w="665955" h="669725">
-                <a:moveTo>
-                  <a:pt x="0" y="0"/>
-                </a:moveTo>
-                <a:lnTo>
-                  <a:pt x="665956" y="0"/>
-                </a:lnTo>
-                <a:lnTo>
-                  <a:pt x="665956" y="669725"/>
-                </a:lnTo>
-                <a:lnTo>
-                  <a:pt x="0" y="669725"/>
-                </a:lnTo>
-                <a:lnTo>
-                  <a:pt x="0" y="0"/>
-                </a:lnTo>
-                <a:close/>
-              </a:path>
-            </a:pathLst>
-          </a:custGeom>
-          <a:blipFill>
-            <a:blip r:embed="rId2"/>
-            <a:stretch>
-              <a:fillRect/>
-            </a:stretch>
-          </a:blipFill>
-        </p:spPr>
-      </p:sp>
-      <p:sp>
-        <p:nvSpPr>
-          <p:cNvPr id="5" name="TextBox 5"/>
-          <p:cNvSpPr txBox="1"/>
-          <p:nvPr/>
-        </p:nvSpPr>
-        <p:spPr>
-          <a:xfrm>
-            <a:off x="4336389" y="1587629"/>
-            <a:ext cx="9615222" cy="1238250"/>
-          </a:xfrm>
-          <a:prstGeom prst="rect">
-            <a:avLst/>
-          </a:prstGeom>
-        </p:spPr>
-        <p:txBody>
-          <a:bodyPr lIns="0" tIns="0" rIns="0" bIns="0" rtlCol="0" anchor="t">
-            <a:spAutoFit/>
-          </a:bodyPr>
-          <a:lstStyle/>
-          <a:p>
-            <a:pPr marL="0" lvl="0" indent="0" algn="ctr">
-              <a:lnSpc>
-                <a:spcPts val="8549"/>
-              </a:lnSpc>
-            </a:pPr>
-            <a:r>
-              <a:rPr lang="en-US" sz="7500" b="1">
-                <a:solidFill>
-                  <a:srgbClr val="FFFFFF"/>
-                </a:solidFill>
-                <a:latin typeface="Neo Tech Bold"/>
-                <a:ea typeface="Neo Tech Bold"/>
-                <a:cs typeface="Neo Tech Bold"/>
-                <a:sym typeface="Neo Tech Bold"/>
-              </a:rPr>
-              <a:t>TABLE OF CONTENTS</a:t>
-            </a:r>
-          </a:p>
-        </p:txBody>
-      </p:sp>
-      <p:sp>
-        <p:nvSpPr>
-          <p:cNvPr id="6" name="TextBox 6"/>
-          <p:cNvSpPr txBox="1"/>
-          <p:nvPr/>
-        </p:nvSpPr>
-        <p:spPr>
-          <a:xfrm>
-            <a:off x="4794796" y="4315722"/>
-            <a:ext cx="10580784" cy="820738"/>
-          </a:xfrm>
-          <a:prstGeom prst="rect">
-            <a:avLst/>
-          </a:prstGeom>
-        </p:spPr>
-        <p:txBody>
-          <a:bodyPr lIns="0" tIns="0" rIns="0" bIns="0" rtlCol="0" anchor="t">
-            <a:spAutoFit/>
-          </a:bodyPr>
-          <a:lstStyle/>
-          <a:p>
-            <a:pPr marL="0" lvl="0" indent="0" algn="l">
-              <a:lnSpc>
-                <a:spcPts val="3191"/>
-              </a:lnSpc>
-            </a:pPr>
-            <a:r>
-              <a:rPr lang="en-US" sz="2799" dirty="0">
-                <a:solidFill>
-                  <a:srgbClr val="FFFFFF"/>
-                </a:solidFill>
-                <a:latin typeface="Koho"/>
-                <a:ea typeface="Koho"/>
-                <a:cs typeface="Koho"/>
-                <a:sym typeface="Koho"/>
-              </a:rPr>
-              <a:t>Introduction &amp; Motivation: Understanding the need for intelligent coding performance analysis.</a:t>
-            </a:r>
-          </a:p>
-        </p:txBody>
-      </p:sp>
-      <p:sp>
-        <p:nvSpPr>
-          <p:cNvPr id="7" name="TextBox 7"/>
-          <p:cNvSpPr txBox="1"/>
-          <p:nvPr/>
-        </p:nvSpPr>
-        <p:spPr>
-          <a:xfrm>
-            <a:off x="4813846" y="5856350"/>
-            <a:ext cx="10580784" cy="1192911"/>
-          </a:xfrm>
-          <a:prstGeom prst="rect">
-            <a:avLst/>
-          </a:prstGeom>
-        </p:spPr>
-        <p:txBody>
-          <a:bodyPr lIns="0" tIns="0" rIns="0" bIns="0" rtlCol="0" anchor="t">
-            <a:spAutoFit/>
-          </a:bodyPr>
-          <a:lstStyle/>
-          <a:p>
-            <a:pPr marL="0" lvl="0" indent="0" algn="l">
-              <a:lnSpc>
-                <a:spcPts val="3191"/>
-              </a:lnSpc>
-            </a:pPr>
-            <a:r>
-              <a:rPr lang="en-US" sz="2799">
-                <a:solidFill>
-                  <a:srgbClr val="FFFFFF"/>
-                </a:solidFill>
-                <a:latin typeface="Koho"/>
-                <a:ea typeface="Koho"/>
-                <a:cs typeface="Koho"/>
-                <a:sym typeface="Koho"/>
-              </a:rPr>
-              <a:t>Objectives &amp; Solution: Project goals, proposed CodePulse system, system modules, workflow architecture, and technology stack overview.</a:t>
-            </a:r>
-          </a:p>
-        </p:txBody>
-      </p:sp>
-      <p:sp>
-        <p:nvSpPr>
-          <p:cNvPr id="8" name="TextBox 8"/>
-          <p:cNvSpPr txBox="1"/>
-          <p:nvPr/>
-        </p:nvSpPr>
-        <p:spPr>
-          <a:xfrm>
-            <a:off x="4813846" y="7401685"/>
-            <a:ext cx="10580784" cy="1192911"/>
-          </a:xfrm>
-          <a:prstGeom prst="rect">
-            <a:avLst/>
-          </a:prstGeom>
-        </p:spPr>
-        <p:txBody>
-          <a:bodyPr lIns="0" tIns="0" rIns="0" bIns="0" rtlCol="0" anchor="t">
-            <a:spAutoFit/>
-          </a:bodyPr>
-          <a:lstStyle/>
-          <a:p>
-            <a:pPr marL="0" lvl="0" indent="0" algn="l">
-              <a:lnSpc>
-                <a:spcPts val="3191"/>
-              </a:lnSpc>
-            </a:pPr>
-            <a:r>
-              <a:rPr lang="en-US" sz="2799">
-                <a:solidFill>
-                  <a:srgbClr val="FFFFFF"/>
-                </a:solidFill>
-                <a:latin typeface="Koho"/>
-                <a:ea typeface="Koho"/>
-                <a:cs typeface="Koho"/>
-                <a:sym typeface="Koho"/>
-              </a:rPr>
-              <a:t>Implementation &amp; Outcomes: System architecture, project timeline, expected technical and academic outcomes, conclusion, and references.</a:t>
-            </a:r>
-          </a:p>
-        </p:txBody>
-      </p:sp>
-      <p:sp>
-        <p:nvSpPr>
-          <p:cNvPr id="9" name="Freeform 9"/>
-          <p:cNvSpPr/>
-          <p:nvPr/>
-        </p:nvSpPr>
-        <p:spPr>
-          <a:xfrm>
-            <a:off x="3733727" y="5943715"/>
-            <a:ext cx="665955" cy="669725"/>
-          </a:xfrm>
-          <a:custGeom>
-            <a:avLst/>
-            <a:gdLst/>
-            <a:ahLst/>
-            <a:cxnLst/>
-            <a:rect l="l" t="t" r="r" b="b"/>
-            <a:pathLst>
-              <a:path w="665955" h="669725">
-                <a:moveTo>
-                  <a:pt x="0" y="0"/>
-                </a:moveTo>
-                <a:lnTo>
-                  <a:pt x="665956" y="0"/>
-                </a:lnTo>
-                <a:lnTo>
-                  <a:pt x="665956" y="669725"/>
-                </a:lnTo>
-                <a:lnTo>
-                  <a:pt x="0" y="669725"/>
-                </a:lnTo>
-                <a:lnTo>
-                  <a:pt x="0" y="0"/>
-                </a:lnTo>
-                <a:close/>
-              </a:path>
-            </a:pathLst>
-          </a:custGeom>
-          <a:blipFill>
-            <a:blip r:embed="rId2"/>
-            <a:stretch>
-              <a:fillRect/>
-            </a:stretch>
-          </a:blipFill>
-        </p:spPr>
-      </p:sp>
-      <p:sp>
-        <p:nvSpPr>
-          <p:cNvPr id="10" name="Freeform 10"/>
-          <p:cNvSpPr/>
-          <p:nvPr/>
-        </p:nvSpPr>
-        <p:spPr>
-          <a:xfrm>
-            <a:off x="3733727" y="7373110"/>
-            <a:ext cx="665955" cy="669725"/>
-          </a:xfrm>
-          <a:custGeom>
-            <a:avLst/>
-            <a:gdLst/>
-            <a:ahLst/>
-            <a:cxnLst/>
-            <a:rect l="l" t="t" r="r" b="b"/>
-            <a:pathLst>
-              <a:path w="665955" h="669725">
-                <a:moveTo>
-                  <a:pt x="0" y="0"/>
-                </a:moveTo>
-                <a:lnTo>
-                  <a:pt x="665956" y="0"/>
-                </a:lnTo>
-                <a:lnTo>
-                  <a:pt x="665956" y="669725"/>
-                </a:lnTo>
-                <a:lnTo>
-                  <a:pt x="0" y="669725"/>
-                </a:lnTo>
-                <a:lnTo>
-                  <a:pt x="0" y="0"/>
-                </a:lnTo>
-                <a:close/>
-              </a:path>
-            </a:pathLst>
-          </a:custGeom>
-          <a:blipFill>
-            <a:blip r:embed="rId2"/>
-            <a:stretch>
-              <a:fillRect/>
-            </a:stretch>
-          </a:blipFill>
-        </p:spPr>
-      </p:sp>
-    </p:spTree>
-  </p:cSld>
-  <p:clrMapOvr>
-    <a:masterClrMapping/>
-  </p:clrMapOvr>
-</p:sld>
-</file>
-
-<file path=ppt/slides/slide3.xml><?xml version="1.0" encoding="utf-8"?>
-<p:sld xmlns:a="http://schemas.openxmlformats.org/drawingml/2006/main" xmlns:r="http://schemas.openxmlformats.org/officeDocument/2006/relationships" xmlns:p="http://schemas.openxmlformats.org/presentationml/2006/main">
-  <p:cSld>
-    <p:spTree>
-      <p:nvGrpSpPr>
-        <p:cNvPr id="1" name=""/>
-        <p:cNvGrpSpPr/>
-        <p:nvPr/>
-      </p:nvGrpSpPr>
-      <p:grpSpPr>
-        <a:xfrm>
-          <a:off x="0" y="0"/>
-          <a:ext cx="0" cy="0"/>
-          <a:chOff x="0" y="0"/>
-          <a:chExt cx="0" cy="0"/>
-        </a:xfrm>
-      </p:grpSpPr>
-      <p:sp>
-        <p:nvSpPr>
-          <p:cNvPr id="2" name="TextBox 2"/>
-          <p:cNvSpPr txBox="1"/>
-          <p:nvPr/>
-        </p:nvSpPr>
-        <p:spPr>
-          <a:xfrm>
-            <a:off x="5614835" y="2058343"/>
-            <a:ext cx="10894849" cy="1238250"/>
-          </a:xfrm>
-          <a:prstGeom prst="rect">
-            <a:avLst/>
-          </a:prstGeom>
-        </p:spPr>
-        <p:txBody>
-          <a:bodyPr lIns="0" tIns="0" rIns="0" bIns="0" rtlCol="0" anchor="t">
-            <a:spAutoFit/>
-          </a:bodyPr>
-          <a:lstStyle/>
-          <a:p>
-            <a:pPr marL="0" lvl="0" indent="0" algn="l">
-              <a:lnSpc>
-                <a:spcPts val="8549"/>
-              </a:lnSpc>
-            </a:pPr>
-            <a:r>
-              <a:rPr lang="en-US" sz="7500" b="1">
-                <a:solidFill>
-                  <a:srgbClr val="005FC2"/>
-                </a:solidFill>
-                <a:latin typeface="Neo Tech Bold"/>
-                <a:ea typeface="Neo Tech Bold"/>
-                <a:cs typeface="Neo Tech Bold"/>
-                <a:sym typeface="Neo Tech Bold"/>
-              </a:rPr>
-              <a:t>INTRODUCTION</a:t>
-            </a:r>
-          </a:p>
-        </p:txBody>
-      </p:sp>
-      <p:sp>
-        <p:nvSpPr>
-          <p:cNvPr id="3" name="TextBox 3"/>
-          <p:cNvSpPr txBox="1"/>
-          <p:nvPr/>
-        </p:nvSpPr>
-        <p:spPr>
-          <a:xfrm>
-            <a:off x="5614835" y="3898486"/>
-            <a:ext cx="10894849" cy="4793361"/>
-          </a:xfrm>
-          <a:prstGeom prst="rect">
-            <a:avLst/>
-          </a:prstGeom>
-        </p:spPr>
-        <p:txBody>
-          <a:bodyPr lIns="0" tIns="0" rIns="0" bIns="0" rtlCol="0" anchor="t">
-            <a:spAutoFit/>
-          </a:bodyPr>
-          <a:lstStyle/>
-          <a:p>
-            <a:pPr marL="0" lvl="0" indent="0" algn="l">
-              <a:lnSpc>
-                <a:spcPts val="3191"/>
-              </a:lnSpc>
-            </a:pPr>
-            <a:r>
-              <a:rPr lang="en-US" sz="2799">
-                <a:solidFill>
-                  <a:srgbClr val="005FC2"/>
-                </a:solidFill>
-                <a:latin typeface="Koho"/>
-                <a:ea typeface="Koho"/>
-                <a:cs typeface="Koho"/>
-                <a:sym typeface="Koho"/>
-              </a:rPr>
-              <a:t>CodePulse is an intelligent coding performance analyzer designed to transform how programmers improve their skills. While popular coding platforms like Codeforces and LeetCode provide practice opportunities, they lack unified performance analysis and actionable insights.</a:t>
-            </a:r>
-          </a:p>
-          <a:p>
-            <a:pPr marL="0" lvl="0" indent="0" algn="l">
-              <a:lnSpc>
-                <a:spcPts val="3191"/>
-              </a:lnSpc>
-            </a:pPr>
-            <a:r>
-              <a:rPr lang="en-US" sz="2799">
-                <a:solidFill>
-                  <a:srgbClr val="005FC2"/>
-                </a:solidFill>
-                <a:latin typeface="Koho"/>
-                <a:ea typeface="Koho"/>
-                <a:cs typeface="Koho"/>
-                <a:sym typeface="Koho"/>
-              </a:rPr>
-              <a:t>CodePulse bridges this gap by analyzing coding data from multiple platforms to identify weaknesses, track progress, and guide learning paths. Our target users include competitive programmers seeking to level up, computer science students preparing for assessments, and job candidates preparing for technical interviews.</a:t>
-            </a:r>
-          </a:p>
-          <a:p>
-            <a:pPr marL="0" lvl="0" indent="0" algn="l">
-              <a:lnSpc>
-                <a:spcPts val="3191"/>
-              </a:lnSpc>
-            </a:pPr>
-            <a:r>
-              <a:rPr lang="en-US" sz="2799">
-                <a:solidFill>
-                  <a:srgbClr val="005FC2"/>
-                </a:solidFill>
-                <a:latin typeface="Koho"/>
-                <a:ea typeface="Koho"/>
-                <a:cs typeface="Koho"/>
-                <a:sym typeface="Koho"/>
-              </a:rPr>
-              <a:t>The core purpose of CodePulse is to transform scattered statistics into intelligent, actionable insights that enable efficient and structured skill development.</a:t>
-            </a:r>
-          </a:p>
-        </p:txBody>
-      </p:sp>
-    </p:spTree>
-  </p:cSld>
-  <p:clrMapOvr>
-    <a:masterClrMapping/>
-  </p:clrMapOvr>
-</p:sld>
-</file>
-
-<file path=ppt/slides/slide4.xml><?xml version="1.0" encoding="utf-8"?>
-<p:sld xmlns:a="http://schemas.openxmlformats.org/drawingml/2006/main" xmlns:r="http://schemas.openxmlformats.org/officeDocument/2006/relationships" xmlns:p="http://schemas.openxmlformats.org/presentationml/2006/main">
-  <p:cSld>
-    <p:spTree>
-      <p:nvGrpSpPr>
-        <p:cNvPr id="1" name=""/>
-        <p:cNvGrpSpPr/>
-        <p:nvPr/>
-      </p:nvGrpSpPr>
-      <p:grpSpPr>
-        <a:xfrm>
-          <a:off x="0" y="0"/>
-          <a:ext cx="0" cy="0"/>
-          <a:chOff x="0" y="0"/>
-          <a:chExt cx="0" cy="0"/>
-        </a:xfrm>
-      </p:grpSpPr>
-      <p:sp>
-        <p:nvSpPr>
-          <p:cNvPr id="2" name="TextBox 2"/>
-          <p:cNvSpPr txBox="1"/>
-          <p:nvPr/>
-        </p:nvSpPr>
-        <p:spPr>
-          <a:xfrm>
-            <a:off x="7341974" y="4178708"/>
-            <a:ext cx="8975409" cy="1592961"/>
-          </a:xfrm>
-          <a:prstGeom prst="rect">
-            <a:avLst/>
-          </a:prstGeom>
-        </p:spPr>
-        <p:txBody>
-          <a:bodyPr lIns="0" tIns="0" rIns="0" bIns="0" rtlCol="0" anchor="t">
-            <a:spAutoFit/>
-          </a:bodyPr>
-          <a:lstStyle/>
-          <a:p>
-            <a:pPr marL="0" lvl="0" indent="0" algn="l">
-              <a:lnSpc>
-                <a:spcPts val="3191"/>
-              </a:lnSpc>
-            </a:pPr>
-            <a:r>
-              <a:rPr lang="en-US" sz="2799">
-                <a:solidFill>
-                  <a:srgbClr val="005FC2"/>
-                </a:solidFill>
-                <a:latin typeface="Koho"/>
-                <a:ea typeface="Koho"/>
-                <a:cs typeface="Koho"/>
-                <a:sym typeface="Koho"/>
-              </a:rPr>
-              <a:t>Current coding platforms like Codeforces and LeetCode lack structured feedback mechanisms. Users receive no automated weakness detection or personalized guidance to improve their skills systematically.</a:t>
-            </a:r>
-          </a:p>
-        </p:txBody>
-      </p:sp>
-      <p:sp>
-        <p:nvSpPr>
-          <p:cNvPr id="3" name="Freeform 3"/>
-          <p:cNvSpPr/>
-          <p:nvPr/>
-        </p:nvSpPr>
-        <p:spPr>
-          <a:xfrm rot="-10149532" flipH="1">
-            <a:off x="-3580585" y="4143179"/>
-            <a:ext cx="7161170" cy="10230243"/>
-          </a:xfrm>
-          <a:custGeom>
-            <a:avLst/>
-            <a:gdLst/>
-            <a:ahLst/>
-            <a:cxnLst/>
-            <a:rect l="l" t="t" r="r" b="b"/>
-            <a:pathLst>
-              <a:path w="7161170" h="10230243">
-                <a:moveTo>
-                  <a:pt x="7161170" y="0"/>
-                </a:moveTo>
-                <a:lnTo>
-                  <a:pt x="0" y="0"/>
-                </a:lnTo>
-                <a:lnTo>
-                  <a:pt x="0" y="10230242"/>
-                </a:lnTo>
-                <a:lnTo>
-                  <a:pt x="7161170" y="10230242"/>
-                </a:lnTo>
-                <a:lnTo>
-                  <a:pt x="7161170" y="0"/>
-                </a:lnTo>
-                <a:close/>
-              </a:path>
-            </a:pathLst>
-          </a:custGeom>
-          <a:blipFill>
-            <a:blip r:embed="rId2">
-              <a:extLst>
-                <a:ext uri="{96DAC541-7B7A-43D3-8B79-37D633B846F1}">
-                  <asvg:svgBlip xmlns:asvg="http://schemas.microsoft.com/office/drawing/2016/SVG/main" r:embed="rId3"/>
-                </a:ext>
-              </a:extLst>
-            </a:blip>
-            <a:stretch>
-              <a:fillRect/>
-            </a:stretch>
-          </a:blipFill>
-        </p:spPr>
-      </p:sp>
-      <p:sp>
-        <p:nvSpPr>
-          <p:cNvPr id="4" name="Freeform 4"/>
-          <p:cNvSpPr/>
-          <p:nvPr/>
-        </p:nvSpPr>
-        <p:spPr>
-          <a:xfrm rot="129211" flipH="1">
-            <a:off x="14707415" y="-4280324"/>
-            <a:ext cx="7161170" cy="10230243"/>
-          </a:xfrm>
-          <a:custGeom>
-            <a:avLst/>
-            <a:gdLst/>
-            <a:ahLst/>
-            <a:cxnLst/>
-            <a:rect l="l" t="t" r="r" b="b"/>
-            <a:pathLst>
-              <a:path w="7161170" h="10230243">
-                <a:moveTo>
-                  <a:pt x="7161170" y="0"/>
-                </a:moveTo>
-                <a:lnTo>
-                  <a:pt x="0" y="0"/>
-                </a:lnTo>
-                <a:lnTo>
-                  <a:pt x="0" y="10230242"/>
-                </a:lnTo>
-                <a:lnTo>
-                  <a:pt x="7161170" y="10230242"/>
-                </a:lnTo>
-                <a:lnTo>
-                  <a:pt x="7161170" y="0"/>
-                </a:lnTo>
-                <a:close/>
-              </a:path>
-            </a:pathLst>
-          </a:custGeom>
-          <a:blipFill>
-            <a:blip r:embed="rId2">
-              <a:extLst>
-                <a:ext uri="{96DAC541-7B7A-43D3-8B79-37D633B846F1}">
-                  <asvg:svgBlip xmlns:asvg="http://schemas.microsoft.com/office/drawing/2016/SVG/main" r:embed="rId3"/>
-                </a:ext>
-              </a:extLst>
-            </a:blip>
-            <a:stretch>
-              <a:fillRect/>
-            </a:stretch>
-          </a:blipFill>
-        </p:spPr>
-      </p:sp>
-      <p:sp>
-        <p:nvSpPr>
-          <p:cNvPr id="5" name="Freeform 5"/>
-          <p:cNvSpPr/>
-          <p:nvPr/>
-        </p:nvSpPr>
-        <p:spPr>
-          <a:xfrm>
-            <a:off x="1468113" y="3060968"/>
-            <a:ext cx="5947374" cy="5887900"/>
-          </a:xfrm>
-          <a:custGeom>
-            <a:avLst/>
-            <a:gdLst/>
-            <a:ahLst/>
-            <a:cxnLst/>
-            <a:rect l="l" t="t" r="r" b="b"/>
-            <a:pathLst>
-              <a:path w="5947374" h="5887900">
-                <a:moveTo>
-                  <a:pt x="0" y="0"/>
-                </a:moveTo>
-                <a:lnTo>
-                  <a:pt x="5947374" y="0"/>
-                </a:lnTo>
-                <a:lnTo>
-                  <a:pt x="5947374" y="5887900"/>
-                </a:lnTo>
-                <a:lnTo>
-                  <a:pt x="0" y="5887900"/>
-                </a:lnTo>
-                <a:lnTo>
-                  <a:pt x="0" y="0"/>
-                </a:lnTo>
-                <a:close/>
-              </a:path>
-            </a:pathLst>
-          </a:custGeom>
-          <a:blipFill>
-            <a:blip r:embed="rId4"/>
-            <a:stretch>
-              <a:fillRect/>
-            </a:stretch>
-          </a:blipFill>
-        </p:spPr>
-      </p:sp>
-      <p:sp>
-        <p:nvSpPr>
-          <p:cNvPr id="6" name="TextBox 6"/>
-          <p:cNvSpPr txBox="1"/>
-          <p:nvPr/>
-        </p:nvSpPr>
-        <p:spPr>
-          <a:xfrm>
-            <a:off x="3622883" y="1246437"/>
-            <a:ext cx="10894849" cy="1238250"/>
-          </a:xfrm>
-          <a:prstGeom prst="rect">
-            <a:avLst/>
-          </a:prstGeom>
-        </p:spPr>
-        <p:txBody>
-          <a:bodyPr lIns="0" tIns="0" rIns="0" bIns="0" rtlCol="0" anchor="t">
-            <a:spAutoFit/>
-          </a:bodyPr>
-          <a:lstStyle/>
-          <a:p>
-            <a:pPr marL="0" lvl="0" indent="0" algn="ctr">
-              <a:lnSpc>
-                <a:spcPts val="8549"/>
-              </a:lnSpc>
-            </a:pPr>
-            <a:r>
-              <a:rPr lang="en-US" sz="7500" b="1">
-                <a:solidFill>
-                  <a:srgbClr val="005FC2"/>
-                </a:solidFill>
-                <a:latin typeface="Neo Tech Bold"/>
-                <a:ea typeface="Neo Tech Bold"/>
-                <a:cs typeface="Neo Tech Bold"/>
-                <a:sym typeface="Neo Tech Bold"/>
-              </a:rPr>
-              <a:t>MOTIVATION</a:t>
-            </a:r>
-          </a:p>
-        </p:txBody>
-      </p:sp>
-      <p:sp>
-        <p:nvSpPr>
-          <p:cNvPr id="7" name="TextBox 7"/>
-          <p:cNvSpPr txBox="1"/>
-          <p:nvPr/>
-        </p:nvSpPr>
-        <p:spPr>
-          <a:xfrm>
-            <a:off x="7341974" y="6578754"/>
-            <a:ext cx="8975409" cy="1592961"/>
-          </a:xfrm>
-          <a:prstGeom prst="rect">
-            <a:avLst/>
-          </a:prstGeom>
-        </p:spPr>
-        <p:txBody>
-          <a:bodyPr lIns="0" tIns="0" rIns="0" bIns="0" rtlCol="0" anchor="t">
-            <a:spAutoFit/>
-          </a:bodyPr>
-          <a:lstStyle/>
-          <a:p>
-            <a:pPr marL="0" lvl="0" indent="0" algn="l">
-              <a:lnSpc>
-                <a:spcPts val="3191"/>
-              </a:lnSpc>
-            </a:pPr>
-            <a:r>
-              <a:rPr lang="en-US" sz="2799">
-                <a:solidFill>
-                  <a:srgbClr val="005FC2"/>
-                </a:solidFill>
-                <a:latin typeface="Koho"/>
-                <a:ea typeface="Koho"/>
-                <a:cs typeface="Koho"/>
-                <a:sym typeface="Koho"/>
-              </a:rPr>
-              <a:t>Learning becomes inefficient and repetitive without data-driven insights. CodePulse addresses this gap by introducing personalized analytics and intelligent recommendations for targeted skill improvement.</a:t>
-            </a:r>
-          </a:p>
-        </p:txBody>
-      </p:sp>
-    </p:spTree>
-  </p:cSld>
-  <p:clrMapOvr>
-    <a:masterClrMapping/>
-  </p:clrMapOvr>
-</p:sld>
-</file>
-
-<file path=ppt/slides/slide5.xml><?xml version="1.0" encoding="utf-8"?>
-<p:sld xmlns:a="http://schemas.openxmlformats.org/drawingml/2006/main" xmlns:r="http://schemas.openxmlformats.org/officeDocument/2006/relationships" xmlns:p="http://schemas.openxmlformats.org/presentationml/2006/main">
-  <p:cSld>
-    <p:spTree>
-      <p:nvGrpSpPr>
-        <p:cNvPr id="1" name=""/>
-        <p:cNvGrpSpPr/>
-        <p:nvPr/>
-      </p:nvGrpSpPr>
-      <p:grpSpPr>
-        <a:xfrm>
-          <a:off x="0" y="0"/>
-          <a:ext cx="0" cy="0"/>
-          <a:chOff x="0" y="0"/>
-          <a:chExt cx="0" cy="0"/>
-        </a:xfrm>
-      </p:grpSpPr>
-      <p:sp>
-        <p:nvSpPr>
-          <p:cNvPr id="2" name="TextBox 2"/>
-          <p:cNvSpPr txBox="1"/>
-          <p:nvPr/>
-        </p:nvSpPr>
-        <p:spPr>
-          <a:xfrm>
-            <a:off x="3696575" y="1488837"/>
+            <a:off x="3953809" y="1685119"/>
             <a:ext cx="10894849" cy="1238210"/>
           </a:xfrm>
           <a:prstGeom prst="rect">
@@ -6603,7 +6021,7 @@
                 <a:cs typeface="Neo Tech Bold"/>
                 <a:sym typeface="Neo Tech Bold"/>
               </a:rPr>
-              <a:t>PROBLEM STATEMENT</a:t>
+              <a:t>SYSTEM MODULES</a:t>
             </a:r>
           </a:p>
         </p:txBody>
@@ -6616,8 +6034,8 @@
         </p:nvSpPr>
         <p:spPr>
           <a:xfrm>
-            <a:off x="5403738" y="3309309"/>
-            <a:ext cx="8868773" cy="1992996"/>
+            <a:off x="7642726" y="5265039"/>
+            <a:ext cx="4230126" cy="3693319"/>
           </a:xfrm>
           <a:prstGeom prst="rect">
             <a:avLst/>
@@ -6631,11 +6049,11 @@
           <a:p>
             <a:pPr marL="0" lvl="0" indent="0" algn="just">
               <a:lnSpc>
-                <a:spcPts val="3189"/>
+                <a:spcPts val="3191"/>
               </a:lnSpc>
             </a:pPr>
             <a:r>
-              <a:rPr lang="en-US" sz="2798">
+              <a:rPr lang="en-US" sz="2799" dirty="0">
                 <a:solidFill>
                   <a:srgbClr val="005FC2"/>
                 </a:solidFill>
@@ -6644,91 +6062,17 @@
                 <a:cs typeface="Koho"/>
                 <a:sym typeface="Koho"/>
               </a:rPr>
-              <a:t>No centralized system exists for deep coding performance analysis. Current platforms like Codeforces and LeetCode only display surface-level statistics without providing meaningful insights into a programmer's actual skill development or learning gaps.</a:t>
-            </a:r>
-          </a:p>
-        </p:txBody>
-      </p:sp>
-      <p:sp>
-        <p:nvSpPr>
-          <p:cNvPr id="6" name="Freeform 6"/>
-          <p:cNvSpPr/>
-          <p:nvPr/>
-        </p:nvSpPr>
-        <p:spPr>
-          <a:xfrm>
-            <a:off x="4015489" y="4017828"/>
-            <a:ext cx="947448" cy="947448"/>
-          </a:xfrm>
-          <a:custGeom>
-            <a:avLst/>
-            <a:gdLst/>
-            <a:ahLst/>
-            <a:cxnLst/>
-            <a:rect l="l" t="t" r="r" b="b"/>
-            <a:pathLst>
-              <a:path w="947448" h="947448">
-                <a:moveTo>
-                  <a:pt x="0" y="0"/>
-                </a:moveTo>
-                <a:lnTo>
-                  <a:pt x="947448" y="0"/>
-                </a:lnTo>
-                <a:lnTo>
-                  <a:pt x="947448" y="947448"/>
-                </a:lnTo>
-                <a:lnTo>
-                  <a:pt x="0" y="947448"/>
-                </a:lnTo>
-                <a:lnTo>
-                  <a:pt x="0" y="0"/>
-                </a:lnTo>
-                <a:close/>
-              </a:path>
-            </a:pathLst>
-          </a:custGeom>
-          <a:blipFill>
-            <a:blip r:embed="rId2">
-              <a:extLst>
-                <a:ext uri="{96DAC541-7B7A-43D3-8B79-37D633B846F1}">
-                  <asvg:svgBlip xmlns:asvg="http://schemas.microsoft.com/office/drawing/2016/SVG/main" r:embed="rId3"/>
-                </a:ext>
-              </a:extLst>
-            </a:blip>
-            <a:stretch>
-              <a:fillRect/>
-            </a:stretch>
-          </a:blipFill>
-        </p:spPr>
-      </p:sp>
-      <p:sp>
-        <p:nvSpPr>
-          <p:cNvPr id="7" name="TextBox 7"/>
-          <p:cNvSpPr txBox="1"/>
-          <p:nvPr/>
-        </p:nvSpPr>
-        <p:spPr>
-          <a:xfrm>
-            <a:off x="5476496" y="6407220"/>
-            <a:ext cx="8868773" cy="1992996"/>
-          </a:xfrm>
-          <a:prstGeom prst="rect">
-            <a:avLst/>
-          </a:prstGeom>
-        </p:spPr>
-        <p:txBody>
-          <a:bodyPr lIns="0" tIns="0" rIns="0" bIns="0" rtlCol="0" anchor="t">
-            <a:spAutoFit/>
-          </a:bodyPr>
-          <a:lstStyle/>
+              <a:t>Performance Analysis :</a:t>
+            </a:r>
+          </a:p>
           <a:p>
             <a:pPr marL="0" lvl="0" indent="0" algn="just">
               <a:lnSpc>
-                <a:spcPts val="3189"/>
+                <a:spcPts val="3191"/>
               </a:lnSpc>
             </a:pPr>
             <a:r>
-              <a:rPr lang="en-US" sz="2798">
+              <a:rPr lang="en-US" sz="2799" dirty="0">
                 <a:solidFill>
                   <a:srgbClr val="005FC2"/>
                 </a:solidFill>
@@ -6737,424 +6081,21 @@
                 <a:cs typeface="Koho"/>
                 <a:sym typeface="Koho"/>
               </a:rPr>
-              <a:t>Missing automated weakness detection and personalized recommendations. Programmers cannot identify their weak topics or receive tailored problem suggestions. There is no correlation analysis between problem difficulty levels and individual performance trends over time.</a:t>
-            </a:r>
-          </a:p>
-        </p:txBody>
-      </p:sp>
-      <p:sp>
-        <p:nvSpPr>
-          <p:cNvPr id="8" name="Freeform 8"/>
-          <p:cNvSpPr/>
-          <p:nvPr/>
-        </p:nvSpPr>
-        <p:spPr>
-          <a:xfrm>
-            <a:off x="4088248" y="7115739"/>
-            <a:ext cx="947448" cy="947448"/>
-          </a:xfrm>
-          <a:custGeom>
-            <a:avLst/>
-            <a:gdLst/>
-            <a:ahLst/>
-            <a:cxnLst/>
-            <a:rect l="l" t="t" r="r" b="b"/>
-            <a:pathLst>
-              <a:path w="947448" h="947448">
-                <a:moveTo>
-                  <a:pt x="0" y="0"/>
-                </a:moveTo>
-                <a:lnTo>
-                  <a:pt x="947448" y="0"/>
-                </a:lnTo>
-                <a:lnTo>
-                  <a:pt x="947448" y="947448"/>
-                </a:lnTo>
-                <a:lnTo>
-                  <a:pt x="0" y="947448"/>
-                </a:lnTo>
-                <a:lnTo>
-                  <a:pt x="0" y="0"/>
-                </a:lnTo>
-                <a:close/>
-              </a:path>
-            </a:pathLst>
-          </a:custGeom>
-          <a:blipFill>
-            <a:blip r:embed="rId2">
-              <a:extLst>
-                <a:ext uri="{96DAC541-7B7A-43D3-8B79-37D633B846F1}">
-                  <asvg:svgBlip xmlns:asvg="http://schemas.microsoft.com/office/drawing/2016/SVG/main" r:embed="rId3"/>
-                </a:ext>
-              </a:extLst>
-            </a:blip>
-            <a:stretch>
-              <a:fillRect/>
-            </a:stretch>
-          </a:blipFill>
-        </p:spPr>
-      </p:sp>
-    </p:spTree>
-  </p:cSld>
-  <p:clrMapOvr>
-    <a:masterClrMapping/>
-  </p:clrMapOvr>
-</p:sld>
-</file>
-
-<file path=ppt/slides/slide6.xml><?xml version="1.0" encoding="utf-8"?>
-<p:sld xmlns:a="http://schemas.openxmlformats.org/drawingml/2006/main" xmlns:r="http://schemas.openxmlformats.org/officeDocument/2006/relationships" xmlns:p="http://schemas.openxmlformats.org/presentationml/2006/main">
-  <p:cSld>
-    <p:bg>
-      <p:bgPr>
-        <a:solidFill>
-          <a:srgbClr val="005FC2"/>
-        </a:solidFill>
-        <a:effectLst/>
-      </p:bgPr>
-    </p:bg>
-    <p:spTree>
-      <p:nvGrpSpPr>
-        <p:cNvPr id="1" name=""/>
-        <p:cNvGrpSpPr/>
-        <p:nvPr/>
-      </p:nvGrpSpPr>
-      <p:grpSpPr>
-        <a:xfrm>
-          <a:off x="0" y="0"/>
-          <a:ext cx="0" cy="0"/>
-          <a:chOff x="0" y="0"/>
-          <a:chExt cx="0" cy="0"/>
-        </a:xfrm>
-      </p:grpSpPr>
-      <p:grpSp>
-        <p:nvGrpSpPr>
-          <p:cNvPr id="3" name="Group 3"/>
-          <p:cNvGrpSpPr/>
-          <p:nvPr/>
-        </p:nvGrpSpPr>
-        <p:grpSpPr>
-          <a:xfrm>
-            <a:off x="13454424" y="1459858"/>
-            <a:ext cx="3804876" cy="3547520"/>
-            <a:chOff x="0" y="0"/>
-            <a:chExt cx="812800" cy="757823"/>
-          </a:xfrm>
-        </p:grpSpPr>
-        <p:sp>
-          <p:nvSpPr>
-            <p:cNvPr id="4" name="Freeform 4"/>
-            <p:cNvSpPr/>
-            <p:nvPr/>
-          </p:nvSpPr>
-          <p:spPr>
-            <a:xfrm>
-              <a:off x="0" y="0"/>
-              <a:ext cx="812800" cy="757823"/>
-            </a:xfrm>
-            <a:custGeom>
-              <a:avLst/>
-              <a:gdLst/>
-              <a:ahLst/>
-              <a:cxnLst/>
-              <a:rect l="l" t="t" r="r" b="b"/>
-              <a:pathLst>
-                <a:path w="812800" h="757823">
-                  <a:moveTo>
-                    <a:pt x="46799" y="0"/>
-                  </a:moveTo>
-                  <a:lnTo>
-                    <a:pt x="766001" y="0"/>
-                  </a:lnTo>
-                  <a:cubicBezTo>
-                    <a:pt x="791847" y="0"/>
-                    <a:pt x="812800" y="20953"/>
-                    <a:pt x="812800" y="46799"/>
-                  </a:cubicBezTo>
-                  <a:lnTo>
-                    <a:pt x="812800" y="711024"/>
-                  </a:lnTo>
-                  <a:cubicBezTo>
-                    <a:pt x="812800" y="736871"/>
-                    <a:pt x="791847" y="757823"/>
-                    <a:pt x="766001" y="757823"/>
-                  </a:cubicBezTo>
-                  <a:lnTo>
-                    <a:pt x="46799" y="757823"/>
-                  </a:lnTo>
-                  <a:cubicBezTo>
-                    <a:pt x="20953" y="757823"/>
-                    <a:pt x="0" y="736871"/>
-                    <a:pt x="0" y="711024"/>
-                  </a:cubicBezTo>
-                  <a:lnTo>
-                    <a:pt x="0" y="46799"/>
-                  </a:lnTo>
-                  <a:cubicBezTo>
-                    <a:pt x="0" y="20953"/>
-                    <a:pt x="20953" y="0"/>
-                    <a:pt x="46799" y="0"/>
-                  </a:cubicBezTo>
-                  <a:close/>
-                </a:path>
-              </a:pathLst>
-            </a:custGeom>
-            <a:blipFill>
-              <a:blip r:embed="rId2"/>
-              <a:stretch>
-                <a:fillRect t="-3627" b="-3627"/>
-              </a:stretch>
-            </a:blipFill>
-          </p:spPr>
-        </p:sp>
-      </p:grpSp>
-      <p:grpSp>
-        <p:nvGrpSpPr>
-          <p:cNvPr id="5" name="Group 5"/>
-          <p:cNvGrpSpPr/>
-          <p:nvPr/>
-        </p:nvGrpSpPr>
-        <p:grpSpPr>
-          <a:xfrm>
-            <a:off x="13454424" y="5279623"/>
-            <a:ext cx="3804876" cy="3547520"/>
-            <a:chOff x="0" y="0"/>
-            <a:chExt cx="812800" cy="757823"/>
-          </a:xfrm>
-        </p:grpSpPr>
-        <p:sp>
-          <p:nvSpPr>
-            <p:cNvPr id="6" name="Freeform 6"/>
-            <p:cNvSpPr/>
-            <p:nvPr/>
-          </p:nvSpPr>
-          <p:spPr>
-            <a:xfrm>
-              <a:off x="0" y="0"/>
-              <a:ext cx="812800" cy="757823"/>
-            </a:xfrm>
-            <a:custGeom>
-              <a:avLst/>
-              <a:gdLst/>
-              <a:ahLst/>
-              <a:cxnLst/>
-              <a:rect l="l" t="t" r="r" b="b"/>
-              <a:pathLst>
-                <a:path w="812800" h="757823">
-                  <a:moveTo>
-                    <a:pt x="46799" y="0"/>
-                  </a:moveTo>
-                  <a:lnTo>
-                    <a:pt x="766001" y="0"/>
-                  </a:lnTo>
-                  <a:cubicBezTo>
-                    <a:pt x="791847" y="0"/>
-                    <a:pt x="812800" y="20953"/>
-                    <a:pt x="812800" y="46799"/>
-                  </a:cubicBezTo>
-                  <a:lnTo>
-                    <a:pt x="812800" y="711024"/>
-                  </a:lnTo>
-                  <a:cubicBezTo>
-                    <a:pt x="812800" y="736871"/>
-                    <a:pt x="791847" y="757823"/>
-                    <a:pt x="766001" y="757823"/>
-                  </a:cubicBezTo>
-                  <a:lnTo>
-                    <a:pt x="46799" y="757823"/>
-                  </a:lnTo>
-                  <a:cubicBezTo>
-                    <a:pt x="20953" y="757823"/>
-                    <a:pt x="0" y="736871"/>
-                    <a:pt x="0" y="711024"/>
-                  </a:cubicBezTo>
-                  <a:lnTo>
-                    <a:pt x="0" y="46799"/>
-                  </a:lnTo>
-                  <a:cubicBezTo>
-                    <a:pt x="0" y="20953"/>
-                    <a:pt x="20953" y="0"/>
-                    <a:pt x="46799" y="0"/>
-                  </a:cubicBezTo>
-                  <a:close/>
-                </a:path>
-              </a:pathLst>
-            </a:custGeom>
-            <a:blipFill>
-              <a:blip r:embed="rId3"/>
-              <a:stretch>
-                <a:fillRect t="-3627" b="-3627"/>
-              </a:stretch>
-            </a:blipFill>
-          </p:spPr>
-        </p:sp>
-      </p:grpSp>
-      <p:sp>
-        <p:nvSpPr>
-          <p:cNvPr id="7" name="Freeform 7"/>
-          <p:cNvSpPr/>
-          <p:nvPr/>
-        </p:nvSpPr>
-        <p:spPr>
-          <a:xfrm>
-            <a:off x="1829272" y="3519317"/>
-            <a:ext cx="679170" cy="679170"/>
-          </a:xfrm>
-          <a:custGeom>
-            <a:avLst/>
-            <a:gdLst/>
-            <a:ahLst/>
-            <a:cxnLst/>
-            <a:rect l="l" t="t" r="r" b="b"/>
-            <a:pathLst>
-              <a:path w="679170" h="679170">
-                <a:moveTo>
-                  <a:pt x="0" y="0"/>
-                </a:moveTo>
-                <a:lnTo>
-                  <a:pt x="679170" y="0"/>
-                </a:lnTo>
-                <a:lnTo>
-                  <a:pt x="679170" y="679170"/>
-                </a:lnTo>
-                <a:lnTo>
-                  <a:pt x="0" y="679170"/>
-                </a:lnTo>
-                <a:lnTo>
-                  <a:pt x="0" y="0"/>
-                </a:lnTo>
-                <a:close/>
-              </a:path>
-            </a:pathLst>
-          </a:custGeom>
-          <a:blipFill>
-            <a:blip r:embed="rId4">
-              <a:extLst>
-                <a:ext uri="{96DAC541-7B7A-43D3-8B79-37D633B846F1}">
-                  <asvg:svgBlip xmlns:asvg="http://schemas.microsoft.com/office/drawing/2016/SVG/main" r:embed="rId5"/>
-                </a:ext>
-              </a:extLst>
-            </a:blip>
-            <a:stretch>
-              <a:fillRect/>
-            </a:stretch>
-          </a:blipFill>
-        </p:spPr>
-      </p:sp>
-      <p:sp>
-        <p:nvSpPr>
-          <p:cNvPr id="8" name="Freeform 8"/>
-          <p:cNvSpPr/>
-          <p:nvPr/>
-        </p:nvSpPr>
-        <p:spPr>
-          <a:xfrm>
-            <a:off x="1829272" y="5478561"/>
-            <a:ext cx="679170" cy="679170"/>
-          </a:xfrm>
-          <a:custGeom>
-            <a:avLst/>
-            <a:gdLst/>
-            <a:ahLst/>
-            <a:cxnLst/>
-            <a:rect l="l" t="t" r="r" b="b"/>
-            <a:pathLst>
-              <a:path w="679170" h="679170">
-                <a:moveTo>
-                  <a:pt x="0" y="0"/>
-                </a:moveTo>
-                <a:lnTo>
-                  <a:pt x="679170" y="0"/>
-                </a:lnTo>
-                <a:lnTo>
-                  <a:pt x="679170" y="679169"/>
-                </a:lnTo>
-                <a:lnTo>
-                  <a:pt x="0" y="679169"/>
-                </a:lnTo>
-                <a:lnTo>
-                  <a:pt x="0" y="0"/>
-                </a:lnTo>
-                <a:close/>
-              </a:path>
-            </a:pathLst>
-          </a:custGeom>
-          <a:blipFill>
-            <a:blip r:embed="rId4">
-              <a:extLst>
-                <a:ext uri="{96DAC541-7B7A-43D3-8B79-37D633B846F1}">
-                  <asvg:svgBlip xmlns:asvg="http://schemas.microsoft.com/office/drawing/2016/SVG/main" r:embed="rId5"/>
-                </a:ext>
-              </a:extLst>
-            </a:blip>
-            <a:stretch>
-              <a:fillRect/>
-            </a:stretch>
-          </a:blipFill>
-        </p:spPr>
-      </p:sp>
-      <p:sp>
-        <p:nvSpPr>
-          <p:cNvPr id="9" name="Freeform 9"/>
-          <p:cNvSpPr/>
-          <p:nvPr/>
-        </p:nvSpPr>
-        <p:spPr>
-          <a:xfrm>
-            <a:off x="1829272" y="7433472"/>
-            <a:ext cx="679170" cy="679170"/>
-          </a:xfrm>
-          <a:custGeom>
-            <a:avLst/>
-            <a:gdLst/>
-            <a:ahLst/>
-            <a:cxnLst/>
-            <a:rect l="l" t="t" r="r" b="b"/>
-            <a:pathLst>
-              <a:path w="679170" h="679170">
-                <a:moveTo>
-                  <a:pt x="0" y="0"/>
-                </a:moveTo>
-                <a:lnTo>
-                  <a:pt x="679170" y="0"/>
-                </a:lnTo>
-                <a:lnTo>
-                  <a:pt x="679170" y="679169"/>
-                </a:lnTo>
-                <a:lnTo>
-                  <a:pt x="0" y="679169"/>
-                </a:lnTo>
-                <a:lnTo>
-                  <a:pt x="0" y="0"/>
-                </a:lnTo>
-                <a:close/>
-              </a:path>
-            </a:pathLst>
-          </a:custGeom>
-          <a:blipFill>
-            <a:blip r:embed="rId4">
-              <a:extLst>
-                <a:ext uri="{96DAC541-7B7A-43D3-8B79-37D633B846F1}">
-                  <asvg:svgBlip xmlns:asvg="http://schemas.microsoft.com/office/drawing/2016/SVG/main" r:embed="rId5"/>
-                </a:ext>
-              </a:extLst>
-            </a:blip>
-            <a:stretch>
-              <a:fillRect/>
-            </a:stretch>
-          </a:blipFill>
-        </p:spPr>
-      </p:sp>
-      <p:sp>
-        <p:nvSpPr>
-          <p:cNvPr id="10" name="TextBox 10"/>
+              <a:t>Analyzes coding submissions to calculate success rates, time complexity patterns, and difficulty-based metrics. Generates actionable insights from raw performance data.</a:t>
+            </a:r>
+          </a:p>
+        </p:txBody>
+      </p:sp>
+      <p:sp>
+        <p:nvSpPr>
+          <p:cNvPr id="6" name="TextBox 6"/>
           <p:cNvSpPr txBox="1"/>
           <p:nvPr/>
         </p:nvSpPr>
         <p:spPr>
           <a:xfrm>
-            <a:off x="1829272" y="1383658"/>
-            <a:ext cx="10894849" cy="928875"/>
+            <a:off x="12229407" y="3866959"/>
+            <a:ext cx="4656668" cy="2872581"/>
           </a:xfrm>
           <a:prstGeom prst="rect">
             <a:avLst/>
@@ -7166,118 +6107,55 @@
           </a:bodyPr>
           <a:lstStyle/>
           <a:p>
-            <a:pPr marL="0" lvl="0" indent="0" algn="l">
+            <a:pPr marL="0" lvl="0" indent="0" algn="just">
               <a:lnSpc>
-                <a:spcPts val="6440"/>
+                <a:spcPts val="3191"/>
               </a:lnSpc>
             </a:pPr>
             <a:r>
-              <a:rPr lang="en-US" sz="5649" b="1">
-                <a:solidFill>
-                  <a:srgbClr val="FFFFFF"/>
-                </a:solidFill>
-                <a:latin typeface="Neo Tech Bold"/>
-                <a:ea typeface="Neo Tech Bold"/>
-                <a:cs typeface="Neo Tech Bold"/>
-                <a:sym typeface="Neo Tech Bold"/>
-              </a:rPr>
-              <a:t>RESEARCH GAP &amp; COMPARISON</a:t>
-            </a:r>
-          </a:p>
-        </p:txBody>
-      </p:sp>
-      <p:sp>
-        <p:nvSpPr>
-          <p:cNvPr id="11" name="TextBox 11"/>
-          <p:cNvSpPr txBox="1"/>
-          <p:nvPr/>
-        </p:nvSpPr>
-        <p:spPr>
-          <a:xfrm>
-            <a:off x="2895628" y="3076709"/>
-            <a:ext cx="10148400" cy="1592946"/>
-          </a:xfrm>
-          <a:prstGeom prst="rect">
-            <a:avLst/>
-          </a:prstGeom>
-        </p:spPr>
-        <p:txBody>
-          <a:bodyPr lIns="0" tIns="0" rIns="0" bIns="0" rtlCol="0" anchor="t">
-            <a:spAutoFit/>
-          </a:bodyPr>
-          <a:lstStyle/>
-          <a:p>
-            <a:pPr marL="0" lvl="0" indent="0" algn="l">
-              <a:lnSpc>
-                <a:spcPts val="3189"/>
-              </a:lnSpc>
-            </a:pPr>
-            <a:r>
-              <a:rPr lang="en-US" sz="2798">
-                <a:solidFill>
-                  <a:srgbClr val="FFFFFF"/>
+              <a:rPr lang="en-US" sz="2799" dirty="0">
+                <a:solidFill>
+                  <a:srgbClr val="005FC2"/>
                 </a:solidFill>
                 <a:latin typeface="Koho"/>
                 <a:ea typeface="Koho"/>
                 <a:cs typeface="Koho"/>
                 <a:sym typeface="Koho"/>
               </a:rPr>
-              <a:t>Existing platforms like Codeforces and LeetCode only display surface-level statistics such as problems solved and ratings, without providing deeper insights into coding performance or learning patterns.</a:t>
-            </a:r>
-          </a:p>
-        </p:txBody>
-      </p:sp>
-      <p:sp>
-        <p:nvSpPr>
-          <p:cNvPr id="12" name="TextBox 12"/>
-          <p:cNvSpPr txBox="1"/>
-          <p:nvPr/>
-        </p:nvSpPr>
-        <p:spPr>
-          <a:xfrm>
-            <a:off x="2895628" y="5035952"/>
-            <a:ext cx="10148400" cy="1192896"/>
-          </a:xfrm>
-          <a:prstGeom prst="rect">
-            <a:avLst/>
-          </a:prstGeom>
-        </p:spPr>
-        <p:txBody>
-          <a:bodyPr lIns="0" tIns="0" rIns="0" bIns="0" rtlCol="0" anchor="t">
-            <a:spAutoFit/>
-          </a:bodyPr>
-          <a:lstStyle/>
-          <a:p>
-            <a:pPr marL="0" lvl="0" indent="0" algn="l">
+              <a:t>Topic Classification : </a:t>
+            </a:r>
+          </a:p>
+          <a:p>
+            <a:pPr marL="0" lvl="0" indent="0" algn="just">
               <a:lnSpc>
-                <a:spcPts val="3189"/>
+                <a:spcPts val="3191"/>
               </a:lnSpc>
             </a:pPr>
             <a:r>
-              <a:rPr lang="en-US" sz="2798">
-                <a:solidFill>
-                  <a:srgbClr val="FFFFFF"/>
+              <a:rPr lang="en-US" sz="2799" dirty="0">
+                <a:solidFill>
+                  <a:srgbClr val="005FC2"/>
                 </a:solidFill>
                 <a:latin typeface="Koho"/>
                 <a:ea typeface="Koho"/>
                 <a:cs typeface="Koho"/>
                 <a:sym typeface="Koho"/>
               </a:rPr>
-              <a:t>CodePulse fills this critical gap by offering advanced analytics, intelligent topic modeling, and personalized recommendations that transform raw data into actionable improvement strategies.</a:t>
-            </a:r>
-          </a:p>
-        </p:txBody>
-      </p:sp>
-      <p:sp>
-        <p:nvSpPr>
-          <p:cNvPr id="13" name="TextBox 13"/>
+              <a:t>Automatically categorizes problems by topic areas (arrays, graphs, DP, etc.). Maps user performance to specific skill domains for targeted improvement.</a:t>
+            </a:r>
+          </a:p>
+        </p:txBody>
+      </p:sp>
+      <p:sp>
+        <p:nvSpPr>
+          <p:cNvPr id="7" name="TextBox 7"/>
           <p:cNvSpPr txBox="1"/>
           <p:nvPr/>
         </p:nvSpPr>
         <p:spPr>
           <a:xfrm>
-            <a:off x="2895628" y="6990863"/>
-            <a:ext cx="10148400" cy="1592946"/>
+            <a:off x="2629502" y="3866959"/>
+            <a:ext cx="4656668" cy="2872581"/>
           </a:xfrm>
           <a:prstGeom prst="rect">
             <a:avLst/>
@@ -7289,360 +6167,68 @@
           </a:bodyPr>
           <a:lstStyle/>
           <a:p>
-            <a:pPr marL="0" lvl="0" indent="0" algn="l">
+            <a:pPr marL="0" lvl="0" indent="0" algn="just">
               <a:lnSpc>
-                <a:spcPts val="3189"/>
+                <a:spcPts val="3191"/>
               </a:lnSpc>
             </a:pPr>
             <a:r>
-              <a:rPr lang="en-US" sz="2798">
-                <a:solidFill>
-                  <a:srgbClr val="FFFFFF"/>
+              <a:rPr lang="en-US" sz="2799" dirty="0">
+                <a:solidFill>
+                  <a:srgbClr val="005FC2"/>
                 </a:solidFill>
                 <a:latin typeface="Koho"/>
                 <a:ea typeface="Koho"/>
                 <a:cs typeface="Koho"/>
                 <a:sym typeface="Koho"/>
               </a:rPr>
-              <a:t>Unlike competitors, CodePulse uniquely provides Deep Analysis, Multi-Platform Support, Smart Recommendations, and Skill Modeling — features absent in Codeforces, LeetCode, and manual tracking methods.</a:t>
-            </a:r>
-          </a:p>
-        </p:txBody>
-      </p:sp>
-    </p:spTree>
-  </p:cSld>
-  <p:clrMapOvr>
-    <a:masterClrMapping/>
-  </p:clrMapOvr>
-</p:sld>
-</file>
-
-<file path=ppt/slides/slide7.xml><?xml version="1.0" encoding="utf-8"?>
-<p:sld xmlns:a="http://schemas.openxmlformats.org/drawingml/2006/main" xmlns:r="http://schemas.openxmlformats.org/officeDocument/2006/relationships" xmlns:p="http://schemas.openxmlformats.org/presentationml/2006/main">
-  <p:cSld>
-    <p:bg>
-      <p:bgPr>
-        <a:solidFill>
-          <a:srgbClr val="005FC2"/>
-        </a:solidFill>
-        <a:effectLst/>
-      </p:bgPr>
-    </p:bg>
-    <p:spTree>
-      <p:nvGrpSpPr>
-        <p:cNvPr id="1" name=""/>
-        <p:cNvGrpSpPr/>
-        <p:nvPr/>
-      </p:nvGrpSpPr>
-      <p:grpSpPr>
-        <a:xfrm>
-          <a:off x="0" y="0"/>
-          <a:ext cx="0" cy="0"/>
-          <a:chOff x="0" y="0"/>
-          <a:chExt cx="0" cy="0"/>
-        </a:xfrm>
-      </p:grpSpPr>
-      <p:sp>
-        <p:nvSpPr>
-          <p:cNvPr id="4" name="Freeform 4"/>
-          <p:cNvSpPr/>
-          <p:nvPr/>
-        </p:nvSpPr>
-        <p:spPr>
-          <a:xfrm>
-            <a:off x="3534032" y="4420210"/>
-            <a:ext cx="845428" cy="835917"/>
-          </a:xfrm>
-          <a:custGeom>
-            <a:avLst/>
-            <a:gdLst/>
-            <a:ahLst/>
-            <a:cxnLst/>
-            <a:rect l="l" t="t" r="r" b="b"/>
-            <a:pathLst>
-              <a:path w="845428" h="835917">
-                <a:moveTo>
-                  <a:pt x="0" y="0"/>
-                </a:moveTo>
-                <a:lnTo>
-                  <a:pt x="845428" y="0"/>
-                </a:lnTo>
-                <a:lnTo>
-                  <a:pt x="845428" y="835917"/>
-                </a:lnTo>
-                <a:lnTo>
-                  <a:pt x="0" y="835917"/>
-                </a:lnTo>
-                <a:lnTo>
-                  <a:pt x="0" y="0"/>
-                </a:lnTo>
-                <a:close/>
-              </a:path>
-            </a:pathLst>
-          </a:custGeom>
-          <a:blipFill>
-            <a:blip r:embed="rId2"/>
-            <a:stretch>
-              <a:fillRect/>
-            </a:stretch>
-          </a:blipFill>
-        </p:spPr>
-      </p:sp>
-      <p:sp>
-        <p:nvSpPr>
-          <p:cNvPr id="5" name="TextBox 5"/>
-          <p:cNvSpPr txBox="1"/>
-          <p:nvPr/>
-        </p:nvSpPr>
-        <p:spPr>
-          <a:xfrm>
-            <a:off x="4336389" y="1587629"/>
-            <a:ext cx="9615222" cy="1238250"/>
-          </a:xfrm>
-          <a:prstGeom prst="rect">
-            <a:avLst/>
-          </a:prstGeom>
-        </p:spPr>
-        <p:txBody>
-          <a:bodyPr lIns="0" tIns="0" rIns="0" bIns="0" rtlCol="0" anchor="t">
-            <a:spAutoFit/>
-          </a:bodyPr>
-          <a:lstStyle/>
-          <a:p>
-            <a:pPr marL="0" lvl="0" indent="0" algn="ctr">
-              <a:lnSpc>
-                <a:spcPts val="8549"/>
-              </a:lnSpc>
-            </a:pPr>
-            <a:r>
-              <a:rPr lang="en-US" sz="7500" b="1">
-                <a:solidFill>
-                  <a:srgbClr val="FFFFFF"/>
-                </a:solidFill>
-                <a:latin typeface="Neo Tech Bold"/>
-                <a:ea typeface="Neo Tech Bold"/>
-                <a:cs typeface="Neo Tech Bold"/>
-                <a:sym typeface="Neo Tech Bold"/>
-              </a:rPr>
-              <a:t>OBJECTIVES</a:t>
-            </a:r>
-          </a:p>
-        </p:txBody>
-      </p:sp>
-      <p:sp>
-        <p:nvSpPr>
-          <p:cNvPr id="6" name="TextBox 6"/>
-          <p:cNvSpPr txBox="1"/>
-          <p:nvPr/>
-        </p:nvSpPr>
-        <p:spPr>
-          <a:xfrm>
-            <a:off x="4813846" y="4315722"/>
-            <a:ext cx="10580784" cy="1192911"/>
-          </a:xfrm>
-          <a:prstGeom prst="rect">
-            <a:avLst/>
-          </a:prstGeom>
-        </p:spPr>
-        <p:txBody>
-          <a:bodyPr lIns="0" tIns="0" rIns="0" bIns="0" rtlCol="0" anchor="t">
-            <a:spAutoFit/>
-          </a:bodyPr>
-          <a:lstStyle/>
-          <a:p>
-            <a:pPr marL="0" lvl="0" indent="0" algn="l">
+              <a:t>Authentication &amp; Data Collection :</a:t>
+            </a:r>
+          </a:p>
+          <a:p>
+            <a:pPr marL="0" lvl="0" indent="0" algn="just">
               <a:lnSpc>
                 <a:spcPts val="3191"/>
               </a:lnSpc>
             </a:pPr>
             <a:r>
-              <a:rPr lang="en-US" sz="2799">
-                <a:solidFill>
-                  <a:srgbClr val="FFFFFF"/>
+              <a:rPr lang="en-US" sz="2799" dirty="0">
+                <a:solidFill>
+                  <a:srgbClr val="005FC2"/>
                 </a:solidFill>
                 <a:latin typeface="Koho"/>
                 <a:ea typeface="Koho"/>
                 <a:cs typeface="Koho"/>
                 <a:sym typeface="Koho"/>
               </a:rPr>
-              <a:t>Build a full-stack coding performance analyzer application. Collect and process coding data from multiple platforms through API integration.</a:t>
-            </a:r>
-          </a:p>
-        </p:txBody>
-      </p:sp>
-      <p:sp>
-        <p:nvSpPr>
-          <p:cNvPr id="7" name="TextBox 7"/>
-          <p:cNvSpPr txBox="1"/>
-          <p:nvPr/>
-        </p:nvSpPr>
-        <p:spPr>
-          <a:xfrm>
-            <a:off x="4813846" y="5856350"/>
-            <a:ext cx="10580784" cy="1192911"/>
-          </a:xfrm>
-          <a:prstGeom prst="rect">
-            <a:avLst/>
-          </a:prstGeom>
-        </p:spPr>
-        <p:txBody>
-          <a:bodyPr lIns="0" tIns="0" rIns="0" bIns="0" rtlCol="0" anchor="t">
-            <a:spAutoFit/>
-          </a:bodyPr>
-          <a:lstStyle/>
-          <a:p>
-            <a:pPr marL="0" lvl="0" indent="0" algn="l">
-              <a:lnSpc>
-                <a:spcPts val="3191"/>
-              </a:lnSpc>
-            </a:pPr>
-            <a:r>
-              <a:rPr lang="en-US" sz="2799">
-                <a:solidFill>
-                  <a:srgbClr val="FFFFFF"/>
+              <a:t>Secure JWT-based user authentication and profile management. API integration with </a:t>
+            </a:r>
+            <a:r>
+              <a:rPr lang="en-US" sz="2799" dirty="0" err="1">
+                <a:solidFill>
+                  <a:srgbClr val="005FC2"/>
                 </a:solidFill>
                 <a:latin typeface="Koho"/>
                 <a:ea typeface="Koho"/>
                 <a:cs typeface="Koho"/>
                 <a:sym typeface="Koho"/>
               </a:rPr>
-              <a:t>Detect weaknesses and strengths through advanced topic classification. Develop an intelligent recommendation engine for personalized problem suggestions.</a:t>
-            </a:r>
-          </a:p>
-        </p:txBody>
-      </p:sp>
-      <p:sp>
-        <p:nvSpPr>
-          <p:cNvPr id="8" name="TextBox 8"/>
-          <p:cNvSpPr txBox="1"/>
-          <p:nvPr/>
-        </p:nvSpPr>
-        <p:spPr>
-          <a:xfrm>
-            <a:off x="4813846" y="7401685"/>
-            <a:ext cx="10580784" cy="1192911"/>
-          </a:xfrm>
-          <a:prstGeom prst="rect">
-            <a:avLst/>
-          </a:prstGeom>
-        </p:spPr>
-        <p:txBody>
-          <a:bodyPr lIns="0" tIns="0" rIns="0" bIns="0" rtlCol="0" anchor="t">
-            <a:spAutoFit/>
-          </a:bodyPr>
-          <a:lstStyle/>
-          <a:p>
-            <a:pPr marL="0" lvl="0" indent="0" algn="l">
-              <a:lnSpc>
-                <a:spcPts val="3191"/>
-              </a:lnSpc>
-            </a:pPr>
-            <a:r>
-              <a:rPr lang="en-US" sz="2799">
-                <a:solidFill>
-                  <a:srgbClr val="FFFFFF"/>
+              <a:t>Codeforces</a:t>
+            </a:r>
+            <a:r>
+              <a:rPr lang="en-US" sz="2799" dirty="0">
+                <a:solidFill>
+                  <a:srgbClr val="005FC2"/>
                 </a:solidFill>
                 <a:latin typeface="Koho"/>
                 <a:ea typeface="Koho"/>
                 <a:cs typeface="Koho"/>
                 <a:sym typeface="Koho"/>
               </a:rPr>
-              <a:t>Visualize performance trends with interactive dashboards and charts. Implement secure JWT-based authentication and user management system.</a:t>
-            </a:r>
-          </a:p>
-        </p:txBody>
-      </p:sp>
-      <p:sp>
-        <p:nvSpPr>
-          <p:cNvPr id="9" name="Freeform 9"/>
-          <p:cNvSpPr/>
-          <p:nvPr/>
-        </p:nvSpPr>
-        <p:spPr>
-          <a:xfrm>
-            <a:off x="3427610" y="5849114"/>
-            <a:ext cx="912392" cy="834327"/>
-          </a:xfrm>
-          <a:custGeom>
-            <a:avLst/>
-            <a:gdLst/>
-            <a:ahLst/>
-            <a:cxnLst/>
-            <a:rect l="l" t="t" r="r" b="b"/>
-            <a:pathLst>
-              <a:path w="912392" h="834327">
-                <a:moveTo>
-                  <a:pt x="0" y="0"/>
-                </a:moveTo>
-                <a:lnTo>
-                  <a:pt x="912392" y="0"/>
-                </a:lnTo>
-                <a:lnTo>
-                  <a:pt x="912392" y="834326"/>
-                </a:lnTo>
-                <a:lnTo>
-                  <a:pt x="0" y="834326"/>
-                </a:lnTo>
-                <a:lnTo>
-                  <a:pt x="0" y="0"/>
-                </a:lnTo>
-                <a:close/>
-              </a:path>
-            </a:pathLst>
-          </a:custGeom>
-          <a:blipFill>
-            <a:blip r:embed="rId3"/>
-            <a:stretch>
-              <a:fillRect/>
-            </a:stretch>
-          </a:blipFill>
-        </p:spPr>
-      </p:sp>
-      <p:sp>
-        <p:nvSpPr>
-          <p:cNvPr id="10" name="Freeform 10"/>
-          <p:cNvSpPr/>
-          <p:nvPr/>
-        </p:nvSpPr>
-        <p:spPr>
-          <a:xfrm>
-            <a:off x="3763955" y="7640507"/>
-            <a:ext cx="593529" cy="781389"/>
-          </a:xfrm>
-          <a:custGeom>
-            <a:avLst/>
-            <a:gdLst/>
-            <a:ahLst/>
-            <a:cxnLst/>
-            <a:rect l="l" t="t" r="r" b="b"/>
-            <a:pathLst>
-              <a:path w="593529" h="781389">
-                <a:moveTo>
-                  <a:pt x="0" y="0"/>
-                </a:moveTo>
-                <a:lnTo>
-                  <a:pt x="593529" y="0"/>
-                </a:lnTo>
-                <a:lnTo>
-                  <a:pt x="593529" y="781390"/>
-                </a:lnTo>
-                <a:lnTo>
-                  <a:pt x="0" y="781390"/>
-                </a:lnTo>
-                <a:lnTo>
-                  <a:pt x="0" y="0"/>
-                </a:lnTo>
-                <a:close/>
-              </a:path>
-            </a:pathLst>
-          </a:custGeom>
-          <a:blipFill>
-            <a:blip r:embed="rId4"/>
-            <a:stretch>
-              <a:fillRect/>
-            </a:stretch>
-          </a:blipFill>
-        </p:spPr>
+              <a:t> to fetch and store coding submissions.</a:t>
+            </a:r>
+          </a:p>
+        </p:txBody>
       </p:sp>
     </p:spTree>
   </p:cSld>
@@ -7669,102 +6255,16 @@
           <a:chExt cx="0" cy="0"/>
         </a:xfrm>
       </p:grpSpPr>
-      <p:grpSp>
-        <p:nvGrpSpPr>
-          <p:cNvPr id="2" name="Group 2"/>
-          <p:cNvGrpSpPr/>
-          <p:nvPr/>
-        </p:nvGrpSpPr>
-        <p:grpSpPr>
-          <a:xfrm>
-            <a:off x="1456048" y="3785953"/>
-            <a:ext cx="10894849" cy="4698362"/>
-            <a:chOff x="0" y="0"/>
-            <a:chExt cx="971835" cy="419100"/>
-          </a:xfrm>
-        </p:grpSpPr>
-        <p:sp>
-          <p:nvSpPr>
-            <p:cNvPr id="3" name="Freeform 3"/>
-            <p:cNvSpPr/>
-            <p:nvPr/>
-          </p:nvSpPr>
-          <p:spPr>
-            <a:xfrm>
-              <a:off x="0" y="0"/>
-              <a:ext cx="971835" cy="419100"/>
-            </a:xfrm>
-            <a:custGeom>
-              <a:avLst/>
-              <a:gdLst/>
-              <a:ahLst/>
-              <a:cxnLst/>
-              <a:rect l="l" t="t" r="r" b="b"/>
-              <a:pathLst>
-                <a:path w="971835" h="419100">
-                  <a:moveTo>
-                    <a:pt x="0" y="0"/>
-                  </a:moveTo>
-                  <a:lnTo>
-                    <a:pt x="971835" y="0"/>
-                  </a:lnTo>
-                  <a:lnTo>
-                    <a:pt x="971835" y="419100"/>
-                  </a:lnTo>
-                  <a:lnTo>
-                    <a:pt x="0" y="419100"/>
-                  </a:lnTo>
-                  <a:close/>
-                </a:path>
-              </a:pathLst>
-            </a:custGeom>
-            <a:solidFill>
-              <a:srgbClr val="005FC2"/>
-            </a:solidFill>
-          </p:spPr>
-        </p:sp>
-        <p:sp>
-          <p:nvSpPr>
-            <p:cNvPr id="4" name="TextBox 4"/>
-            <p:cNvSpPr txBox="1"/>
-            <p:nvPr/>
-          </p:nvSpPr>
-          <p:spPr>
-            <a:xfrm>
-              <a:off x="0" y="-38100"/>
-              <a:ext cx="971835" cy="457200"/>
-            </a:xfrm>
-            <a:prstGeom prst="rect">
-              <a:avLst/>
-            </a:prstGeom>
-          </p:spPr>
-          <p:txBody>
-            <a:bodyPr lIns="50800" tIns="50800" rIns="50800" bIns="50800" rtlCol="0" anchor="ctr"/>
-            <a:lstStyle/>
-            <a:p>
-              <a:pPr marL="0" lvl="0" indent="0" algn="ctr">
-                <a:lnSpc>
-                  <a:spcPts val="2659"/>
-                </a:lnSpc>
-                <a:spcBef>
-                  <a:spcPct val="0"/>
-                </a:spcBef>
-              </a:pPr>
-              <a:endParaRPr/>
-            </a:p>
-          </p:txBody>
-        </p:sp>
-      </p:grpSp>
-      <p:sp>
-        <p:nvSpPr>
-          <p:cNvPr id="5" name="TextBox 5"/>
+      <p:sp>
+        <p:nvSpPr>
+          <p:cNvPr id="2" name="TextBox 2"/>
           <p:cNvSpPr txBox="1"/>
           <p:nvPr/>
         </p:nvSpPr>
         <p:spPr>
           <a:xfrm>
-            <a:off x="1855931" y="4333767"/>
-            <a:ext cx="10095082" cy="3439568"/>
+            <a:off x="3953809" y="1704169"/>
+            <a:ext cx="10894849" cy="1058384"/>
           </a:xfrm>
           <a:prstGeom prst="rect">
             <a:avLst/>
@@ -7776,22 +6276,82 @@
           </a:bodyPr>
           <a:lstStyle/>
           <a:p>
-            <a:pPr marL="0" lvl="0" indent="0" algn="l">
+            <a:pPr marL="0" lvl="0" indent="0" algn="ctr">
               <a:lnSpc>
-                <a:spcPts val="3005"/>
+                <a:spcPts val="7290"/>
               </a:lnSpc>
             </a:pPr>
             <a:r>
-              <a:rPr lang="en-US" sz="2636">
-                <a:solidFill>
-                  <a:srgbClr val="FFFFFF"/>
+              <a:rPr lang="en-US" sz="6395" b="1">
+                <a:solidFill>
+                  <a:srgbClr val="005FC2"/>
+                </a:solidFill>
+                <a:latin typeface="Neo Tech Bold"/>
+                <a:ea typeface="Neo Tech Bold"/>
+                <a:cs typeface="Neo Tech Bold"/>
+                <a:sym typeface="Neo Tech Bold"/>
+              </a:rPr>
+              <a:t>SYSTEM MODULES (PART 2)</a:t>
+            </a:r>
+          </a:p>
+        </p:txBody>
+      </p:sp>
+      <p:sp>
+        <p:nvSpPr>
+          <p:cNvPr id="3" name="TextBox 3"/>
+          <p:cNvSpPr txBox="1"/>
+          <p:nvPr/>
+        </p:nvSpPr>
+        <p:spPr>
+          <a:xfrm>
+            <a:off x="11658600" y="3821771"/>
+            <a:ext cx="4230126" cy="3282950"/>
+          </a:xfrm>
+          <a:prstGeom prst="rect">
+            <a:avLst/>
+          </a:prstGeom>
+        </p:spPr>
+        <p:txBody>
+          <a:bodyPr lIns="0" tIns="0" rIns="0" bIns="0" rtlCol="0" anchor="t">
+            <a:spAutoFit/>
+          </a:bodyPr>
+          <a:lstStyle/>
+          <a:p>
+            <a:pPr marL="0" lvl="0" indent="0" algn="just">
+              <a:lnSpc>
+                <a:spcPts val="3191"/>
+              </a:lnSpc>
+            </a:pPr>
+            <a:r>
+              <a:rPr lang="en-US" sz="2799" dirty="0">
+                <a:solidFill>
+                  <a:srgbClr val="005FC2"/>
                 </a:solidFill>
                 <a:latin typeface="Koho"/>
                 <a:ea typeface="Koho"/>
                 <a:cs typeface="Koho"/>
                 <a:sym typeface="Koho"/>
               </a:rPr>
-              <a:t>CodePulse is a full-stack web application built with Next.js for the frontend and Spring Boot for the backend. The system analyzes coding performance data from platforms like Codeforces and LeetCode, automatically classifies problems by topic, and generates personalized insights and recommendations. Key features include interactive dashboards for visualizing progress, advanced analytics for identifying strengths and weaknesses, and secure user management with JWT authentication. This unified approach transforms scattered statistics into actionable guidance for efficient skill development.</a:t>
+              <a:t>Progress Tracking :</a:t>
+            </a:r>
+          </a:p>
+          <a:p>
+            <a:pPr marL="0" lvl="0" indent="0" algn="just">
+              <a:lnSpc>
+                <a:spcPts val="3191"/>
+              </a:lnSpc>
+            </a:pPr>
+            <a:r>
+              <a:rPr lang="en-US" sz="2799" dirty="0">
+                <a:solidFill>
+                  <a:srgbClr val="005FC2"/>
+                </a:solidFill>
+                <a:latin typeface="Koho"/>
+                <a:ea typeface="Koho"/>
+                <a:cs typeface="Koho"/>
+                <a:sym typeface="Koho"/>
+              </a:rPr>
+              <a:t>Monitor improvement over time with historical data analysis. Track solved problems, rating changes, and skill development milestones to measure your coding journey.</a:t>
             </a:r>
           </a:p>
         </p:txBody>
@@ -7804,8 +6364,8 @@
         </p:nvSpPr>
         <p:spPr>
           <a:xfrm>
-            <a:off x="1456048" y="1974386"/>
-            <a:ext cx="10894849" cy="1238210"/>
+            <a:off x="4301067" y="3882274"/>
+            <a:ext cx="4656668" cy="3282950"/>
           </a:xfrm>
           <a:prstGeom prst="rect">
             <a:avLst/>
@@ -7817,22 +6377,41 @@
           </a:bodyPr>
           <a:lstStyle/>
           <a:p>
-            <a:pPr marL="0" lvl="0" indent="0" algn="l">
+            <a:pPr marL="0" lvl="0" indent="0" algn="just">
               <a:lnSpc>
-                <a:spcPts val="8543"/>
+                <a:spcPts val="3191"/>
               </a:lnSpc>
             </a:pPr>
             <a:r>
-              <a:rPr lang="en-US" sz="7494" b="1">
+              <a:rPr lang="en-US" sz="2799" dirty="0">
                 <a:solidFill>
                   <a:srgbClr val="005FC2"/>
                 </a:solidFill>
-                <a:latin typeface="Neo Tech Bold"/>
-                <a:ea typeface="Neo Tech Bold"/>
-                <a:cs typeface="Neo Tech Bold"/>
-                <a:sym typeface="Neo Tech Bold"/>
-              </a:rPr>
-              <a:t>PROPOSED SOLUTION</a:t>
+                <a:latin typeface="Koho"/>
+                <a:ea typeface="Koho"/>
+                <a:cs typeface="Koho"/>
+                <a:sym typeface="Koho"/>
+              </a:rPr>
+              <a:t>Recommendation Engine :</a:t>
+            </a:r>
+          </a:p>
+          <a:p>
+            <a:pPr marL="0" lvl="0" indent="0" algn="just">
+              <a:lnSpc>
+                <a:spcPts val="3191"/>
+              </a:lnSpc>
+            </a:pPr>
+            <a:r>
+              <a:rPr lang="en-US" sz="2799" dirty="0">
+                <a:solidFill>
+                  <a:srgbClr val="005FC2"/>
+                </a:solidFill>
+                <a:latin typeface="Koho"/>
+                <a:ea typeface="Koho"/>
+                <a:cs typeface="Koho"/>
+                <a:sym typeface="Koho"/>
+              </a:rPr>
+              <a:t>Intelligent problem suggestions based on detected weaknesses. Analyzes your performance patterns to recommend targeted practice problems for maximum improvement.</a:t>
             </a:r>
           </a:p>
         </p:txBody>
@@ -7848,6 +6427,14 @@
 <file path=ppt/slides/slide9.xml><?xml version="1.0" encoding="utf-8"?>
 <p:sld xmlns:a="http://schemas.openxmlformats.org/drawingml/2006/main" xmlns:r="http://schemas.openxmlformats.org/officeDocument/2006/relationships" xmlns:p="http://schemas.openxmlformats.org/presentationml/2006/main">
   <p:cSld>
+    <p:bg>
+      <p:bgPr>
+        <a:solidFill>
+          <a:srgbClr val="005FC2"/>
+        </a:solidFill>
+        <a:effectLst/>
+      </p:bgPr>
+    </p:bg>
     <p:spTree>
       <p:nvGrpSpPr>
         <p:cNvPr id="1" name=""/>
@@ -7864,14 +6451,60 @@
       </p:grpSpPr>
       <p:sp>
         <p:nvSpPr>
-          <p:cNvPr id="2" name="TextBox 2"/>
+          <p:cNvPr id="4" name="Freeform 4"/>
+          <p:cNvSpPr/>
+          <p:nvPr/>
+        </p:nvSpPr>
+        <p:spPr>
+          <a:xfrm>
+            <a:off x="3486955" y="4337680"/>
+            <a:ext cx="980748" cy="1030166"/>
+          </a:xfrm>
+          <a:custGeom>
+            <a:avLst/>
+            <a:gdLst/>
+            <a:ahLst/>
+            <a:cxnLst/>
+            <a:rect l="l" t="t" r="r" b="b"/>
+            <a:pathLst>
+              <a:path w="980748" h="1030166">
+                <a:moveTo>
+                  <a:pt x="0" y="0"/>
+                </a:moveTo>
+                <a:lnTo>
+                  <a:pt x="980749" y="0"/>
+                </a:lnTo>
+                <a:lnTo>
+                  <a:pt x="980749" y="1030166"/>
+                </a:lnTo>
+                <a:lnTo>
+                  <a:pt x="0" y="1030166"/>
+                </a:lnTo>
+                <a:lnTo>
+                  <a:pt x="0" y="0"/>
+                </a:lnTo>
+                <a:close/>
+              </a:path>
+            </a:pathLst>
+          </a:custGeom>
+          <a:blipFill>
+            <a:blip r:embed="rId2"/>
+            <a:stretch>
+              <a:fillRect/>
+            </a:stretch>
+          </a:blipFill>
+        </p:spPr>
+      </p:sp>
+      <p:sp>
+        <p:nvSpPr>
+          <p:cNvPr id="5" name="TextBox 5"/>
           <p:cNvSpPr txBox="1"/>
           <p:nvPr/>
         </p:nvSpPr>
         <p:spPr>
           <a:xfrm>
-            <a:off x="3953809" y="1685119"/>
-            <a:ext cx="10894849" cy="1238210"/>
+            <a:off x="4336389" y="1587629"/>
+            <a:ext cx="9615222" cy="1238250"/>
           </a:xfrm>
           <a:prstGeom prst="rect">
             <a:avLst/>
@@ -7885,34 +6518,34 @@
           <a:p>
             <a:pPr marL="0" lvl="0" indent="0" algn="ctr">
               <a:lnSpc>
-                <a:spcPts val="8543"/>
+                <a:spcPts val="8549"/>
               </a:lnSpc>
             </a:pPr>
             <a:r>
-              <a:rPr lang="en-US" sz="7494" b="1">
-                <a:solidFill>
-                  <a:srgbClr val="005FC2"/>
+              <a:rPr lang="en-US" sz="7500" b="1">
+                <a:solidFill>
+                  <a:srgbClr val="FFFFFF"/>
                 </a:solidFill>
                 <a:latin typeface="Neo Tech Bold"/>
                 <a:ea typeface="Neo Tech Bold"/>
                 <a:cs typeface="Neo Tech Bold"/>
                 <a:sym typeface="Neo Tech Bold"/>
               </a:rPr>
-              <a:t>SYSTEM MODULES</a:t>
-            </a:r>
-          </a:p>
-        </p:txBody>
-      </p:sp>
-      <p:sp>
-        <p:nvSpPr>
-          <p:cNvPr id="3" name="TextBox 3"/>
+              <a:t>SYSTEM WORKFLOW</a:t>
+            </a:r>
+          </a:p>
+        </p:txBody>
+      </p:sp>
+      <p:sp>
+        <p:nvSpPr>
+          <p:cNvPr id="6" name="TextBox 6"/>
           <p:cNvSpPr txBox="1"/>
           <p:nvPr/>
         </p:nvSpPr>
         <p:spPr>
           <a:xfrm>
-            <a:off x="7642726" y="5265039"/>
-            <a:ext cx="4230126" cy="3593211"/>
+            <a:off x="4813846" y="4315722"/>
+            <a:ext cx="10580784" cy="1231106"/>
           </a:xfrm>
           <a:prstGeom prst="rect">
             <a:avLst/>
@@ -7924,55 +6557,77 @@
           </a:bodyPr>
           <a:lstStyle/>
           <a:p>
-            <a:pPr marL="0" lvl="0" indent="0" algn="l">
+            <a:pPr marL="0" lvl="0" indent="0" algn="just">
               <a:lnSpc>
                 <a:spcPts val="3191"/>
               </a:lnSpc>
             </a:pPr>
             <a:r>
-              <a:rPr lang="en-US" sz="2799">
-                <a:solidFill>
-                  <a:srgbClr val="005FC2"/>
+              <a:rPr lang="en-US" sz="2799" dirty="0">
+                <a:solidFill>
+                  <a:srgbClr val="FFFFFF"/>
                 </a:solidFill>
                 <a:latin typeface="Koho"/>
                 <a:ea typeface="Koho"/>
                 <a:cs typeface="Koho"/>
                 <a:sym typeface="Koho"/>
               </a:rPr>
-              <a:t>Performance Analysis</a:t>
-            </a:r>
-          </a:p>
-          <a:p>
-            <a:pPr marL="0" lvl="0" indent="0" algn="l">
+              <a:t>Data Flow: User → Fetch Data → Store → Analyze → Output. This pipeline ensures seamless data collection from coding platforms and transforms raw submissions into meaningful performance metrics.</a:t>
+            </a:r>
+          </a:p>
+        </p:txBody>
+      </p:sp>
+      <p:sp>
+        <p:nvSpPr>
+          <p:cNvPr id="7" name="TextBox 7"/>
+          <p:cNvSpPr txBox="1"/>
+          <p:nvPr/>
+        </p:nvSpPr>
+        <p:spPr>
+          <a:xfrm>
+            <a:off x="4813846" y="5856350"/>
+            <a:ext cx="10580784" cy="1231106"/>
+          </a:xfrm>
+          <a:prstGeom prst="rect">
+            <a:avLst/>
+          </a:prstGeom>
+        </p:spPr>
+        <p:txBody>
+          <a:bodyPr lIns="0" tIns="0" rIns="0" bIns="0" rtlCol="0" anchor="t">
+            <a:spAutoFit/>
+          </a:bodyPr>
+          <a:lstStyle/>
+          <a:p>
+            <a:pPr marL="0" lvl="0" indent="0" algn="just">
               <a:lnSpc>
                 <a:spcPts val="3191"/>
               </a:lnSpc>
             </a:pPr>
             <a:r>
-              <a:rPr lang="en-US" sz="2799">
-                <a:solidFill>
-                  <a:srgbClr val="005FC2"/>
+              <a:rPr lang="en-US" sz="2799" dirty="0">
+                <a:solidFill>
+                  <a:srgbClr val="FFFFFF"/>
                 </a:solidFill>
                 <a:latin typeface="Koho"/>
                 <a:ea typeface="Koho"/>
                 <a:cs typeface="Koho"/>
                 <a:sym typeface="Koho"/>
               </a:rPr>
-              <a:t>Analyzes coding submissions to calculate success rates, time complexity patterns, and difficulty-based metrics. Generates actionable insights from raw performance data.</a:t>
-            </a:r>
-          </a:p>
-        </p:txBody>
-      </p:sp>
-      <p:sp>
-        <p:nvSpPr>
-          <p:cNvPr id="6" name="TextBox 6"/>
+              <a:t>Analysis Flow: Raw Data → Classify → Map Difficulty → Calculate Metrics → Generate Insights. Each submission is categorized by topic and difficulty level to produce actionable analytics.</a:t>
+            </a:r>
+          </a:p>
+        </p:txBody>
+      </p:sp>
+      <p:sp>
+        <p:nvSpPr>
+          <p:cNvPr id="8" name="TextBox 8"/>
           <p:cNvSpPr txBox="1"/>
           <p:nvPr/>
         </p:nvSpPr>
         <p:spPr>
           <a:xfrm>
-            <a:off x="12229407" y="3866959"/>
-            <a:ext cx="4656668" cy="2793111"/>
+            <a:off x="4813846" y="7401685"/>
+            <a:ext cx="10580784" cy="1641475"/>
           </a:xfrm>
           <a:prstGeom prst="rect">
             <a:avLst/>
@@ -7984,104 +6639,117 @@
           </a:bodyPr>
           <a:lstStyle/>
           <a:p>
-            <a:pPr marL="0" lvl="0" indent="0" algn="l">
+            <a:pPr marL="0" lvl="0" indent="0" algn="just">
               <a:lnSpc>
                 <a:spcPts val="3191"/>
               </a:lnSpc>
             </a:pPr>
             <a:r>
-              <a:rPr lang="en-US" sz="2799">
-                <a:solidFill>
-                  <a:srgbClr val="005FC2"/>
+              <a:rPr lang="en-US" sz="2799" dirty="0">
+                <a:solidFill>
+                  <a:srgbClr val="FFFFFF"/>
                 </a:solidFill>
                 <a:latin typeface="Koho"/>
                 <a:ea typeface="Koho"/>
                 <a:cs typeface="Koho"/>
                 <a:sym typeface="Koho"/>
               </a:rPr>
-              <a:t>Topic Classification</a:t>
-            </a:r>
-          </a:p>
-          <a:p>
-            <a:pPr marL="0" lvl="0" indent="0" algn="l">
-              <a:lnSpc>
-                <a:spcPts val="3191"/>
-              </a:lnSpc>
-            </a:pPr>
-            <a:r>
-              <a:rPr lang="en-US" sz="2799">
-                <a:solidFill>
-                  <a:srgbClr val="005FC2"/>
-                </a:solidFill>
-                <a:latin typeface="Koho"/>
-                <a:ea typeface="Koho"/>
-                <a:cs typeface="Koho"/>
-                <a:sym typeface="Koho"/>
-              </a:rPr>
-              <a:t>Automatically categorizes problems by topic areas (arrays, graphs, DP, etc.). Maps user performance to specific skill domains for targeted improvement.</a:t>
-            </a:r>
-          </a:p>
-        </p:txBody>
-      </p:sp>
-      <p:sp>
-        <p:nvSpPr>
-          <p:cNvPr id="7" name="TextBox 7"/>
-          <p:cNvSpPr txBox="1"/>
+              <a:t>Recommendation Flow: Detect Weakness → Suggest Problems → User Solves → Feedback Loop Updates Model. The system continuously learns from user progress to refine future recommendations.</a:t>
+            </a:r>
+          </a:p>
+        </p:txBody>
+      </p:sp>
+      <p:sp>
+        <p:nvSpPr>
+          <p:cNvPr id="9" name="Freeform 9"/>
+          <p:cNvSpPr/>
           <p:nvPr/>
         </p:nvSpPr>
         <p:spPr>
           <a:xfrm>
-            <a:off x="2629502" y="3866959"/>
-            <a:ext cx="4656668" cy="3193161"/>
-          </a:xfrm>
-          <a:prstGeom prst="rect">
+            <a:off x="3579827" y="5893693"/>
+            <a:ext cx="845428" cy="833787"/>
+          </a:xfrm>
+          <a:custGeom>
             <a:avLst/>
-          </a:prstGeom>
-        </p:spPr>
-        <p:txBody>
-          <a:bodyPr lIns="0" tIns="0" rIns="0" bIns="0" rtlCol="0" anchor="t">
-            <a:spAutoFit/>
-          </a:bodyPr>
-          <a:lstStyle/>
-          <a:p>
-            <a:pPr marL="0" lvl="0" indent="0" algn="l">
-              <a:lnSpc>
-                <a:spcPts val="3191"/>
-              </a:lnSpc>
-            </a:pPr>
-            <a:r>
-              <a:rPr lang="en-US" sz="2799">
-                <a:solidFill>
-                  <a:srgbClr val="005FC2"/>
-                </a:solidFill>
-                <a:latin typeface="Koho"/>
-                <a:ea typeface="Koho"/>
-                <a:cs typeface="Koho"/>
-                <a:sym typeface="Koho"/>
-              </a:rPr>
-              <a:t>Authentication &amp; Data Collection</a:t>
-            </a:r>
-          </a:p>
-          <a:p>
-            <a:pPr marL="0" lvl="0" indent="0" algn="l">
-              <a:lnSpc>
-                <a:spcPts val="3191"/>
-              </a:lnSpc>
-            </a:pPr>
-            <a:r>
-              <a:rPr lang="en-US" sz="2799">
-                <a:solidFill>
-                  <a:srgbClr val="005FC2"/>
-                </a:solidFill>
-                <a:latin typeface="Koho"/>
-                <a:ea typeface="Koho"/>
-                <a:cs typeface="Koho"/>
-                <a:sym typeface="Koho"/>
-              </a:rPr>
-              <a:t>Secure JWT-based user authentication and profile management. API integration with Codeforces and LeetCode to fetch and store coding submissions.</a:t>
-            </a:r>
-          </a:p>
-        </p:txBody>
+            <a:gdLst/>
+            <a:ahLst/>
+            <a:cxnLst/>
+            <a:rect l="l" t="t" r="r" b="b"/>
+            <a:pathLst>
+              <a:path w="845428" h="833787">
+                <a:moveTo>
+                  <a:pt x="0" y="0"/>
+                </a:moveTo>
+                <a:lnTo>
+                  <a:pt x="845428" y="0"/>
+                </a:lnTo>
+                <a:lnTo>
+                  <a:pt x="845428" y="833787"/>
+                </a:lnTo>
+                <a:lnTo>
+                  <a:pt x="0" y="833787"/>
+                </a:lnTo>
+                <a:lnTo>
+                  <a:pt x="0" y="0"/>
+                </a:lnTo>
+                <a:close/>
+              </a:path>
+            </a:pathLst>
+          </a:custGeom>
+          <a:blipFill>
+            <a:blip r:embed="rId3"/>
+            <a:stretch>
+              <a:fillRect/>
+            </a:stretch>
+          </a:blipFill>
+        </p:spPr>
+      </p:sp>
+      <p:sp>
+        <p:nvSpPr>
+          <p:cNvPr id="10" name="Freeform 10"/>
+          <p:cNvSpPr/>
+          <p:nvPr/>
+        </p:nvSpPr>
+        <p:spPr>
+          <a:xfrm>
+            <a:off x="3771691" y="7627362"/>
+            <a:ext cx="578042" cy="926382"/>
+          </a:xfrm>
+          <a:custGeom>
+            <a:avLst/>
+            <a:gdLst/>
+            <a:ahLst/>
+            <a:cxnLst/>
+            <a:rect l="l" t="t" r="r" b="b"/>
+            <a:pathLst>
+              <a:path w="578042" h="926382">
+                <a:moveTo>
+                  <a:pt x="0" y="0"/>
+                </a:moveTo>
+                <a:lnTo>
+                  <a:pt x="578042" y="0"/>
+                </a:lnTo>
+                <a:lnTo>
+                  <a:pt x="578042" y="926382"/>
+                </a:lnTo>
+                <a:lnTo>
+                  <a:pt x="0" y="926382"/>
+                </a:lnTo>
+                <a:lnTo>
+                  <a:pt x="0" y="0"/>
+                </a:lnTo>
+                <a:close/>
+              </a:path>
+            </a:pathLst>
+          </a:custGeom>
+          <a:blipFill>
+            <a:blip r:embed="rId4"/>
+            <a:stretch>
+              <a:fillRect/>
+            </a:stretch>
+          </a:blipFill>
+        </p:spPr>
       </p:sp>
     </p:spTree>
   </p:cSld>
@@ -8372,4 +7040,299 @@
   <a:objectDefaults/>
   <a:extraClrSchemeLst/>
 </a:theme>
+</file>
+
+<file path=ppt/theme/theme2.xml><?xml version="1.0" encoding="utf-8"?>
+<a:theme xmlns:a="http://schemas.openxmlformats.org/drawingml/2006/main" name="Office Theme">
+  <a:themeElements>
+    <a:clrScheme name="Office">
+      <a:dk1>
+        <a:sysClr val="windowText" lastClr="000000"/>
+      </a:dk1>
+      <a:lt1>
+        <a:sysClr val="window" lastClr="FFFFFF"/>
+      </a:lt1>
+      <a:dk2>
+        <a:srgbClr val="44546A"/>
+      </a:dk2>
+      <a:lt2>
+        <a:srgbClr val="E7E6E6"/>
+      </a:lt2>
+      <a:accent1>
+        <a:srgbClr val="4472C4"/>
+      </a:accent1>
+      <a:accent2>
+        <a:srgbClr val="ED7D31"/>
+      </a:accent2>
+      <a:accent3>
+        <a:srgbClr val="A5A5A5"/>
+      </a:accent3>
+      <a:accent4>
+        <a:srgbClr val="FFC000"/>
+      </a:accent4>
+      <a:accent5>
+        <a:srgbClr val="5B9BD5"/>
+      </a:accent5>
+      <a:accent6>
+        <a:srgbClr val="70AD47"/>
+      </a:accent6>
+      <a:hlink>
+        <a:srgbClr val="0563C1"/>
+      </a:hlink>
+      <a:folHlink>
+        <a:srgbClr val="954F72"/>
+      </a:folHlink>
+    </a:clrScheme>
+    <a:fontScheme name="Office">
+      <a:majorFont>
+        <a:latin typeface="Calibri Light" panose="020F0302020204030204"/>
+        <a:ea typeface=""/>
+        <a:cs typeface=""/>
+        <a:font script="Jpan" typeface="游ゴシック Light"/>
+        <a:font script="Hang" typeface="맑은 고딕"/>
+        <a:font script="Hans" typeface="等线 Light"/>
+        <a:font script="Hant" typeface="新細明體"/>
+        <a:font script="Arab" typeface="Times New Roman"/>
+        <a:font script="Hebr" typeface="Times New Roman"/>
+        <a:font script="Thai" typeface="Angsana New"/>
+        <a:font script="Ethi" typeface="Nyala"/>
+        <a:font script="Beng" typeface="Vrinda"/>
+        <a:font script="Gujr" typeface="Shruti"/>
+        <a:font script="Khmr" typeface="MoolBoran"/>
+        <a:font script="Knda" typeface="Tunga"/>
+        <a:font script="Guru" typeface="Raavi"/>
+        <a:font script="Cans" typeface="Euphemia"/>
+        <a:font script="Cher" typeface="Plantagenet Cherokee"/>
+        <a:font script="Yiii" typeface="Microsoft Yi Baiti"/>
+        <a:font script="Tibt" typeface="Microsoft Himalaya"/>
+        <a:font script="Thaa" typeface="MV Boli"/>
+        <a:font script="Deva" typeface="Mangal"/>
+        <a:font script="Telu" typeface="Gautami"/>
+        <a:font script="Taml" typeface="Latha"/>
+        <a:font script="Syrc" typeface="Estrangelo Edessa"/>
+        <a:font script="Orya" typeface="Kalinga"/>
+        <a:font script="Mlym" typeface="Kartika"/>
+        <a:font script="Laoo" typeface="DokChampa"/>
+        <a:font script="Sinh" typeface="Iskoola Pota"/>
+        <a:font script="Mong" typeface="Mongolian Baiti"/>
+        <a:font script="Viet" typeface="Times New Roman"/>
+        <a:font script="Uigh" typeface="Microsoft Uighur"/>
+        <a:font script="Geor" typeface="Sylfaen"/>
+        <a:font script="Armn" typeface="Arial"/>
+        <a:font script="Bugi" typeface="Leelawadee UI"/>
+        <a:font script="Bopo" typeface="Microsoft JhengHei"/>
+        <a:font script="Java" typeface="Javanese Text"/>
+        <a:font script="Lisu" typeface="Segoe UI"/>
+        <a:font script="Mymr" typeface="Myanmar Text"/>
+        <a:font script="Nkoo" typeface="Ebrima"/>
+        <a:font script="Olck" typeface="Nirmala UI"/>
+        <a:font script="Osma" typeface="Ebrima"/>
+        <a:font script="Phag" typeface="Phagspa"/>
+        <a:font script="Syrn" typeface="Estrangelo Edessa"/>
+        <a:font script="Syrj" typeface="Estrangelo Edessa"/>
+        <a:font script="Syre" typeface="Estrangelo Edessa"/>
+        <a:font script="Sora" typeface="Nirmala UI"/>
+        <a:font script="Tale" typeface="Microsoft Tai Le"/>
+        <a:font script="Talu" typeface="Microsoft New Tai Lue"/>
+        <a:font script="Tfng" typeface="Ebrima"/>
+      </a:majorFont>
+      <a:minorFont>
+        <a:latin typeface="Calibri" panose="020F0502020204030204"/>
+        <a:ea typeface=""/>
+        <a:cs typeface=""/>
+        <a:font script="Jpan" typeface="游ゴシック"/>
+        <a:font script="Hang" typeface="맑은 고딕"/>
+        <a:font script="Hans" typeface="等线"/>
+        <a:font script="Hant" typeface="新細明體"/>
+        <a:font script="Arab" typeface="Arial"/>
+        <a:font script="Hebr" typeface="Arial"/>
+        <a:font script="Thai" typeface="Cordia New"/>
+        <a:font script="Ethi" typeface="Nyala"/>
+        <a:font script="Beng" typeface="Vrinda"/>
+        <a:font script="Gujr" typeface="Shruti"/>
+        <a:font script="Khmr" typeface="DaunPenh"/>
+        <a:font script="Knda" typeface="Tunga"/>
+        <a:font script="Guru" typeface="Raavi"/>
+        <a:font script="Cans" typeface="Euphemia"/>
+        <a:font script="Cher" typeface="Plantagenet Cherokee"/>
+        <a:font script="Yiii" typeface="Microsoft Yi Baiti"/>
+        <a:font script="Tibt" typeface="Microsoft Himalaya"/>
+        <a:font script="Thaa" typeface="MV Boli"/>
+        <a:font script="Deva" typeface="Mangal"/>
+        <a:font script="Telu" typeface="Gautami"/>
+        <a:font script="Taml" typeface="Latha"/>
+        <a:font script="Syrc" typeface="Estrangelo Edessa"/>
+        <a:font script="Orya" typeface="Kalinga"/>
+        <a:font script="Mlym" typeface="Kartika"/>
+        <a:font script="Laoo" typeface="DokChampa"/>
+        <a:font script="Sinh" typeface="Iskoola Pota"/>
+        <a:font script="Mong" typeface="Mongolian Baiti"/>
+        <a:font script="Viet" typeface="Arial"/>
+        <a:font script="Uigh" typeface="Microsoft Uighur"/>
+        <a:font script="Geor" typeface="Sylfaen"/>
+        <a:font script="Armn" typeface="Arial"/>
+        <a:font script="Bugi" typeface="Leelawadee UI"/>
+        <a:font script="Bopo" typeface="Microsoft JhengHei"/>
+        <a:font script="Java" typeface="Javanese Text"/>
+        <a:font script="Lisu" typeface="Segoe UI"/>
+        <a:font script="Mymr" typeface="Myanmar Text"/>
+        <a:font script="Nkoo" typeface="Ebrima"/>
+        <a:font script="Olck" typeface="Nirmala UI"/>
+        <a:font script="Osma" typeface="Ebrima"/>
+        <a:font script="Phag" typeface="Phagspa"/>
+        <a:font script="Syrn" typeface="Estrangelo Edessa"/>
+        <a:font script="Syrj" typeface="Estrangelo Edessa"/>
+        <a:font script="Syre" typeface="Estrangelo Edessa"/>
+        <a:font script="Sora" typeface="Nirmala UI"/>
+        <a:font script="Tale" typeface="Microsoft Tai Le"/>
+        <a:font script="Talu" typeface="Microsoft New Tai Lue"/>
+        <a:font script="Tfng" typeface="Ebrima"/>
+      </a:minorFont>
+    </a:fontScheme>
+    <a:fmtScheme name="Office">
+      <a:fillStyleLst>
+        <a:solidFill>
+          <a:schemeClr val="phClr"/>
+        </a:solidFill>
+        <a:gradFill rotWithShape="1">
+          <a:gsLst>
+            <a:gs pos="0">
+              <a:schemeClr val="phClr">
+                <a:lumMod val="110000"/>
+                <a:satMod val="105000"/>
+                <a:tint val="67000"/>
+              </a:schemeClr>
+            </a:gs>
+            <a:gs pos="50000">
+              <a:schemeClr val="phClr">
+                <a:lumMod val="105000"/>
+                <a:satMod val="103000"/>
+                <a:tint val="73000"/>
+              </a:schemeClr>
+            </a:gs>
+            <a:gs pos="100000">
+              <a:schemeClr val="phClr">
+                <a:lumMod val="105000"/>
+                <a:satMod val="109000"/>
+                <a:tint val="81000"/>
+              </a:schemeClr>
+            </a:gs>
+          </a:gsLst>
+          <a:lin ang="5400000" scaled="0"/>
+        </a:gradFill>
+        <a:gradFill rotWithShape="1">
+          <a:gsLst>
+            <a:gs pos="0">
+              <a:schemeClr val="phClr">
+                <a:satMod val="103000"/>
+                <a:lumMod val="102000"/>
+                <a:tint val="94000"/>
+              </a:schemeClr>
+            </a:gs>
+            <a:gs pos="50000">
+              <a:schemeClr val="phClr">
+                <a:satMod val="110000"/>
+                <a:lumMod val="100000"/>
+                <a:shade val="100000"/>
+              </a:schemeClr>
+            </a:gs>
+            <a:gs pos="100000">
+              <a:schemeClr val="phClr">
+                <a:lumMod val="99000"/>
+                <a:satMod val="120000"/>
+                <a:shade val="78000"/>
+              </a:schemeClr>
+            </a:gs>
+          </a:gsLst>
+          <a:lin ang="5400000" scaled="0"/>
+        </a:gradFill>
+      </a:fillStyleLst>
+      <a:lnStyleLst>
+        <a:ln w="6350" cap="flat" cmpd="sng" algn="ctr">
+          <a:solidFill>
+            <a:schemeClr val="phClr"/>
+          </a:solidFill>
+          <a:prstDash val="solid"/>
+          <a:miter lim="800000"/>
+        </a:ln>
+        <a:ln w="12700" cap="flat" cmpd="sng" algn="ctr">
+          <a:solidFill>
+            <a:schemeClr val="phClr"/>
+          </a:solidFill>
+          <a:prstDash val="solid"/>
+          <a:miter lim="800000"/>
+        </a:ln>
+        <a:ln w="19050" cap="flat" cmpd="sng" algn="ctr">
+          <a:solidFill>
+            <a:schemeClr val="phClr"/>
+          </a:solidFill>
+          <a:prstDash val="solid"/>
+          <a:miter lim="800000"/>
+        </a:ln>
+      </a:lnStyleLst>
+      <a:effectStyleLst>
+        <a:effectStyle>
+          <a:effectLst/>
+        </a:effectStyle>
+        <a:effectStyle>
+          <a:effectLst/>
+        </a:effectStyle>
+        <a:effectStyle>
+          <a:effectLst>
+            <a:outerShdw blurRad="57150" dist="19050" dir="5400000" algn="ctr" rotWithShape="0">
+              <a:srgbClr val="000000">
+                <a:alpha val="63000"/>
+              </a:srgbClr>
+            </a:outerShdw>
+          </a:effectLst>
+        </a:effectStyle>
+      </a:effectStyleLst>
+      <a:bgFillStyleLst>
+        <a:solidFill>
+          <a:schemeClr val="phClr"/>
+        </a:solidFill>
+        <a:solidFill>
+          <a:schemeClr val="phClr">
+            <a:tint val="95000"/>
+            <a:satMod val="170000"/>
+          </a:schemeClr>
+        </a:solidFill>
+        <a:gradFill rotWithShape="1">
+          <a:gsLst>
+            <a:gs pos="0">
+              <a:schemeClr val="phClr">
+                <a:tint val="93000"/>
+                <a:satMod val="150000"/>
+                <a:shade val="98000"/>
+                <a:lumMod val="102000"/>
+              </a:schemeClr>
+            </a:gs>
+            <a:gs pos="50000">
+              <a:schemeClr val="phClr">
+                <a:tint val="98000"/>
+                <a:satMod val="130000"/>
+                <a:shade val="90000"/>
+                <a:lumMod val="103000"/>
+              </a:schemeClr>
+            </a:gs>
+            <a:gs pos="100000">
+              <a:schemeClr val="phClr">
+                <a:shade val="63000"/>
+                <a:satMod val="120000"/>
+              </a:schemeClr>
+            </a:gs>
+          </a:gsLst>
+          <a:lin ang="5400000" scaled="0"/>
+        </a:gradFill>
+      </a:bgFillStyleLst>
+    </a:fmtScheme>
+  </a:themeElements>
+  <a:objectDefaults/>
+  <a:extraClrSchemeLst/>
+  <a:extLst>
+    <a:ext uri="{05A4C25C-085E-4340-85A3-A5531E510DB2}">
+      <thm15:themeFamily xmlns:thm15="http://schemas.microsoft.com/office/thememl/2012/main" name="Office Theme" id="{62F939B6-93AF-4DB8-9C6B-D6C7DFDC589F}" vid="{4A3C46E8-61CC-4603-A589-7422A47A8E4A}"/>
+    </a:ext>
+  </a:extLst>
+</a:theme>
 </file>